--- a/MANDOROS_Global_Academic_Presentation.pptx
+++ b/MANDOROS_Global_Academic_Presentation.pptx
@@ -17,6 +17,7 @@
     <p:sldId id="265" r:id="rId16"/>
     <p:sldId id="266" r:id="rId17"/>
     <p:sldId id="267" r:id="rId18"/>
+    <p:sldId id="268" r:id="rId19"/>
   </p:sldIdLst>
   <p:sldSz cx="12191695" cy="6858000" type="screen4x3"/>
   <p:notesSz cx="6858000" cy="9144000"/>
@@ -4900,6 +4901,630 @@
             </a:pPr>
             <a:r>
               <a:t>SLIDE 12 / 12</a:t>
+            </a:r>
+          </a:p>
+        </p:txBody>
+      </p:sp>
+    </p:spTree>
+  </p:cSld>
+  <p:clrMapOvr>
+    <a:masterClrMapping/>
+  </p:clrMapOvr>
+</p:sld>
+</file>
+
+<file path=ppt/slides/slide13.xml><?xml version="1.0" encoding="utf-8"?>
+<p:sld xmlns:a="http://schemas.openxmlformats.org/drawingml/2006/main" xmlns:p="http://schemas.openxmlformats.org/presentationml/2006/main" xmlns:r="http://schemas.openxmlformats.org/officeDocument/2006/relationships">
+  <p:cSld>
+    <p:bg>
+      <p:bgPr>
+        <a:solidFill>
+          <a:srgbClr val="0B1120"/>
+        </a:solidFill>
+        <a:effectLst/>
+      </p:bgPr>
+    </p:bg>
+    <p:spTree>
+      <p:nvGrpSpPr>
+        <p:cNvPr id="1" name=""/>
+        <p:cNvGrpSpPr/>
+        <p:nvPr/>
+      </p:nvGrpSpPr>
+      <p:grpSpPr/>
+      <p:sp>
+        <p:nvSpPr>
+          <p:cNvPr id="2" name="TextBox 1"/>
+          <p:cNvSpPr txBox="1"/>
+          <p:nvPr/>
+        </p:nvSpPr>
+        <p:spPr>
+          <a:xfrm>
+            <a:off x="731520" y="457200"/>
+            <a:ext cx="7315200" cy="365760"/>
+          </a:xfrm>
+          <a:prstGeom prst="rect">
+            <a:avLst/>
+          </a:prstGeom>
+          <a:noFill/>
+        </p:spPr>
+        <p:txBody>
+          <a:bodyPr wrap="square">
+            <a:spAutoFit/>
+          </a:bodyPr>
+          <a:lstStyle/>
+          <a:p>
+            <a:pPr>
+              <a:defRPr sz="1000" b="1">
+                <a:solidFill>
+                  <a:srgbClr val="00F5D4"/>
+                </a:solidFill>
+                <a:latin typeface="Arial"/>
+              </a:defRPr>
+            </a:pPr>
+            <a:r>
+              <a:t>CLINICAL AI GOVERNANCE &amp; ARCHITECTURE</a:t>
+            </a:r>
+          </a:p>
+        </p:txBody>
+      </p:sp>
+      <p:sp>
+        <p:nvSpPr>
+          <p:cNvPr id="3" name="TextBox 2"/>
+          <p:cNvSpPr txBox="1"/>
+          <p:nvPr/>
+        </p:nvSpPr>
+        <p:spPr>
+          <a:xfrm>
+            <a:off x="8686800" y="457200"/>
+            <a:ext cx="2743200" cy="365760"/>
+          </a:xfrm>
+          <a:prstGeom prst="rect">
+            <a:avLst/>
+          </a:prstGeom>
+          <a:noFill/>
+        </p:spPr>
+        <p:txBody>
+          <a:bodyPr wrap="none">
+            <a:spAutoFit/>
+          </a:bodyPr>
+          <a:lstStyle/>
+          <a:p>
+            <a:pPr algn="r">
+              <a:defRPr sz="1000">
+                <a:solidFill>
+                  <a:srgbClr val="94A3B8"/>
+                </a:solidFill>
+                <a:latin typeface="Arial"/>
+              </a:defRPr>
+            </a:pPr>
+            <a:r>
+              <a:t>MANDOROS PROTOCOL v2.0</a:t>
+            </a:r>
+          </a:p>
+        </p:txBody>
+      </p:sp>
+      <p:sp>
+        <p:nvSpPr>
+          <p:cNvPr id="4" name="TextBox 3"/>
+          <p:cNvSpPr txBox="1"/>
+          <p:nvPr/>
+        </p:nvSpPr>
+        <p:spPr>
+          <a:xfrm>
+            <a:off x="731520" y="777240"/>
+            <a:ext cx="10058400" cy="731520"/>
+          </a:xfrm>
+          <a:prstGeom prst="rect">
+            <a:avLst/>
+          </a:prstGeom>
+          <a:noFill/>
+        </p:spPr>
+        <p:txBody>
+          <a:bodyPr wrap="square">
+            <a:spAutoFit/>
+          </a:bodyPr>
+          <a:lstStyle/>
+          <a:p>
+            <a:pPr>
+              <a:defRPr sz="2200" b="1">
+                <a:solidFill>
+                  <a:srgbClr val="F8FAFC"/>
+                </a:solidFill>
+                <a:latin typeface="Arial"/>
+              </a:defRPr>
+            </a:pPr>
+            <a:r>
+              <a:t>Two-Phase Architecture &amp; 10/10 Programmatic Quality Gate</a:t>
+            </a:r>
+          </a:p>
+          <a:p>
+            <a:pPr>
+              <a:defRPr sz="1200">
+                <a:solidFill>
+                  <a:srgbClr val="94A3B8"/>
+                </a:solidFill>
+                <a:latin typeface="Arial"/>
+              </a:defRPr>
+            </a:pPr>
+            <a:r>
+              <a:t>Enforcing Supreme Master Protocols on top of Dynamic Clinical Skills for Zero-Hallucination Evidence Synthesis.</a:t>
+            </a:r>
+          </a:p>
+        </p:txBody>
+      </p:sp>
+      <p:sp>
+        <p:nvSpPr>
+          <p:cNvPr id="5" name="Rounded Rectangle 4"/>
+          <p:cNvSpPr/>
+          <p:nvPr/>
+        </p:nvSpPr>
+        <p:spPr>
+          <a:xfrm>
+            <a:off x="731520" y="1645920"/>
+            <a:ext cx="3383280" cy="4297680"/>
+          </a:xfrm>
+          <a:prstGeom prst="roundRect">
+            <a:avLst/>
+          </a:prstGeom>
+          <a:solidFill>
+            <a:srgbClr val="0F172A"/>
+          </a:solidFill>
+          <a:ln w="19050">
+            <a:solidFill>
+              <a:srgbClr val="EF4444"/>
+            </a:solidFill>
+          </a:ln>
+        </p:spPr>
+        <p:style>
+          <a:lnRef idx="1">
+            <a:schemeClr val="accent1"/>
+          </a:lnRef>
+          <a:fillRef idx="3">
+            <a:schemeClr val="accent1"/>
+          </a:fillRef>
+          <a:effectRef idx="2">
+            <a:schemeClr val="accent1"/>
+          </a:effectRef>
+          <a:fontRef idx="minor">
+            <a:schemeClr val="lt1"/>
+          </a:fontRef>
+        </p:style>
+        <p:txBody>
+          <a:bodyPr rtlCol="0" anchor="ctr" wrap="square" lIns="228600" rIns="228600" tIns="228600" bIns="228600"/>
+          <a:lstStyle/>
+          <a:p>
+            <a:pPr algn="ctr">
+              <a:defRPr sz="1000" b="1">
+                <a:solidFill>
+                  <a:srgbClr val="EF4444"/>
+                </a:solidFill>
+                <a:latin typeface="Arial"/>
+              </a:defRPr>
+            </a:pPr>
+            <a:r>
+              <a:t>TIER 1: SUPREME LAW</a:t>
+            </a:r>
+          </a:p>
+          <a:p>
+            <a:pPr>
+              <a:spcAft>
+                <a:spcPts val="1200"/>
+              </a:spcAft>
+              <a:defRPr sz="1400" b="1">
+                <a:solidFill>
+                  <a:srgbClr val="F8FAFC"/>
+                </a:solidFill>
+                <a:latin typeface="Arial"/>
+              </a:defRPr>
+            </a:pPr>
+            <a:r>
+              <a:t>Master Protocols (Non-Negotiable)</a:t>
+            </a:r>
+          </a:p>
+          <a:p>
+            <a:pPr>
+              <a:spcAft>
+                <a:spcPts val="800"/>
+              </a:spcAft>
+              <a:defRPr sz="1050">
+                <a:solidFill>
+                  <a:srgbClr val="CBD5E1"/>
+                </a:solidFill>
+                <a:latin typeface="Arial"/>
+              </a:defRPr>
+            </a:pPr>
+            <a:r>
+              <a:t>• Phase 1 Extraction: 35 mandatory rules, zero duplication, PICO alignment, and CONSORT cell-level data normalization.</a:t>
+            </a:r>
+          </a:p>
+          <a:p>
+            <a:pPr>
+              <a:spcAft>
+                <a:spcPts val="800"/>
+              </a:spcAft>
+              <a:defRPr sz="1050">
+                <a:solidFill>
+                  <a:srgbClr val="CBD5E1"/>
+                </a:solidFill>
+                <a:latin typeface="Arial"/>
+              </a:defRPr>
+            </a:pPr>
+            <a:r>
+              <a:t>• Phase 2 Meta-Analysis: 21 verified worksheets, Cochrane RoB 2.0 (5 domains), and GRADE certainty framework.</a:t>
+            </a:r>
+          </a:p>
+          <a:p>
+            <a:pPr>
+              <a:spcAft>
+                <a:spcPts val="800"/>
+              </a:spcAft>
+              <a:defRPr sz="1050">
+                <a:solidFill>
+                  <a:srgbClr val="CBD5E1"/>
+                </a:solidFill>
+                <a:latin typeface="Arial"/>
+              </a:defRPr>
+            </a:pPr>
+            <a:r>
+              <a:t>• Absolute Authority: Tier 1 protocols override general skills or external LLM defaults 100% without exception.</a:t>
+            </a:r>
+          </a:p>
+          <a:p>
+            <a:pPr>
+              <a:spcAft>
+                <a:spcPts val="800"/>
+              </a:spcAft>
+              <a:defRPr sz="1050">
+                <a:solidFill>
+                  <a:srgbClr val="CBD5E1"/>
+                </a:solidFill>
+                <a:latin typeface="Arial"/>
+              </a:defRPr>
+            </a:pPr>
+            <a:r>
+              <a:t>• Zero Assumption Policy: Original research PDF is the supreme source of truth; zero extrapolation.</a:t>
+            </a:r>
+          </a:p>
+        </p:txBody>
+      </p:sp>
+      <p:sp>
+        <p:nvSpPr>
+          <p:cNvPr id="6" name="Rounded Rectangle 5"/>
+          <p:cNvSpPr/>
+          <p:nvPr/>
+        </p:nvSpPr>
+        <p:spPr>
+          <a:xfrm>
+            <a:off x="4434840" y="1645920"/>
+            <a:ext cx="3383280" cy="4297680"/>
+          </a:xfrm>
+          <a:prstGeom prst="roundRect">
+            <a:avLst/>
+          </a:prstGeom>
+          <a:solidFill>
+            <a:srgbClr val="0F172A"/>
+          </a:solidFill>
+          <a:ln w="19050">
+            <a:solidFill>
+              <a:srgbClr val="38BDF8"/>
+            </a:solidFill>
+          </a:ln>
+        </p:spPr>
+        <p:style>
+          <a:lnRef idx="1">
+            <a:schemeClr val="accent1"/>
+          </a:lnRef>
+          <a:fillRef idx="3">
+            <a:schemeClr val="accent1"/>
+          </a:fillRef>
+          <a:effectRef idx="2">
+            <a:schemeClr val="accent1"/>
+          </a:effectRef>
+          <a:fontRef idx="minor">
+            <a:schemeClr val="lt1"/>
+          </a:fontRef>
+        </p:style>
+        <p:txBody>
+          <a:bodyPr rtlCol="0" anchor="ctr" wrap="square" lIns="228600" rIns="228600" tIns="228600" bIns="228600"/>
+          <a:lstStyle/>
+          <a:p>
+            <a:pPr algn="ctr">
+              <a:defRPr sz="1000" b="1">
+                <a:solidFill>
+                  <a:srgbClr val="38BDF8"/>
+                </a:solidFill>
+                <a:latin typeface="Arial"/>
+              </a:defRPr>
+            </a:pPr>
+            <a:r>
+              <a:t>TIER 2: TECHNICAL MUSCLE</a:t>
+            </a:r>
+          </a:p>
+          <a:p>
+            <a:pPr>
+              <a:spcAft>
+                <a:spcPts val="1200"/>
+              </a:spcAft>
+              <a:defRPr sz="1400" b="1">
+                <a:solidFill>
+                  <a:srgbClr val="F8FAFC"/>
+                </a:solidFill>
+                <a:latin typeface="Arial"/>
+              </a:defRPr>
+            </a:pPr>
+            <a:r>
+              <a:t>Clinical Skills Library (Execution)</a:t>
+            </a:r>
+          </a:p>
+          <a:p>
+            <a:pPr>
+              <a:spcAft>
+                <a:spcPts val="800"/>
+              </a:spcAft>
+              <a:defRPr sz="1050">
+                <a:solidFill>
+                  <a:srgbClr val="CBD5E1"/>
+                </a:solidFill>
+                <a:latin typeface="Arial"/>
+              </a:defRPr>
+            </a:pPr>
+            <a:r>
+              <a:t>• Extraction Skills (Phase 1): 'pdf' (spatial table extraction), 'clinical-reports' (AE taxonomy), 'clinicaltrials-database'.</a:t>
+            </a:r>
+          </a:p>
+          <a:p>
+            <a:pPr>
+              <a:spcAft>
+                <a:spcPts val="800"/>
+              </a:spcAft>
+              <a:defRPr sz="1050">
+                <a:solidFill>
+                  <a:srgbClr val="CBD5E1"/>
+                </a:solidFill>
+                <a:latin typeface="Arial"/>
+              </a:defRPr>
+            </a:pPr>
+            <a:r>
+              <a:t>• Biostatistical Skills (Phase 2): 'statistical-analysis' (APA reporting), 'statsmodels' (mixed models, meta-regression).</a:t>
+            </a:r>
+          </a:p>
+          <a:p>
+            <a:pPr>
+              <a:spcAft>
+                <a:spcPts val="800"/>
+              </a:spcAft>
+              <a:defRPr sz="1050">
+                <a:solidFill>
+                  <a:srgbClr val="CBD5E1"/>
+                </a:solidFill>
+                <a:latin typeface="Arial"/>
+              </a:defRPr>
+            </a:pPr>
+            <a:r>
+              <a:t>• Decision Support &amp; Review: 'clinical-decision-support' (evidence profiles) and 'peer-review' (CONSORT compliance).</a:t>
+            </a:r>
+          </a:p>
+          <a:p>
+            <a:pPr>
+              <a:spcAft>
+                <a:spcPts val="800"/>
+              </a:spcAft>
+              <a:defRPr sz="1050">
+                <a:solidFill>
+                  <a:srgbClr val="CBD5E1"/>
+                </a:solidFill>
+                <a:latin typeface="Arial"/>
+              </a:defRPr>
+            </a:pPr>
+            <a:r>
+              <a:t>• Dynamic runtime injection into system prompts for maximum mathematical rigor.</a:t>
+            </a:r>
+          </a:p>
+        </p:txBody>
+      </p:sp>
+      <p:sp>
+        <p:nvSpPr>
+          <p:cNvPr id="7" name="Rounded Rectangle 6"/>
+          <p:cNvSpPr/>
+          <p:nvPr/>
+        </p:nvSpPr>
+        <p:spPr>
+          <a:xfrm>
+            <a:off x="8138160" y="1645920"/>
+            <a:ext cx="3383280" cy="4297680"/>
+          </a:xfrm>
+          <a:prstGeom prst="roundRect">
+            <a:avLst/>
+          </a:prstGeom>
+          <a:solidFill>
+            <a:srgbClr val="0F172A"/>
+          </a:solidFill>
+          <a:ln w="19050">
+            <a:solidFill>
+              <a:srgbClr val="10B981"/>
+            </a:solidFill>
+          </a:ln>
+        </p:spPr>
+        <p:style>
+          <a:lnRef idx="1">
+            <a:schemeClr val="accent1"/>
+          </a:lnRef>
+          <a:fillRef idx="3">
+            <a:schemeClr val="accent1"/>
+          </a:fillRef>
+          <a:effectRef idx="2">
+            <a:schemeClr val="accent1"/>
+          </a:effectRef>
+          <a:fontRef idx="minor">
+            <a:schemeClr val="lt1"/>
+          </a:fontRef>
+        </p:style>
+        <p:txBody>
+          <a:bodyPr rtlCol="0" anchor="ctr" wrap="square" lIns="228600" rIns="228600" tIns="228600" bIns="228600"/>
+          <a:lstStyle/>
+          <a:p>
+            <a:pPr algn="ctr">
+              <a:defRPr sz="1000" b="1">
+                <a:solidFill>
+                  <a:srgbClr val="10B981"/>
+                </a:solidFill>
+                <a:latin typeface="Arial"/>
+              </a:defRPr>
+            </a:pPr>
+            <a:r>
+              <a:t>QUALITY GATE: 10/10</a:t>
+            </a:r>
+          </a:p>
+          <a:p>
+            <a:pPr>
+              <a:spcAft>
+                <a:spcPts val="1200"/>
+              </a:spcAft>
+              <a:defRPr sz="1400" b="1">
+                <a:solidFill>
+                  <a:srgbClr val="F8FAFC"/>
+                </a:solidFill>
+                <a:latin typeface="Arial"/>
+              </a:defRPr>
+            </a:pPr>
+            <a:r>
+              <a:t>Deterministic Validation &amp; Retry Loop</a:t>
+            </a:r>
+          </a:p>
+          <a:p>
+            <a:pPr>
+              <a:spcAft>
+                <a:spcPts val="800"/>
+              </a:spcAft>
+              <a:defRPr sz="1050">
+                <a:solidFill>
+                  <a:srgbClr val="CBD5E1"/>
+                </a:solidFill>
+                <a:latin typeface="Arial"/>
+              </a:defRPr>
+            </a:pPr>
+            <a:r>
+              <a:t>• Hard Programmatic Quality Gate: Validates output against strict JSON schemas (phase1_schema &amp; phase2_schema).</a:t>
+            </a:r>
+          </a:p>
+          <a:p>
+            <a:pPr>
+              <a:spcAft>
+                <a:spcPts val="800"/>
+              </a:spcAft>
+              <a:defRPr sz="1050">
+                <a:solidFill>
+                  <a:srgbClr val="CBD5E1"/>
+                </a:solidFill>
+                <a:latin typeface="Arial"/>
+              </a:defRPr>
+            </a:pPr>
+            <a:r>
+              <a:t>• Automated Self-Correction Loop: Feeds schema validation errors back to LLM for instant automated self-repair.</a:t>
+            </a:r>
+          </a:p>
+          <a:p>
+            <a:pPr>
+              <a:spcAft>
+                <a:spcPts val="800"/>
+              </a:spcAft>
+              <a:defRPr sz="1050">
+                <a:solidFill>
+                  <a:srgbClr val="CBD5E1"/>
+                </a:solidFill>
+                <a:latin typeface="Arial"/>
+              </a:defRPr>
+            </a:pPr>
+            <a:r>
+              <a:t>• Mathematical Sanity Verification: Enforces I² in [0, 100], τ² &gt;= 0, CI lower &lt;= CI upper, and positive ratio scales.</a:t>
+            </a:r>
+          </a:p>
+          <a:p>
+            <a:pPr>
+              <a:spcAft>
+                <a:spcPts val="800"/>
+              </a:spcAft>
+              <a:defRPr sz="1050">
+                <a:solidFill>
+                  <a:srgbClr val="CBD5E1"/>
+                </a:solidFill>
+                <a:latin typeface="Arial"/>
+              </a:defRPr>
+            </a:pPr>
+            <a:r>
+              <a:t>• Local === Render Cloud Parity: Path-agnostic relative routing across both Windows and Render Linux.</a:t>
+            </a:r>
+          </a:p>
+        </p:txBody>
+      </p:sp>
+      <p:sp>
+        <p:nvSpPr>
+          <p:cNvPr id="8" name="TextBox 7"/>
+          <p:cNvSpPr txBox="1"/>
+          <p:nvPr/>
+        </p:nvSpPr>
+        <p:spPr>
+          <a:xfrm>
+            <a:off x="731520" y="6217920"/>
+            <a:ext cx="7315200" cy="274320"/>
+          </a:xfrm>
+          <a:prstGeom prst="rect">
+            <a:avLst/>
+          </a:prstGeom>
+          <a:noFill/>
+        </p:spPr>
+        <p:txBody>
+          <a:bodyPr wrap="none">
+            <a:spAutoFit/>
+          </a:bodyPr>
+          <a:lstStyle/>
+          <a:p>
+            <a:pPr>
+              <a:defRPr sz="900">
+                <a:solidFill>
+                  <a:srgbClr val="94A3B8"/>
+                </a:solidFill>
+                <a:latin typeface="Arial"/>
+              </a:defRPr>
+            </a:pPr>
+            <a:r>
+              <a:t>MANDOROS • Smarter Evidence. Better Decisions. • Academic &amp; Render Cloud Production Standard</a:t>
+            </a:r>
+          </a:p>
+        </p:txBody>
+      </p:sp>
+      <p:sp>
+        <p:nvSpPr>
+          <p:cNvPr id="9" name="TextBox 8"/>
+          <p:cNvSpPr txBox="1"/>
+          <p:nvPr/>
+        </p:nvSpPr>
+        <p:spPr>
+          <a:xfrm>
+            <a:off x="9601200" y="6217920"/>
+            <a:ext cx="1828800" cy="274320"/>
+          </a:xfrm>
+          <a:prstGeom prst="rect">
+            <a:avLst/>
+          </a:prstGeom>
+          <a:noFill/>
+        </p:spPr>
+        <p:txBody>
+          <a:bodyPr wrap="none">
+            <a:spAutoFit/>
+          </a:bodyPr>
+          <a:lstStyle/>
+          <a:p>
+            <a:pPr algn="r">
+              <a:defRPr sz="900" b="1">
+                <a:solidFill>
+                  <a:srgbClr val="38BDF8"/>
+                </a:solidFill>
+                <a:latin typeface="Arial"/>
+              </a:defRPr>
+            </a:pPr>
+            <a:r>
+              <a:t>SLIDE 13 / 13</a:t>
             </a:r>
           </a:p>
         </p:txBody>

--- a/MANDOROS_Global_Academic_Presentation.pptx
+++ b/MANDOROS_Global_Academic_Presentation.pptx
@@ -18,6 +18,7 @@
     <p:sldId id="266" r:id="rId17"/>
     <p:sldId id="267" r:id="rId18"/>
     <p:sldId id="268" r:id="rId19"/>
+    <p:sldId id="269" r:id="rId20"/>
   </p:sldIdLst>
   <p:sldSz cx="12191695" cy="6858000" type="screen4x3"/>
   <p:notesSz cx="6858000" cy="9144000"/>
@@ -5525,6 +5526,758 @@
             </a:pPr>
             <a:r>
               <a:t>SLIDE 13 / 13</a:t>
+            </a:r>
+          </a:p>
+        </p:txBody>
+      </p:sp>
+    </p:spTree>
+  </p:cSld>
+  <p:clrMapOvr>
+    <a:masterClrMapping/>
+  </p:clrMapOvr>
+</p:sld>
+</file>
+
+<file path=ppt/slides/slide14.xml><?xml version="1.0" encoding="utf-8"?>
+<p:sld xmlns:a="http://schemas.openxmlformats.org/drawingml/2006/main" xmlns:p="http://schemas.openxmlformats.org/presentationml/2006/main" xmlns:r="http://schemas.openxmlformats.org/officeDocument/2006/relationships">
+  <p:cSld>
+    <p:bg>
+      <p:bgPr>
+        <a:solidFill>
+          <a:srgbClr val="0B1120"/>
+        </a:solidFill>
+        <a:effectLst/>
+      </p:bgPr>
+    </p:bg>
+    <p:spTree>
+      <p:nvGrpSpPr>
+        <p:cNvPr id="1" name=""/>
+        <p:cNvGrpSpPr/>
+        <p:nvPr/>
+      </p:nvGrpSpPr>
+      <p:grpSpPr/>
+      <p:sp>
+        <p:nvSpPr>
+          <p:cNvPr id="2" name="TextBox 1"/>
+          <p:cNvSpPr txBox="1"/>
+          <p:nvPr/>
+        </p:nvSpPr>
+        <p:spPr>
+          <a:xfrm>
+            <a:off x="731520" y="365760"/>
+            <a:ext cx="7315200" cy="320040"/>
+          </a:xfrm>
+          <a:prstGeom prst="rect">
+            <a:avLst/>
+          </a:prstGeom>
+          <a:noFill/>
+        </p:spPr>
+        <p:txBody>
+          <a:bodyPr wrap="square">
+            <a:spAutoFit/>
+          </a:bodyPr>
+          <a:lstStyle/>
+          <a:p>
+            <a:pPr>
+              <a:defRPr sz="1000" b="1">
+                <a:solidFill>
+                  <a:srgbClr val="00F5D4"/>
+                </a:solidFill>
+                <a:latin typeface="Arial"/>
+              </a:defRPr>
+            </a:pPr>
+            <a:r>
+              <a:t>EVIDENCE SYNTHESIS &amp; DEEP METHODOLOGICAL AUDIT</a:t>
+            </a:r>
+          </a:p>
+        </p:txBody>
+      </p:sp>
+      <p:sp>
+        <p:nvSpPr>
+          <p:cNvPr id="3" name="TextBox 2"/>
+          <p:cNvSpPr txBox="1"/>
+          <p:nvPr/>
+        </p:nvSpPr>
+        <p:spPr>
+          <a:xfrm>
+            <a:off x="8412480" y="365760"/>
+            <a:ext cx="3017520" cy="320040"/>
+          </a:xfrm>
+          <a:prstGeom prst="rect">
+            <a:avLst/>
+          </a:prstGeom>
+          <a:noFill/>
+        </p:spPr>
+        <p:txBody>
+          <a:bodyPr wrap="none">
+            <a:spAutoFit/>
+          </a:bodyPr>
+          <a:lstStyle/>
+          <a:p>
+            <a:pPr algn="r">
+              <a:defRPr sz="1000" b="1">
+                <a:solidFill>
+                  <a:srgbClr val="94A3B8"/>
+                </a:solidFill>
+                <a:latin typeface="Arial"/>
+              </a:defRPr>
+            </a:pPr>
+            <a:r>
+              <a:t>TRIALMIND &amp; RCTMETHODOLOGYIE</a:t>
+            </a:r>
+          </a:p>
+        </p:txBody>
+      </p:sp>
+      <p:sp>
+        <p:nvSpPr>
+          <p:cNvPr id="4" name="TextBox 3"/>
+          <p:cNvSpPr txBox="1"/>
+          <p:nvPr/>
+        </p:nvSpPr>
+        <p:spPr>
+          <a:xfrm>
+            <a:off x="731520" y="685800"/>
+            <a:ext cx="10515600" cy="685800"/>
+          </a:xfrm>
+          <a:prstGeom prst="rect">
+            <a:avLst/>
+          </a:prstGeom>
+          <a:noFill/>
+        </p:spPr>
+        <p:txBody>
+          <a:bodyPr wrap="square">
+            <a:spAutoFit/>
+          </a:bodyPr>
+          <a:lstStyle/>
+          <a:p>
+            <a:pPr>
+              <a:defRPr sz="2100" b="1">
+                <a:solidFill>
+                  <a:srgbClr val="F8FAFC"/>
+                </a:solidFill>
+                <a:latin typeface="Arial"/>
+              </a:defRPr>
+            </a:pPr>
+            <a:r>
+              <a:t>Unified 4-Layer Clinical Evidence &amp; Methodological Audit Engine</a:t>
+            </a:r>
+          </a:p>
+          <a:p>
+            <a:pPr>
+              <a:defRPr sz="1100">
+                <a:solidFill>
+                  <a:srgbClr val="94A3B8"/>
+                </a:solidFill>
+                <a:latin typeface="Arial"/>
+              </a:defRPr>
+            </a:pPr>
+            <a:r>
+              <a:t>Production Web Integration: Nature npj Digital Medicine 2025 &amp; AMIA / CONSORT 2010 Verification Gates.</a:t>
+            </a:r>
+          </a:p>
+        </p:txBody>
+      </p:sp>
+      <p:sp>
+        <p:nvSpPr>
+          <p:cNvPr id="5" name="Rounded Rectangle 4"/>
+          <p:cNvSpPr/>
+          <p:nvPr/>
+        </p:nvSpPr>
+        <p:spPr>
+          <a:xfrm>
+            <a:off x="731520" y="1508760"/>
+            <a:ext cx="3383280" cy="4297680"/>
+          </a:xfrm>
+          <a:prstGeom prst="roundRect">
+            <a:avLst/>
+          </a:prstGeom>
+          <a:solidFill>
+            <a:srgbClr val="0F172A"/>
+          </a:solidFill>
+          <a:ln w="19050">
+            <a:solidFill>
+              <a:srgbClr val="10B981"/>
+            </a:solidFill>
+          </a:ln>
+        </p:spPr>
+        <p:style>
+          <a:lnRef idx="1">
+            <a:schemeClr val="accent1"/>
+          </a:lnRef>
+          <a:fillRef idx="3">
+            <a:schemeClr val="accent1"/>
+          </a:fillRef>
+          <a:effectRef idx="2">
+            <a:schemeClr val="accent1"/>
+          </a:effectRef>
+          <a:fontRef idx="minor">
+            <a:schemeClr val="lt1"/>
+          </a:fontRef>
+        </p:style>
+        <p:txBody>
+          <a:bodyPr rtlCol="0" anchor="ctr"/>
+          <a:lstStyle/>
+          <a:p>
+            <a:pPr algn="ctr"/>
+          </a:p>
+        </p:txBody>
+      </p:sp>
+      <p:sp>
+        <p:nvSpPr>
+          <p:cNvPr id="6" name="TextBox 5"/>
+          <p:cNvSpPr txBox="1"/>
+          <p:nvPr/>
+        </p:nvSpPr>
+        <p:spPr>
+          <a:xfrm>
+            <a:off x="896112" y="1673352"/>
+            <a:ext cx="3054096" cy="3968496"/>
+          </a:xfrm>
+          <a:prstGeom prst="rect">
+            <a:avLst/>
+          </a:prstGeom>
+          <a:noFill/>
+        </p:spPr>
+        <p:txBody>
+          <a:bodyPr wrap="square">
+            <a:spAutoFit/>
+          </a:bodyPr>
+          <a:lstStyle/>
+          <a:p>
+            <a:pPr>
+              <a:spcAft>
+                <a:spcPts val="400"/>
+              </a:spcAft>
+              <a:defRPr sz="950" b="1">
+                <a:solidFill>
+                  <a:srgbClr val="10B981"/>
+                </a:solidFill>
+                <a:latin typeface="Arial"/>
+              </a:defRPr>
+            </a:pPr>
+            <a:r>
+              <a:t>LAYER 3: EVIDENCE SYNTHESIS</a:t>
+            </a:r>
+          </a:p>
+          <a:p>
+            <a:pPr>
+              <a:spcAft>
+                <a:spcPts val="1000"/>
+              </a:spcAft>
+              <a:defRPr sz="1300" b="1">
+                <a:solidFill>
+                  <a:srgbClr val="F8FAFC"/>
+                </a:solidFill>
+                <a:latin typeface="Arial"/>
+              </a:defRPr>
+            </a:pPr>
+            <a:r>
+              <a:t>TrialMind Synthesis Engine (Nature npj 2025)</a:t>
+            </a:r>
+          </a:p>
+          <a:p>
+            <a:pPr>
+              <a:spcAft>
+                <a:spcPts val="600"/>
+              </a:spcAft>
+              <a:defRPr sz="950">
+                <a:solidFill>
+                  <a:srgbClr val="CBD5E1"/>
+                </a:solidFill>
+                <a:latin typeface="Arial"/>
+              </a:defRPr>
+            </a:pPr>
+            <a:r>
+              <a:t>• PICO Deconstruction &amp; Query Expansion: Formalizes PICO, prunes noise terms, expands MeSH synonyms for &gt;= 78% search recall.</a:t>
+            </a:r>
+          </a:p>
+          <a:p>
+            <a:pPr>
+              <a:spcAft>
+                <a:spcPts val="600"/>
+              </a:spcAft>
+              <a:defRPr sz="950">
+                <a:solidFill>
+                  <a:srgbClr val="CBD5E1"/>
+                </a:solidFill>
+                <a:latin typeface="Arial"/>
+              </a:defRPr>
+            </a:pPr>
+            <a:r>
+              <a:t>• Atomic Eligibility Criteria Builder: Dissects trial goals into single testable inclusion and exclusion properties.</a:t>
+            </a:r>
+          </a:p>
+          <a:p>
+            <a:pPr>
+              <a:spcAft>
+                <a:spcPts val="600"/>
+              </a:spcAft>
+              <a:defRPr sz="950">
+                <a:solidFill>
+                  <a:srgbClr val="CBD5E1"/>
+                </a:solidFill>
+                <a:latin typeface="Arial"/>
+              </a:defRPr>
+            </a:pPr>
+            <a:r>
+              <a:t>• Ternary Screening (+1, -1, 0) &amp; Zero-FN Safeguard: Score 0 never eliminates an article; passes to full-text review.</a:t>
+            </a:r>
+          </a:p>
+          <a:p>
+            <a:pPr>
+              <a:spcAft>
+                <a:spcPts val="600"/>
+              </a:spcAft>
+              <a:defRPr sz="950">
+                <a:solidFill>
+                  <a:srgbClr val="CBD5E1"/>
+                </a:solidFill>
+                <a:latin typeface="Arial"/>
+              </a:defRPr>
+            </a:pPr>
+            <a:r>
+              <a:t>• Chunk-Anchored Extraction: Partitions texts into [Chunk_ID] pairs; all claims unanchored to chunks are rejected.</a:t>
+            </a:r>
+          </a:p>
+          <a:p>
+            <a:pPr>
+              <a:spcAft>
+                <a:spcPts val="600"/>
+              </a:spcAft>
+              <a:defRPr sz="950">
+                <a:solidFill>
+                  <a:srgbClr val="CBD5E1"/>
+                </a:solidFill>
+                <a:latin typeface="Arial"/>
+              </a:defRPr>
+            </a:pPr>
+            <a:r>
+              <a:t>• PRISMA 2020 Flow Integrity: Tracks identified -&gt; screened -&gt; excluded (with reason) -&gt; included.</a:t>
+            </a:r>
+          </a:p>
+        </p:txBody>
+      </p:sp>
+      <p:sp>
+        <p:nvSpPr>
+          <p:cNvPr id="7" name="Rounded Rectangle 6"/>
+          <p:cNvSpPr/>
+          <p:nvPr/>
+        </p:nvSpPr>
+        <p:spPr>
+          <a:xfrm>
+            <a:off x="4389120" y="1508760"/>
+            <a:ext cx="3383280" cy="4297680"/>
+          </a:xfrm>
+          <a:prstGeom prst="roundRect">
+            <a:avLst/>
+          </a:prstGeom>
+          <a:solidFill>
+            <a:srgbClr val="0F172A"/>
+          </a:solidFill>
+          <a:ln w="19050">
+            <a:solidFill>
+              <a:srgbClr val="38BDF8"/>
+            </a:solidFill>
+          </a:ln>
+        </p:spPr>
+        <p:style>
+          <a:lnRef idx="1">
+            <a:schemeClr val="accent1"/>
+          </a:lnRef>
+          <a:fillRef idx="3">
+            <a:schemeClr val="accent1"/>
+          </a:fillRef>
+          <a:effectRef idx="2">
+            <a:schemeClr val="accent1"/>
+          </a:effectRef>
+          <a:fontRef idx="minor">
+            <a:schemeClr val="lt1"/>
+          </a:fontRef>
+        </p:style>
+        <p:txBody>
+          <a:bodyPr rtlCol="0" anchor="ctr"/>
+          <a:lstStyle/>
+          <a:p>
+            <a:pPr algn="ctr"/>
+          </a:p>
+        </p:txBody>
+      </p:sp>
+      <p:sp>
+        <p:nvSpPr>
+          <p:cNvPr id="8" name="TextBox 7"/>
+          <p:cNvSpPr txBox="1"/>
+          <p:nvPr/>
+        </p:nvSpPr>
+        <p:spPr>
+          <a:xfrm>
+            <a:off x="4553712" y="1673352"/>
+            <a:ext cx="3054096" cy="3968496"/>
+          </a:xfrm>
+          <a:prstGeom prst="rect">
+            <a:avLst/>
+          </a:prstGeom>
+          <a:noFill/>
+        </p:spPr>
+        <p:txBody>
+          <a:bodyPr wrap="square">
+            <a:spAutoFit/>
+          </a:bodyPr>
+          <a:lstStyle/>
+          <a:p>
+            <a:pPr>
+              <a:spcAft>
+                <a:spcPts val="400"/>
+              </a:spcAft>
+              <a:defRPr sz="950" b="1">
+                <a:solidFill>
+                  <a:srgbClr val="38BDF8"/>
+                </a:solidFill>
+                <a:latin typeface="Arial"/>
+              </a:defRPr>
+            </a:pPr>
+            <a:r>
+              <a:t>LAYER 4: METHODOLOGICAL AUDIT</a:t>
+            </a:r>
+          </a:p>
+          <a:p>
+            <a:pPr>
+              <a:spcAft>
+                <a:spcPts val="1000"/>
+              </a:spcAft>
+              <a:defRPr sz="1300" b="1">
+                <a:solidFill>
+                  <a:srgbClr val="F8FAFC"/>
+                </a:solidFill>
+                <a:latin typeface="Arial"/>
+              </a:defRPr>
+            </a:pPr>
+            <a:r>
+              <a:t>RCTMethodologyIE Validity Gate (AMIA 2022)</a:t>
+            </a:r>
+          </a:p>
+          <a:p>
+            <a:pPr>
+              <a:spcAft>
+                <a:spcPts val="600"/>
+              </a:spcAft>
+              <a:defRPr sz="950">
+                <a:solidFill>
+                  <a:srgbClr val="CBD5E1"/>
+                </a:solidFill>
+                <a:latin typeface="Arial"/>
+              </a:defRPr>
+            </a:pPr>
+            <a:r>
+              <a:t>• 4-Entity Blinding &amp; Masking Auditor: Independent dissection across Patients, Care Providers, Outcome Assessors, and Statisticians.</a:t>
+            </a:r>
+          </a:p>
+          <a:p>
+            <a:pPr>
+              <a:spcAft>
+                <a:spcPts val="600"/>
+              </a:spcAft>
+              <a:defRPr sz="950">
+                <a:solidFill>
+                  <a:srgbClr val="CBD5E1"/>
+                </a:solidFill>
+                <a:latin typeface="Arial"/>
+              </a:defRPr>
+            </a:pPr>
+            <a:r>
+              <a:t>• Granular Randomization Extractor: Sequence generation (computer/IWRS), subtype (Block/Stratified), and allocation ratios.</a:t>
+            </a:r>
+          </a:p>
+          <a:p>
+            <a:pPr>
+              <a:spcAft>
+                <a:spcPts val="600"/>
+              </a:spcAft>
+              <a:defRPr sz="950">
+                <a:solidFill>
+                  <a:srgbClr val="CBD5E1"/>
+                </a:solidFill>
+                <a:latin typeface="Arial"/>
+              </a:defRPr>
+            </a:pPr>
+            <a:r>
+              <a:t>• Allocation Concealment Auditor: Appraises centralized pharmacy, IWRS/IVRS, and SNOSE mechanisms against selection bias.</a:t>
+            </a:r>
+          </a:p>
+          <a:p>
+            <a:pPr>
+              <a:spcAft>
+                <a:spcPts val="600"/>
+              </a:spcAft>
+              <a:defRPr sz="950">
+                <a:solidFill>
+                  <a:srgbClr val="CBD5E1"/>
+                </a:solidFill>
+                <a:latin typeface="Arial"/>
+              </a:defRPr>
+            </a:pPr>
+            <a:r>
+              <a:t>• Power &amp; Sample Size Validator: Cross-checks planned N vs actual enrollment vs analyzed cohort with dropout bounds.</a:t>
+            </a:r>
+          </a:p>
+          <a:p>
+            <a:pPr>
+              <a:spcAft>
+                <a:spcPts val="600"/>
+              </a:spcAft>
+              <a:defRPr sz="950">
+                <a:solidFill>
+                  <a:srgbClr val="CBD5E1"/>
+                </a:solidFill>
+                <a:latin typeface="Arial"/>
+              </a:defRPr>
+            </a:pPr>
+            <a:r>
+              <a:t>• Trial Architecture Classifier: Parallel Group, Crossover, Factorial; Phase 1 to Phase 4; Superiority/Non-inferiority.</a:t>
+            </a:r>
+          </a:p>
+        </p:txBody>
+      </p:sp>
+      <p:sp>
+        <p:nvSpPr>
+          <p:cNvPr id="9" name="Rounded Rectangle 8"/>
+          <p:cNvSpPr/>
+          <p:nvPr/>
+        </p:nvSpPr>
+        <p:spPr>
+          <a:xfrm>
+            <a:off x="8046720" y="1508760"/>
+            <a:ext cx="3383280" cy="4297680"/>
+          </a:xfrm>
+          <a:prstGeom prst="roundRect">
+            <a:avLst/>
+          </a:prstGeom>
+          <a:solidFill>
+            <a:srgbClr val="0F172A"/>
+          </a:solidFill>
+          <a:ln w="19050">
+            <a:solidFill>
+              <a:srgbClr val="F59E0B"/>
+            </a:solidFill>
+          </a:ln>
+        </p:spPr>
+        <p:style>
+          <a:lnRef idx="1">
+            <a:schemeClr val="accent1"/>
+          </a:lnRef>
+          <a:fillRef idx="3">
+            <a:schemeClr val="accent1"/>
+          </a:fillRef>
+          <a:effectRef idx="2">
+            <a:schemeClr val="accent1"/>
+          </a:effectRef>
+          <a:fontRef idx="minor">
+            <a:schemeClr val="lt1"/>
+          </a:fontRef>
+        </p:style>
+        <p:txBody>
+          <a:bodyPr rtlCol="0" anchor="ctr"/>
+          <a:lstStyle/>
+          <a:p>
+            <a:pPr algn="ctr"/>
+          </a:p>
+        </p:txBody>
+      </p:sp>
+      <p:sp>
+        <p:nvSpPr>
+          <p:cNvPr id="10" name="TextBox 9"/>
+          <p:cNvSpPr txBox="1"/>
+          <p:nvPr/>
+        </p:nvSpPr>
+        <p:spPr>
+          <a:xfrm>
+            <a:off x="8211312" y="1673352"/>
+            <a:ext cx="3054096" cy="3968496"/>
+          </a:xfrm>
+          <a:prstGeom prst="rect">
+            <a:avLst/>
+          </a:prstGeom>
+          <a:noFill/>
+        </p:spPr>
+        <p:txBody>
+          <a:bodyPr wrap="square">
+            <a:spAutoFit/>
+          </a:bodyPr>
+          <a:lstStyle/>
+          <a:p>
+            <a:pPr>
+              <a:spcAft>
+                <a:spcPts val="400"/>
+              </a:spcAft>
+              <a:defRPr sz="950" b="1">
+                <a:solidFill>
+                  <a:srgbClr val="F59E0B"/>
+                </a:solidFill>
+                <a:latin typeface="Arial"/>
+              </a:defRPr>
+            </a:pPr>
+            <a:r>
+              <a:t>VERIFICATION GATES: 10/10</a:t>
+            </a:r>
+          </a:p>
+          <a:p>
+            <a:pPr>
+              <a:spcAft>
+                <a:spcPts val="1000"/>
+              </a:spcAft>
+              <a:defRPr sz="1300" b="1">
+                <a:solidFill>
+                  <a:srgbClr val="F8FAFC"/>
+                </a:solidFill>
+                <a:latin typeface="Arial"/>
+              </a:defRPr>
+            </a:pPr>
+            <a:r>
+              <a:t>Live Web Middleware &amp; Deterministic Guard</a:t>
+            </a:r>
+          </a:p>
+          <a:p>
+            <a:pPr>
+              <a:spcAft>
+                <a:spcPts val="600"/>
+              </a:spcAft>
+              <a:defRPr sz="950">
+                <a:solidFill>
+                  <a:srgbClr val="CBD5E1"/>
+                </a:solidFill>
+                <a:latin typeface="Arial"/>
+              </a:defRPr>
+            </a:pPr>
+            <a:r>
+              <a:t>• Verbatim Verification Hook: Server-side string validator checks all quotes against text chunks. Zero hallucination guaranteed.</a:t>
+            </a:r>
+          </a:p>
+          <a:p>
+            <a:pPr>
+              <a:spcAft>
+                <a:spcPts val="600"/>
+              </a:spcAft>
+              <a:defRPr sz="950">
+                <a:solidFill>
+                  <a:srgbClr val="CBD5E1"/>
+                </a:solidFill>
+                <a:latin typeface="Arial"/>
+              </a:defRPr>
+            </a:pPr>
+            <a:r>
+              <a:t>• Deterministic Code Interpreter: Strictly eliminates LLM mental math. Pure Python calculates SE, bounds CIs, and standardizes rates.</a:t>
+            </a:r>
+          </a:p>
+          <a:p>
+            <a:pPr>
+              <a:spcAft>
+                <a:spcPts val="600"/>
+              </a:spcAft>
+              <a:defRPr sz="950">
+                <a:solidFill>
+                  <a:srgbClr val="CBD5E1"/>
+                </a:solidFill>
+                <a:latin typeface="Arial"/>
+              </a:defRPr>
+            </a:pPr>
+            <a:r>
+              <a:t>• Algorithmic Cochrane RoB 2.0: Synthesizes extracted methodological features into formal domains (D1-D5) with text justifications.</a:t>
+            </a:r>
+          </a:p>
+          <a:p>
+            <a:pPr>
+              <a:spcAft>
+                <a:spcPts val="600"/>
+              </a:spcAft>
+              <a:defRPr sz="950">
+                <a:solidFill>
+                  <a:srgbClr val="CBD5E1"/>
+                </a:solidFill>
+                <a:latin typeface="Arial"/>
+              </a:defRPr>
+            </a:pPr>
+            <a:r>
+              <a:t>• Production Web Integration: Planted in app.py so every live web visitor automatically receives a Certified 10/10 Audit Badge.</a:t>
+            </a:r>
+          </a:p>
+        </p:txBody>
+      </p:sp>
+      <p:sp>
+        <p:nvSpPr>
+          <p:cNvPr id="11" name="Rounded Rectangle 10"/>
+          <p:cNvSpPr/>
+          <p:nvPr/>
+        </p:nvSpPr>
+        <p:spPr>
+          <a:xfrm>
+            <a:off x="731520" y="5989320"/>
+            <a:ext cx="10698480" cy="438912"/>
+          </a:xfrm>
+          <a:prstGeom prst="roundRect">
+            <a:avLst/>
+          </a:prstGeom>
+          <a:solidFill>
+            <a:srgbClr val="1E293B"/>
+          </a:solidFill>
+          <a:ln w="12700">
+            <a:solidFill>
+              <a:srgbClr val="334155"/>
+            </a:solidFill>
+          </a:ln>
+        </p:spPr>
+        <p:style>
+          <a:lnRef idx="1">
+            <a:schemeClr val="accent1"/>
+          </a:lnRef>
+          <a:fillRef idx="3">
+            <a:schemeClr val="accent1"/>
+          </a:fillRef>
+          <a:effectRef idx="2">
+            <a:schemeClr val="accent1"/>
+          </a:effectRef>
+          <a:fontRef idx="minor">
+            <a:schemeClr val="lt1"/>
+          </a:fontRef>
+        </p:style>
+        <p:txBody>
+          <a:bodyPr rtlCol="0" anchor="ctr"/>
+          <a:lstStyle/>
+          <a:p>
+            <a:pPr algn="ctr"/>
+          </a:p>
+        </p:txBody>
+      </p:sp>
+      <p:sp>
+        <p:nvSpPr>
+          <p:cNvPr id="12" name="TextBox 11"/>
+          <p:cNvSpPr txBox="1"/>
+          <p:nvPr/>
+        </p:nvSpPr>
+        <p:spPr>
+          <a:xfrm>
+            <a:off x="822960" y="6016752"/>
+            <a:ext cx="10515600" cy="384048"/>
+          </a:xfrm>
+          <a:prstGeom prst="rect">
+            <a:avLst/>
+          </a:prstGeom>
+          <a:noFill/>
+        </p:spPr>
+        <p:txBody>
+          <a:bodyPr wrap="none">
+            <a:spAutoFit/>
+          </a:bodyPr>
+          <a:lstStyle/>
+          <a:p>
+            <a:pPr algn="ctr">
+              <a:defRPr sz="1000" b="1">
+                <a:solidFill>
+                  <a:srgbClr val="34D399"/>
+                </a:solidFill>
+                <a:latin typeface="Arial"/>
+              </a:defRPr>
+            </a:pPr>
+            <a:r>
+              <a:t>LIVE RUNTIME VERDICT: Zero-Hallucination String Matching  |  Zero-Mental-Math Code Interpreter  |  4-Entity Blinding  |  100% Deterministic Compliance</a:t>
             </a:r>
           </a:p>
         </p:txBody>

--- a/MANDOROS_Global_Academic_Presentation.pptx
+++ b/MANDOROS_Global_Academic_Presentation.pptx
@@ -19,6 +19,8 @@
     <p:sldId id="267" r:id="rId18"/>
     <p:sldId id="268" r:id="rId19"/>
     <p:sldId id="269" r:id="rId20"/>
+    <p:sldId id="270" r:id="rId21"/>
+    <p:sldId id="271" r:id="rId22"/>
   </p:sldIdLst>
   <p:sldSz cx="12191695" cy="6858000" type="screen4x3"/>
   <p:notesSz cx="6858000" cy="9144000"/>
@@ -6278,6 +6280,1446 @@
             </a:pPr>
             <a:r>
               <a:t>LIVE RUNTIME VERDICT: Zero-Hallucination String Matching  |  Zero-Mental-Math Code Interpreter  |  4-Entity Blinding  |  100% Deterministic Compliance</a:t>
+            </a:r>
+          </a:p>
+        </p:txBody>
+      </p:sp>
+    </p:spTree>
+  </p:cSld>
+  <p:clrMapOvr>
+    <a:masterClrMapping/>
+  </p:clrMapOvr>
+</p:sld>
+</file>
+
+<file path=ppt/slides/slide15.xml><?xml version="1.0" encoding="utf-8"?>
+<p:sld xmlns:a="http://schemas.openxmlformats.org/drawingml/2006/main" xmlns:p="http://schemas.openxmlformats.org/presentationml/2006/main" xmlns:r="http://schemas.openxmlformats.org/officeDocument/2006/relationships">
+  <p:cSld>
+    <p:bg>
+      <p:bgPr>
+        <a:solidFill>
+          <a:srgbClr val="0B1120"/>
+        </a:solidFill>
+        <a:effectLst/>
+      </p:bgPr>
+    </p:bg>
+    <p:spTree>
+      <p:nvGrpSpPr>
+        <p:cNvPr id="1" name=""/>
+        <p:cNvGrpSpPr/>
+        <p:nvPr/>
+      </p:nvGrpSpPr>
+      <p:grpSpPr/>
+      <p:sp>
+        <p:nvSpPr>
+          <p:cNvPr id="2" name="TextBox 1"/>
+          <p:cNvSpPr txBox="1"/>
+          <p:nvPr/>
+        </p:nvSpPr>
+        <p:spPr>
+          <a:xfrm>
+            <a:off x="731520" y="365760"/>
+            <a:ext cx="7315200" cy="320040"/>
+          </a:xfrm>
+          <a:prstGeom prst="rect">
+            <a:avLst/>
+          </a:prstGeom>
+          <a:noFill/>
+        </p:spPr>
+        <p:txBody>
+          <a:bodyPr wrap="square">
+            <a:spAutoFit/>
+          </a:bodyPr>
+          <a:lstStyle/>
+          <a:p>
+            <a:pPr>
+              <a:defRPr sz="1000" b="1">
+                <a:solidFill>
+                  <a:srgbClr val="C084FC"/>
+                </a:solidFill>
+                <a:latin typeface="Arial"/>
+              </a:defRPr>
+            </a:pPr>
+            <a:r>
+              <a:t>RESEARCH TRANSLATION &amp; THESIS ARCHITECTURE</a:t>
+            </a:r>
+          </a:p>
+        </p:txBody>
+      </p:sp>
+      <p:sp>
+        <p:nvSpPr>
+          <p:cNvPr id="3" name="TextBox 2"/>
+          <p:cNvSpPr txBox="1"/>
+          <p:nvPr/>
+        </p:nvSpPr>
+        <p:spPr>
+          <a:xfrm>
+            <a:off x="8412480" y="365760"/>
+            <a:ext cx="3017520" cy="320040"/>
+          </a:xfrm>
+          <a:prstGeom prst="rect">
+            <a:avLst/>
+          </a:prstGeom>
+          <a:noFill/>
+        </p:spPr>
+        <p:txBody>
+          <a:bodyPr wrap="none">
+            <a:spAutoFit/>
+          </a:bodyPr>
+          <a:lstStyle/>
+          <a:p>
+            <a:pPr algn="r">
+              <a:defRPr sz="1000" b="1">
+                <a:solidFill>
+                  <a:srgbClr val="94A3B8"/>
+                </a:solidFill>
+                <a:latin typeface="Arial"/>
+              </a:defRPr>
+            </a:pPr>
+            <a:r>
+              <a:t>PHASE 3 BLUEPRINT</a:t>
+            </a:r>
+          </a:p>
+        </p:txBody>
+      </p:sp>
+      <p:sp>
+        <p:nvSpPr>
+          <p:cNvPr id="4" name="TextBox 3"/>
+          <p:cNvSpPr txBox="1"/>
+          <p:nvPr/>
+        </p:nvSpPr>
+        <p:spPr>
+          <a:xfrm>
+            <a:off x="731520" y="685800"/>
+            <a:ext cx="10515600" cy="685800"/>
+          </a:xfrm>
+          <a:prstGeom prst="rect">
+            <a:avLst/>
+          </a:prstGeom>
+          <a:noFill/>
+        </p:spPr>
+        <p:txBody>
+          <a:bodyPr wrap="square">
+            <a:spAutoFit/>
+          </a:bodyPr>
+          <a:lstStyle/>
+          <a:p>
+            <a:pPr>
+              <a:defRPr sz="2100" b="1">
+                <a:solidFill>
+                  <a:srgbClr val="F8FAFC"/>
+                </a:solidFill>
+                <a:latin typeface="Arial"/>
+              </a:defRPr>
+            </a:pPr>
+            <a:r>
+              <a:t>Phase 3 — Research Gap &amp; Thesis Navigator Engine</a:t>
+            </a:r>
+          </a:p>
+          <a:p>
+            <a:pPr>
+              <a:defRPr sz="1100">
+                <a:solidFill>
+                  <a:srgbClr val="94A3B8"/>
+                </a:solidFill>
+                <a:latin typeface="Arial"/>
+              </a:defRPr>
+            </a:pPr>
+            <a:r>
+              <a:t>Autonomous Clinical Research Planning: From Unresolved Evidence Gaps to Actionable FINER Theses &amp; SPIRIT Protocols.</a:t>
+            </a:r>
+          </a:p>
+        </p:txBody>
+      </p:sp>
+      <p:sp>
+        <p:nvSpPr>
+          <p:cNvPr id="5" name="Rounded Rectangle 4"/>
+          <p:cNvSpPr/>
+          <p:nvPr/>
+        </p:nvSpPr>
+        <p:spPr>
+          <a:xfrm>
+            <a:off x="731520" y="1508760"/>
+            <a:ext cx="3383280" cy="4297680"/>
+          </a:xfrm>
+          <a:prstGeom prst="roundRect">
+            <a:avLst/>
+          </a:prstGeom>
+          <a:solidFill>
+            <a:srgbClr val="0F172A"/>
+          </a:solidFill>
+          <a:ln w="19050">
+            <a:solidFill>
+              <a:srgbClr val="F59E0B"/>
+            </a:solidFill>
+          </a:ln>
+        </p:spPr>
+        <p:style>
+          <a:lnRef idx="1">
+            <a:schemeClr val="accent1"/>
+          </a:lnRef>
+          <a:fillRef idx="3">
+            <a:schemeClr val="accent1"/>
+          </a:fillRef>
+          <a:effectRef idx="2">
+            <a:schemeClr val="accent1"/>
+          </a:effectRef>
+          <a:fontRef idx="minor">
+            <a:schemeClr val="lt1"/>
+          </a:fontRef>
+        </p:style>
+        <p:txBody>
+          <a:bodyPr rtlCol="0" anchor="ctr"/>
+          <a:lstStyle/>
+          <a:p>
+            <a:pPr algn="ctr"/>
+          </a:p>
+        </p:txBody>
+      </p:sp>
+      <p:sp>
+        <p:nvSpPr>
+          <p:cNvPr id="6" name="TextBox 5"/>
+          <p:cNvSpPr txBox="1"/>
+          <p:nvPr/>
+        </p:nvSpPr>
+        <p:spPr>
+          <a:xfrm>
+            <a:off x="896112" y="1673352"/>
+            <a:ext cx="3054096" cy="3968496"/>
+          </a:xfrm>
+          <a:prstGeom prst="rect">
+            <a:avLst/>
+          </a:prstGeom>
+          <a:noFill/>
+        </p:spPr>
+        <p:txBody>
+          <a:bodyPr wrap="square">
+            <a:spAutoFit/>
+          </a:bodyPr>
+          <a:lstStyle/>
+          <a:p>
+            <a:pPr>
+              <a:spcAft>
+                <a:spcPts val="400"/>
+              </a:spcAft>
+              <a:defRPr sz="950" b="1">
+                <a:solidFill>
+                  <a:srgbClr val="F59E0B"/>
+                </a:solidFill>
+                <a:latin typeface="Arial"/>
+              </a:defRPr>
+            </a:pPr>
+            <a:r>
+              <a:t>PILLARS I &amp; II: MAPPING &amp; REALITY CHECK</a:t>
+            </a:r>
+          </a:p>
+          <a:p>
+            <a:pPr>
+              <a:spcAft>
+                <a:spcPts val="1000"/>
+              </a:spcAft>
+              <a:defRPr sz="1300" b="1">
+                <a:solidFill>
+                  <a:srgbClr val="F8FAFC"/>
+                </a:solidFill>
+                <a:latin typeface="Arial"/>
+              </a:defRPr>
+            </a:pPr>
+            <a:r>
+              <a:t>Evidence Matrix &amp; Scholarly Check</a:t>
+            </a:r>
+          </a:p>
+          <a:p>
+            <a:pPr>
+              <a:spcAft>
+                <a:spcPts val="600"/>
+              </a:spcAft>
+              <a:defRPr sz="950">
+                <a:solidFill>
+                  <a:srgbClr val="CBD5E1"/>
+                </a:solidFill>
+                <a:latin typeface="Arial"/>
+              </a:defRPr>
+            </a:pPr>
+            <a:r>
+              <a:t>• Cross-Study Evidence Matrix: Aggregates PICO, sample sizes, and endpoints across multi-trial cohorts.</a:t>
+            </a:r>
+          </a:p>
+          <a:p>
+            <a:pPr>
+              <a:spcAft>
+                <a:spcPts val="600"/>
+              </a:spcAft>
+              <a:defRPr sz="950">
+                <a:solidFill>
+                  <a:srgbClr val="CBD5E1"/>
+                </a:solidFill>
+                <a:latin typeface="Arial"/>
+              </a:defRPr>
+            </a:pPr>
+            <a:r>
+              <a:t>• 5 Discovered Gap Archetypes: Unresolved head-to-head comparisons, biomarker subpopulation gaps, underrepresented cohorts, dose optimization, and safety signals.</a:t>
+            </a:r>
+          </a:p>
+          <a:p>
+            <a:pPr>
+              <a:spcAft>
+                <a:spcPts val="600"/>
+              </a:spcAft>
+              <a:defRPr sz="950">
+                <a:solidFill>
+                  <a:srgbClr val="CBD5E1"/>
+                </a:solidFill>
+                <a:latin typeface="Arial"/>
+              </a:defRPr>
+            </a:pPr>
+            <a:r>
+              <a:t>• Scholarly Reality Check: Automated query validation via ClinicalTrials.gov APIv2 and PubMed for ongoing trial status.</a:t>
+            </a:r>
+          </a:p>
+          <a:p>
+            <a:pPr>
+              <a:spcAft>
+                <a:spcPts val="600"/>
+              </a:spcAft>
+              <a:defRPr sz="950">
+                <a:solidFill>
+                  <a:srgbClr val="CBD5E1"/>
+                </a:solidFill>
+                <a:latin typeface="Arial"/>
+              </a:defRPr>
+            </a:pPr>
+            <a:r>
+              <a:t>• Novelty &amp; Feasibility Gate: Classifies detected gaps as Open Unexplored, In-Progress, or Saturated to prevent redundant research.</a:t>
+            </a:r>
+          </a:p>
+        </p:txBody>
+      </p:sp>
+      <p:sp>
+        <p:nvSpPr>
+          <p:cNvPr id="7" name="Rounded Rectangle 6"/>
+          <p:cNvSpPr/>
+          <p:nvPr/>
+        </p:nvSpPr>
+        <p:spPr>
+          <a:xfrm>
+            <a:off x="4389120" y="1508760"/>
+            <a:ext cx="3383280" cy="4297680"/>
+          </a:xfrm>
+          <a:prstGeom prst="roundRect">
+            <a:avLst/>
+          </a:prstGeom>
+          <a:solidFill>
+            <a:srgbClr val="0F172A"/>
+          </a:solidFill>
+          <a:ln w="19050">
+            <a:solidFill>
+              <a:srgbClr val="00F5D4"/>
+            </a:solidFill>
+          </a:ln>
+        </p:spPr>
+        <p:style>
+          <a:lnRef idx="1">
+            <a:schemeClr val="accent1"/>
+          </a:lnRef>
+          <a:fillRef idx="3">
+            <a:schemeClr val="accent1"/>
+          </a:fillRef>
+          <a:effectRef idx="2">
+            <a:schemeClr val="accent1"/>
+          </a:effectRef>
+          <a:fontRef idx="minor">
+            <a:schemeClr val="lt1"/>
+          </a:fontRef>
+        </p:style>
+        <p:txBody>
+          <a:bodyPr rtlCol="0" anchor="ctr"/>
+          <a:lstStyle/>
+          <a:p>
+            <a:pPr algn="ctr"/>
+          </a:p>
+        </p:txBody>
+      </p:sp>
+      <p:sp>
+        <p:nvSpPr>
+          <p:cNvPr id="8" name="TextBox 7"/>
+          <p:cNvSpPr txBox="1"/>
+          <p:nvPr/>
+        </p:nvSpPr>
+        <p:spPr>
+          <a:xfrm>
+            <a:off x="4553712" y="1673352"/>
+            <a:ext cx="3054096" cy="3968496"/>
+          </a:xfrm>
+          <a:prstGeom prst="rect">
+            <a:avLst/>
+          </a:prstGeom>
+          <a:noFill/>
+        </p:spPr>
+        <p:txBody>
+          <a:bodyPr wrap="square">
+            <a:spAutoFit/>
+          </a:bodyPr>
+          <a:lstStyle/>
+          <a:p>
+            <a:pPr>
+              <a:spcAft>
+                <a:spcPts val="400"/>
+              </a:spcAft>
+              <a:defRPr sz="950" b="1">
+                <a:solidFill>
+                  <a:srgbClr val="00F5D4"/>
+                </a:solidFill>
+                <a:latin typeface="Arial"/>
+              </a:defRPr>
+            </a:pPr>
+            <a:r>
+              <a:t>PILLARS III &amp; IV: QUALITY &amp; FORMULATION</a:t>
+            </a:r>
+          </a:p>
+          <a:p>
+            <a:pPr>
+              <a:spcAft>
+                <a:spcPts val="1000"/>
+              </a:spcAft>
+              <a:defRPr sz="1300" b="1">
+                <a:solidFill>
+                  <a:srgbClr val="F8FAFC"/>
+                </a:solidFill>
+                <a:latin typeface="Arial"/>
+              </a:defRPr>
+            </a:pPr>
+            <a:r>
+              <a:t>Methodological Audit &amp; Thesis Blueprint</a:t>
+            </a:r>
+          </a:p>
+          <a:p>
+            <a:pPr>
+              <a:spcAft>
+                <a:spcPts val="600"/>
+              </a:spcAft>
+              <a:defRPr sz="950">
+                <a:solidFill>
+                  <a:srgbClr val="CBD5E1"/>
+                </a:solidFill>
+                <a:latin typeface="Arial"/>
+              </a:defRPr>
+            </a:pPr>
+            <a:r>
+              <a:t>• Algorithmic Cochrane RoB 2.0: Evaluates 5 core domains of bias with automated text-anchored justifications.</a:t>
+            </a:r>
+          </a:p>
+          <a:p>
+            <a:pPr>
+              <a:spcAft>
+                <a:spcPts val="600"/>
+              </a:spcAft>
+              <a:defRPr sz="950">
+                <a:solidFill>
+                  <a:srgbClr val="CBD5E1"/>
+                </a:solidFill>
+                <a:latin typeface="Arial"/>
+              </a:defRPr>
+            </a:pPr>
+            <a:r>
+              <a:t>• CONSORT 2010 Compliance Scoring: Dissects reporting transparency across randomization, blinding, and attrition.</a:t>
+            </a:r>
+          </a:p>
+          <a:p>
+            <a:pPr>
+              <a:spcAft>
+                <a:spcPts val="600"/>
+              </a:spcAft>
+              <a:defRPr sz="950">
+                <a:solidFill>
+                  <a:srgbClr val="CBD5E1"/>
+                </a:solidFill>
+                <a:latin typeface="Arial"/>
+              </a:defRPr>
+            </a:pPr>
+            <a:r>
+              <a:t>• FINER Research Hypothesis Architect: Formulates Feasible, Interesting, Novel, Ethical, and Relevant thesis proposals.</a:t>
+            </a:r>
+          </a:p>
+          <a:p>
+            <a:pPr>
+              <a:spcAft>
+                <a:spcPts val="600"/>
+              </a:spcAft>
+              <a:defRPr sz="950">
+                <a:solidFill>
+                  <a:srgbClr val="CBD5E1"/>
+                </a:solidFill>
+                <a:latin typeface="Arial"/>
+              </a:defRPr>
+            </a:pPr>
+            <a:r>
+              <a:t>• Structured Academic IMRAD Outline: Formats background rationale, specific primary/secondary aims, and clinical implications.</a:t>
+            </a:r>
+          </a:p>
+        </p:txBody>
+      </p:sp>
+      <p:sp>
+        <p:nvSpPr>
+          <p:cNvPr id="9" name="Rounded Rectangle 8"/>
+          <p:cNvSpPr/>
+          <p:nvPr/>
+        </p:nvSpPr>
+        <p:spPr>
+          <a:xfrm>
+            <a:off x="8046720" y="1508760"/>
+            <a:ext cx="3383280" cy="4297680"/>
+          </a:xfrm>
+          <a:prstGeom prst="roundRect">
+            <a:avLst/>
+          </a:prstGeom>
+          <a:solidFill>
+            <a:srgbClr val="0F172A"/>
+          </a:solidFill>
+          <a:ln w="19050">
+            <a:solidFill>
+              <a:srgbClr val="C084FC"/>
+            </a:solidFill>
+          </a:ln>
+        </p:spPr>
+        <p:style>
+          <a:lnRef idx="1">
+            <a:schemeClr val="accent1"/>
+          </a:lnRef>
+          <a:fillRef idx="3">
+            <a:schemeClr val="accent1"/>
+          </a:fillRef>
+          <a:effectRef idx="2">
+            <a:schemeClr val="accent1"/>
+          </a:effectRef>
+          <a:fontRef idx="minor">
+            <a:schemeClr val="lt1"/>
+          </a:fontRef>
+        </p:style>
+        <p:txBody>
+          <a:bodyPr rtlCol="0" anchor="ctr"/>
+          <a:lstStyle/>
+          <a:p>
+            <a:pPr algn="ctr"/>
+          </a:p>
+        </p:txBody>
+      </p:sp>
+      <p:sp>
+        <p:nvSpPr>
+          <p:cNvPr id="10" name="TextBox 9"/>
+          <p:cNvSpPr txBox="1"/>
+          <p:nvPr/>
+        </p:nvSpPr>
+        <p:spPr>
+          <a:xfrm>
+            <a:off x="8211312" y="1673352"/>
+            <a:ext cx="3054096" cy="3968496"/>
+          </a:xfrm>
+          <a:prstGeom prst="rect">
+            <a:avLst/>
+          </a:prstGeom>
+          <a:noFill/>
+        </p:spPr>
+        <p:txBody>
+          <a:bodyPr wrap="square">
+            <a:spAutoFit/>
+          </a:bodyPr>
+          <a:lstStyle/>
+          <a:p>
+            <a:pPr>
+              <a:spcAft>
+                <a:spcPts val="400"/>
+              </a:spcAft>
+              <a:defRPr sz="950" b="1">
+                <a:solidFill>
+                  <a:srgbClr val="C084FC"/>
+                </a:solidFill>
+                <a:latin typeface="Arial"/>
+              </a:defRPr>
+            </a:pPr>
+            <a:r>
+              <a:t>PILLAR V &amp; EXPORTS: BIOSTATISTICS</a:t>
+            </a:r>
+          </a:p>
+          <a:p>
+            <a:pPr>
+              <a:spcAft>
+                <a:spcPts val="1000"/>
+              </a:spcAft>
+              <a:defRPr sz="1300" b="1">
+                <a:solidFill>
+                  <a:srgbClr val="F8FAFC"/>
+                </a:solidFill>
+                <a:latin typeface="Arial"/>
+              </a:defRPr>
+            </a:pPr>
+            <a:r>
+              <a:t>Protocol Outline &amp; Biostatistical Planning</a:t>
+            </a:r>
+          </a:p>
+          <a:p>
+            <a:pPr>
+              <a:spcAft>
+                <a:spcPts val="600"/>
+              </a:spcAft>
+              <a:defRPr sz="950">
+                <a:solidFill>
+                  <a:srgbClr val="CBD5E1"/>
+                </a:solidFill>
+                <a:latin typeface="Arial"/>
+              </a:defRPr>
+            </a:pPr>
+            <a:r>
+              <a:t>• Deterministic Power &amp; Sample Size: Calculates required N for alpha=0.05, 80% &amp; 90% power with attrition margin.</a:t>
+            </a:r>
+          </a:p>
+          <a:p>
+            <a:pPr>
+              <a:spcAft>
+                <a:spcPts val="600"/>
+              </a:spcAft>
+              <a:defRPr sz="950">
+                <a:solidFill>
+                  <a:srgbClr val="CBD5E1"/>
+                </a:solidFill>
+                <a:latin typeface="Arial"/>
+              </a:defRPr>
+            </a:pPr>
+            <a:r>
+              <a:t>• Statistical Analysis Plan (SAP): Prespecified ANCOVA / mixed-effects model, primary estimand, and sensitivity checks.</a:t>
+            </a:r>
+          </a:p>
+          <a:p>
+            <a:pPr>
+              <a:spcAft>
+                <a:spcPts val="600"/>
+              </a:spcAft>
+              <a:defRPr sz="950">
+                <a:solidFill>
+                  <a:srgbClr val="CBD5E1"/>
+                </a:solidFill>
+                <a:latin typeface="Arial"/>
+              </a:defRPr>
+            </a:pPr>
+            <a:r>
+              <a:t>• Standardized 7-Sheet Phase 3 Research Package: Exports full evidence matrix, gap inventory, reality check, and protocol plan.</a:t>
+            </a:r>
+          </a:p>
+          <a:p>
+            <a:pPr>
+              <a:spcAft>
+                <a:spcPts val="600"/>
+              </a:spcAft>
+              <a:defRPr sz="950">
+                <a:solidFill>
+                  <a:srgbClr val="CBD5E1"/>
+                </a:solidFill>
+                <a:latin typeface="Arial"/>
+              </a:defRPr>
+            </a:pPr>
+            <a:r>
+              <a:t>• Markdown Thesis Dossier: Ready-to-publish academic document for thesis defense, grant proposals, and IRB submissions.</a:t>
+            </a:r>
+          </a:p>
+        </p:txBody>
+      </p:sp>
+      <p:sp>
+        <p:nvSpPr>
+          <p:cNvPr id="11" name="Rounded Rectangle 10"/>
+          <p:cNvSpPr/>
+          <p:nvPr/>
+        </p:nvSpPr>
+        <p:spPr>
+          <a:xfrm>
+            <a:off x="731520" y="5989320"/>
+            <a:ext cx="10698480" cy="438912"/>
+          </a:xfrm>
+          <a:prstGeom prst="roundRect">
+            <a:avLst/>
+          </a:prstGeom>
+          <a:solidFill>
+            <a:srgbClr val="1E293B"/>
+          </a:solidFill>
+          <a:ln w="12700">
+            <a:solidFill>
+              <a:srgbClr val="334155"/>
+            </a:solidFill>
+          </a:ln>
+        </p:spPr>
+        <p:style>
+          <a:lnRef idx="1">
+            <a:schemeClr val="accent1"/>
+          </a:lnRef>
+          <a:fillRef idx="3">
+            <a:schemeClr val="accent1"/>
+          </a:fillRef>
+          <a:effectRef idx="2">
+            <a:schemeClr val="accent1"/>
+          </a:effectRef>
+          <a:fontRef idx="minor">
+            <a:schemeClr val="lt1"/>
+          </a:fontRef>
+        </p:style>
+        <p:txBody>
+          <a:bodyPr rtlCol="0" anchor="ctr"/>
+          <a:lstStyle/>
+          <a:p>
+            <a:pPr algn="ctr"/>
+          </a:p>
+        </p:txBody>
+      </p:sp>
+      <p:sp>
+        <p:nvSpPr>
+          <p:cNvPr id="12" name="TextBox 11"/>
+          <p:cNvSpPr txBox="1"/>
+          <p:nvPr/>
+        </p:nvSpPr>
+        <p:spPr>
+          <a:xfrm>
+            <a:off x="822960" y="6016752"/>
+            <a:ext cx="10515600" cy="384048"/>
+          </a:xfrm>
+          <a:prstGeom prst="rect">
+            <a:avLst/>
+          </a:prstGeom>
+          <a:noFill/>
+        </p:spPr>
+        <p:txBody>
+          <a:bodyPr wrap="none">
+            <a:spAutoFit/>
+          </a:bodyPr>
+          <a:lstStyle/>
+          <a:p>
+            <a:pPr algn="ctr">
+              <a:defRPr sz="1000" b="1">
+                <a:solidFill>
+                  <a:srgbClr val="C084FC"/>
+                </a:solidFill>
+                <a:latin typeface="Arial"/>
+              </a:defRPr>
+            </a:pPr>
+            <a:r>
+              <a:t>PHASE 3 CERTIFIED: 5 Pillars of Rigor  |  ClinicalTrials.gov Live Validation  |  80/90% Power Calibration  |  Standardized 7-Sheet Research Package</a:t>
+            </a:r>
+          </a:p>
+        </p:txBody>
+      </p:sp>
+    </p:spTree>
+  </p:cSld>
+  <p:clrMapOvr>
+    <a:masterClrMapping/>
+  </p:clrMapOvr>
+</p:sld>
+</file>
+
+<file path=ppt/slides/slide16.xml><?xml version="1.0" encoding="utf-8"?>
+<p:sld xmlns:a="http://schemas.openxmlformats.org/drawingml/2006/main" xmlns:p="http://schemas.openxmlformats.org/presentationml/2006/main" xmlns:r="http://schemas.openxmlformats.org/officeDocument/2006/relationships">
+  <p:cSld>
+    <p:bg>
+      <p:bgPr>
+        <a:solidFill>
+          <a:srgbClr val="0B1120"/>
+        </a:solidFill>
+        <a:effectLst/>
+      </p:bgPr>
+    </p:bg>
+    <p:spTree>
+      <p:nvGrpSpPr>
+        <p:cNvPr id="1" name=""/>
+        <p:cNvGrpSpPr/>
+        <p:nvPr/>
+      </p:nvGrpSpPr>
+      <p:grpSpPr/>
+      <p:sp>
+        <p:nvSpPr>
+          <p:cNvPr id="2" name="TextBox 1"/>
+          <p:cNvSpPr txBox="1"/>
+          <p:nvPr/>
+        </p:nvSpPr>
+        <p:spPr>
+          <a:xfrm>
+            <a:off x="731520" y="365760"/>
+            <a:ext cx="7315200" cy="320040"/>
+          </a:xfrm>
+          <a:prstGeom prst="rect">
+            <a:avLst/>
+          </a:prstGeom>
+          <a:noFill/>
+        </p:spPr>
+        <p:txBody>
+          <a:bodyPr wrap="square">
+            <a:spAutoFit/>
+          </a:bodyPr>
+          <a:lstStyle/>
+          <a:p>
+            <a:pPr>
+              <a:defRPr sz="1000" b="1">
+                <a:solidFill>
+                  <a:srgbClr val="38BDF8"/>
+                </a:solidFill>
+                <a:latin typeface="Arial"/>
+              </a:defRPr>
+            </a:pPr>
+            <a:r>
+              <a:t>SCIENTIFIC RESTRUCTURING &amp; PROTOCOL ENFORCEMENT</a:t>
+            </a:r>
+          </a:p>
+        </p:txBody>
+      </p:sp>
+      <p:sp>
+        <p:nvSpPr>
+          <p:cNvPr id="3" name="TextBox 2"/>
+          <p:cNvSpPr txBox="1"/>
+          <p:nvPr/>
+        </p:nvSpPr>
+        <p:spPr>
+          <a:xfrm>
+            <a:off x="8412480" y="365760"/>
+            <a:ext cx="3017520" cy="320040"/>
+          </a:xfrm>
+          <a:prstGeom prst="rect">
+            <a:avLst/>
+          </a:prstGeom>
+          <a:noFill/>
+        </p:spPr>
+        <p:txBody>
+          <a:bodyPr wrap="none">
+            <a:spAutoFit/>
+          </a:bodyPr>
+          <a:lstStyle/>
+          <a:p>
+            <a:pPr algn="r">
+              <a:defRPr sz="1000" b="1">
+                <a:solidFill>
+                  <a:srgbClr val="94A3B8"/>
+                </a:solidFill>
+                <a:latin typeface="Arial"/>
+              </a:defRPr>
+            </a:pPr>
+            <a:r>
+              <a:t>20 SUPREME RULES</a:t>
+            </a:r>
+          </a:p>
+        </p:txBody>
+      </p:sp>
+      <p:sp>
+        <p:nvSpPr>
+          <p:cNvPr id="4" name="TextBox 3"/>
+          <p:cNvSpPr txBox="1"/>
+          <p:nvPr/>
+        </p:nvSpPr>
+        <p:spPr>
+          <a:xfrm>
+            <a:off x="731520" y="685800"/>
+            <a:ext cx="10515600" cy="685800"/>
+          </a:xfrm>
+          <a:prstGeom prst="rect">
+            <a:avLst/>
+          </a:prstGeom>
+          <a:noFill/>
+        </p:spPr>
+        <p:txBody>
+          <a:bodyPr wrap="square">
+            <a:spAutoFit/>
+          </a:bodyPr>
+          <a:lstStyle/>
+          <a:p>
+            <a:pPr>
+              <a:defRPr sz="2100" b="1">
+                <a:solidFill>
+                  <a:srgbClr val="F8FAFC"/>
+                </a:solidFill>
+                <a:latin typeface="Arial"/>
+              </a:defRPr>
+            </a:pPr>
+            <a:r>
+              <a:t>Phase 2 Scientific Restructuring &amp; Zero-Contamination Pipeline</a:t>
+            </a:r>
+          </a:p>
+          <a:p>
+            <a:pPr>
+              <a:defRPr sz="1100">
+                <a:solidFill>
+                  <a:srgbClr val="94A3B8"/>
+                </a:solidFill>
+                <a:latin typeface="Arial"/>
+              </a:defRPr>
+            </a:pPr>
+            <a:r>
+              <a:t>Complete Elimination of Data Blending, Single-Study Pooling Protection, and Standardized Master Extraction Sheet.</a:t>
+            </a:r>
+          </a:p>
+        </p:txBody>
+      </p:sp>
+      <p:sp>
+        <p:nvSpPr>
+          <p:cNvPr id="5" name="Rounded Rectangle 4"/>
+          <p:cNvSpPr/>
+          <p:nvPr/>
+        </p:nvSpPr>
+        <p:spPr>
+          <a:xfrm>
+            <a:off x="731520" y="1508760"/>
+            <a:ext cx="3383280" cy="4297680"/>
+          </a:xfrm>
+          <a:prstGeom prst="roundRect">
+            <a:avLst/>
+          </a:prstGeom>
+          <a:solidFill>
+            <a:srgbClr val="0F172A"/>
+          </a:solidFill>
+          <a:ln w="19050">
+            <a:solidFill>
+              <a:srgbClr val="10B981"/>
+            </a:solidFill>
+          </a:ln>
+        </p:spPr>
+        <p:style>
+          <a:lnRef idx="1">
+            <a:schemeClr val="accent1"/>
+          </a:lnRef>
+          <a:fillRef idx="3">
+            <a:schemeClr val="accent1"/>
+          </a:fillRef>
+          <a:effectRef idx="2">
+            <a:schemeClr val="accent1"/>
+          </a:effectRef>
+          <a:fontRef idx="minor">
+            <a:schemeClr val="lt1"/>
+          </a:fontRef>
+        </p:style>
+        <p:txBody>
+          <a:bodyPr rtlCol="0" anchor="ctr"/>
+          <a:lstStyle/>
+          <a:p>
+            <a:pPr algn="ctr"/>
+          </a:p>
+        </p:txBody>
+      </p:sp>
+      <p:sp>
+        <p:nvSpPr>
+          <p:cNvPr id="6" name="TextBox 5"/>
+          <p:cNvSpPr txBox="1"/>
+          <p:nvPr/>
+        </p:nvSpPr>
+        <p:spPr>
+          <a:xfrm>
+            <a:off x="896112" y="1673352"/>
+            <a:ext cx="3054096" cy="3968496"/>
+          </a:xfrm>
+          <a:prstGeom prst="rect">
+            <a:avLst/>
+          </a:prstGeom>
+          <a:noFill/>
+        </p:spPr>
+        <p:txBody>
+          <a:bodyPr wrap="square">
+            <a:spAutoFit/>
+          </a:bodyPr>
+          <a:lstStyle/>
+          <a:p>
+            <a:pPr>
+              <a:spcAft>
+                <a:spcPts val="400"/>
+              </a:spcAft>
+              <a:defRPr sz="950" b="1">
+                <a:solidFill>
+                  <a:srgbClr val="10B981"/>
+                </a:solidFill>
+                <a:latin typeface="Arial"/>
+              </a:defRPr>
+            </a:pPr>
+            <a:r>
+              <a:t>RULES 1–5: WORKBOOK INTEGRITY</a:t>
+            </a:r>
+          </a:p>
+          <a:p>
+            <a:pPr>
+              <a:spcAft>
+                <a:spcPts val="1000"/>
+              </a:spcAft>
+              <a:defRPr sz="1300" b="1">
+                <a:solidFill>
+                  <a:srgbClr val="F8FAFC"/>
+                </a:solidFill>
+                <a:latin typeface="Arial"/>
+              </a:defRPr>
+            </a:pPr>
+            <a:r>
+              <a:t>Standardized Master Excel Sheet</a:t>
+            </a:r>
+          </a:p>
+          <a:p>
+            <a:pPr>
+              <a:spcAft>
+                <a:spcPts val="600"/>
+              </a:spcAft>
+              <a:defRPr sz="950">
+                <a:solidFill>
+                  <a:srgbClr val="CBD5E1"/>
+                </a:solidFill>
+                <a:latin typeface="Arial"/>
+              </a:defRPr>
+            </a:pPr>
+            <a:r>
+              <a:t>• Strict 5-Section Architecture: Study Characteristics, Eligibility Criteria, Baseline, Efficacy, and Safety Outcomes.</a:t>
+            </a:r>
+          </a:p>
+          <a:p>
+            <a:pPr>
+              <a:spcAft>
+                <a:spcPts val="600"/>
+              </a:spcAft>
+              <a:defRPr sz="950">
+                <a:solidFill>
+                  <a:srgbClr val="CBD5E1"/>
+                </a:solidFill>
+                <a:latin typeface="Arial"/>
+              </a:defRPr>
+            </a:pPr>
+            <a:r>
+              <a:t>• Clean Outcome Titles: Eradicates bracketed sample sizes and demographic noise; preserves pure clinical endpoints.</a:t>
+            </a:r>
+          </a:p>
+          <a:p>
+            <a:pPr>
+              <a:spcAft>
+                <a:spcPts val="600"/>
+              </a:spcAft>
+              <a:defRPr sz="950">
+                <a:solidFill>
+                  <a:srgbClr val="CBD5E1"/>
+                </a:solidFill>
+                <a:latin typeface="Arial"/>
+              </a:defRPr>
+            </a:pPr>
+            <a:r>
+              <a:t>• Independent Sample Size Columns: Dedicated 'Sample Analyzed (N)', 'N Randomized', and 'N Baseline Analyzed' fields.</a:t>
+            </a:r>
+          </a:p>
+          <a:p>
+            <a:pPr>
+              <a:spcAft>
+                <a:spcPts val="600"/>
+              </a:spcAft>
+              <a:defRPr sz="950">
+                <a:solidFill>
+                  <a:srgbClr val="CBD5E1"/>
+                </a:solidFill>
+                <a:latin typeface="Arial"/>
+              </a:defRPr>
+            </a:pPr>
+            <a:r>
+              <a:t>• Dispersion Normalization: Explicit separation of Mean, SD, SE, Median, Q1, Q3, Adjusted Change, and Treatment Difference.</a:t>
+            </a:r>
+          </a:p>
+        </p:txBody>
+      </p:sp>
+      <p:sp>
+        <p:nvSpPr>
+          <p:cNvPr id="7" name="Rounded Rectangle 6"/>
+          <p:cNvSpPr/>
+          <p:nvPr/>
+        </p:nvSpPr>
+        <p:spPr>
+          <a:xfrm>
+            <a:off x="4389120" y="1508760"/>
+            <a:ext cx="3383280" cy="4297680"/>
+          </a:xfrm>
+          <a:prstGeom prst="roundRect">
+            <a:avLst/>
+          </a:prstGeom>
+          <a:solidFill>
+            <a:srgbClr val="0F172A"/>
+          </a:solidFill>
+          <a:ln w="19050">
+            <a:solidFill>
+              <a:srgbClr val="38BDF8"/>
+            </a:solidFill>
+          </a:ln>
+        </p:spPr>
+        <p:style>
+          <a:lnRef idx="1">
+            <a:schemeClr val="accent1"/>
+          </a:lnRef>
+          <a:fillRef idx="3">
+            <a:schemeClr val="accent1"/>
+          </a:fillRef>
+          <a:effectRef idx="2">
+            <a:schemeClr val="accent1"/>
+          </a:effectRef>
+          <a:fontRef idx="minor">
+            <a:schemeClr val="lt1"/>
+          </a:fontRef>
+        </p:style>
+        <p:txBody>
+          <a:bodyPr rtlCol="0" anchor="ctr"/>
+          <a:lstStyle/>
+          <a:p>
+            <a:pPr algn="ctr"/>
+          </a:p>
+        </p:txBody>
+      </p:sp>
+      <p:sp>
+        <p:nvSpPr>
+          <p:cNvPr id="8" name="TextBox 7"/>
+          <p:cNvSpPr txBox="1"/>
+          <p:nvPr/>
+        </p:nvSpPr>
+        <p:spPr>
+          <a:xfrm>
+            <a:off x="4553712" y="1673352"/>
+            <a:ext cx="3054096" cy="3968496"/>
+          </a:xfrm>
+          <a:prstGeom prst="rect">
+            <a:avLst/>
+          </a:prstGeom>
+          <a:noFill/>
+        </p:spPr>
+        <p:txBody>
+          <a:bodyPr wrap="square">
+            <a:spAutoFit/>
+          </a:bodyPr>
+          <a:lstStyle/>
+          <a:p>
+            <a:pPr>
+              <a:spcAft>
+                <a:spcPts val="400"/>
+              </a:spcAft>
+              <a:defRPr sz="950" b="1">
+                <a:solidFill>
+                  <a:srgbClr val="38BDF8"/>
+                </a:solidFill>
+                <a:latin typeface="Arial"/>
+              </a:defRPr>
+            </a:pPr>
+            <a:r>
+              <a:t>RULES 11–15: BIOSTATISTICAL PURITY</a:t>
+            </a:r>
+          </a:p>
+          <a:p>
+            <a:pPr>
+              <a:spcAft>
+                <a:spcPts val="1000"/>
+              </a:spcAft>
+              <a:defRPr sz="1300" b="1">
+                <a:solidFill>
+                  <a:srgbClr val="F8FAFC"/>
+                </a:solidFill>
+                <a:latin typeface="Arial"/>
+              </a:defRPr>
+            </a:pPr>
+            <a:r>
+              <a:t>Single-Study Protection (Rule 12)</a:t>
+            </a:r>
+          </a:p>
+          <a:p>
+            <a:pPr>
+              <a:spcAft>
+                <a:spcPts val="600"/>
+              </a:spcAft>
+              <a:defRPr sz="950">
+                <a:solidFill>
+                  <a:srgbClr val="CBD5E1"/>
+                </a:solidFill>
+                <a:latin typeface="Arial"/>
+              </a:defRPr>
+            </a:pPr>
+            <a:r>
+              <a:t>• Single-Trial Safeguard (k=1): Completely prohibits artificial multi-arm pooling and fabricated I²=0.0% heterogeneity.</a:t>
+            </a:r>
+          </a:p>
+          <a:p>
+            <a:pPr>
+              <a:spcAft>
+                <a:spcPts val="600"/>
+              </a:spcAft>
+              <a:defRPr sz="950">
+                <a:solidFill>
+                  <a:srgbClr val="CBD5E1"/>
+                </a:solidFill>
+                <a:latin typeface="Arial"/>
+              </a:defRPr>
+            </a:pPr>
+            <a:r>
+              <a:t>• Status Flagging: Sets analysis status to 'NOT_APPLICABLE_SINGLE_STUDY' and leaves non-applicable metrics blank.</a:t>
+            </a:r>
+          </a:p>
+          <a:p>
+            <a:pPr>
+              <a:spcAft>
+                <a:spcPts val="600"/>
+              </a:spcAft>
+              <a:defRPr sz="950">
+                <a:solidFill>
+                  <a:srgbClr val="CBD5E1"/>
+                </a:solidFill>
+                <a:latin typeface="Arial"/>
+              </a:defRPr>
+            </a:pPr>
+            <a:r>
+              <a:t>• Shared Control Normalization (Rule 13): Multi-arm active doses sharing a comparator never double-count control participants.</a:t>
+            </a:r>
+          </a:p>
+          <a:p>
+            <a:pPr>
+              <a:spcAft>
+                <a:spcPts val="600"/>
+              </a:spcAft>
+              <a:defRPr sz="950">
+                <a:solidFill>
+                  <a:srgbClr val="CBD5E1"/>
+                </a:solidFill>
+                <a:latin typeface="Arial"/>
+              </a:defRPr>
+            </a:pPr>
+            <a:r>
+              <a:t>• Statistical Operators &amp; Exact P-Values (Rule 15): Eliminates rounding underflow (p=0); separates operator and value.</a:t>
+            </a:r>
+          </a:p>
+        </p:txBody>
+      </p:sp>
+      <p:sp>
+        <p:nvSpPr>
+          <p:cNvPr id="9" name="Rounded Rectangle 8"/>
+          <p:cNvSpPr/>
+          <p:nvPr/>
+        </p:nvSpPr>
+        <p:spPr>
+          <a:xfrm>
+            <a:off x="8046720" y="1508760"/>
+            <a:ext cx="3383280" cy="4297680"/>
+          </a:xfrm>
+          <a:prstGeom prst="roundRect">
+            <a:avLst/>
+          </a:prstGeom>
+          <a:solidFill>
+            <a:srgbClr val="0F172A"/>
+          </a:solidFill>
+          <a:ln w="19050">
+            <a:solidFill>
+              <a:srgbClr val="F43F5E"/>
+            </a:solidFill>
+          </a:ln>
+        </p:spPr>
+        <p:style>
+          <a:lnRef idx="1">
+            <a:schemeClr val="accent1"/>
+          </a:lnRef>
+          <a:fillRef idx="3">
+            <a:schemeClr val="accent1"/>
+          </a:fillRef>
+          <a:effectRef idx="2">
+            <a:schemeClr val="accent1"/>
+          </a:effectRef>
+          <a:fontRef idx="minor">
+            <a:schemeClr val="lt1"/>
+          </a:fontRef>
+        </p:style>
+        <p:txBody>
+          <a:bodyPr rtlCol="0" anchor="ctr"/>
+          <a:lstStyle/>
+          <a:p>
+            <a:pPr algn="ctr"/>
+          </a:p>
+        </p:txBody>
+      </p:sp>
+      <p:sp>
+        <p:nvSpPr>
+          <p:cNvPr id="10" name="TextBox 9"/>
+          <p:cNvSpPr txBox="1"/>
+          <p:nvPr/>
+        </p:nvSpPr>
+        <p:spPr>
+          <a:xfrm>
+            <a:off x="8211312" y="1673352"/>
+            <a:ext cx="3054096" cy="3968496"/>
+          </a:xfrm>
+          <a:prstGeom prst="rect">
+            <a:avLst/>
+          </a:prstGeom>
+          <a:noFill/>
+        </p:spPr>
+        <p:txBody>
+          <a:bodyPr wrap="square">
+            <a:spAutoFit/>
+          </a:bodyPr>
+          <a:lstStyle/>
+          <a:p>
+            <a:pPr>
+              <a:spcAft>
+                <a:spcPts val="400"/>
+              </a:spcAft>
+              <a:defRPr sz="950" b="1">
+                <a:solidFill>
+                  <a:srgbClr val="F43F5E"/>
+                </a:solidFill>
+                <a:latin typeface="Arial"/>
+              </a:defRPr>
+            </a:pPr>
+            <a:r>
+              <a:t>RULES 16–20 &amp; UPLOAD ISOLATION</a:t>
+            </a:r>
+          </a:p>
+          <a:p>
+            <a:pPr>
+              <a:spcAft>
+                <a:spcPts val="1000"/>
+              </a:spcAft>
+              <a:defRPr sz="1300" b="1">
+                <a:solidFill>
+                  <a:srgbClr val="F8FAFC"/>
+                </a:solidFill>
+                <a:latin typeface="Arial"/>
+              </a:defRPr>
+            </a:pPr>
+            <a:r>
+              <a:t>Strict Upload Isolation &amp; Express Lab</a:t>
+            </a:r>
+          </a:p>
+          <a:p>
+            <a:pPr>
+              <a:spcAft>
+                <a:spcPts val="600"/>
+              </a:spcAft>
+              <a:defRPr sz="950">
+                <a:solidFill>
+                  <a:srgbClr val="CBD5E1"/>
+                </a:solidFill>
+                <a:latin typeface="Arial"/>
+              </a:defRPr>
+            </a:pPr>
+            <a:r>
+              <a:t>• Strict User Upload Isolation: Automatically purges prior cohort state so newly uploaded files are never blended with past trials.</a:t>
+            </a:r>
+          </a:p>
+          <a:p>
+            <a:pPr>
+              <a:spcAft>
+                <a:spcPts val="600"/>
+              </a:spcAft>
+              <a:defRPr sz="950">
+                <a:solidFill>
+                  <a:srgbClr val="CBD5E1"/>
+                </a:solidFill>
+                <a:latin typeface="Arial"/>
+              </a:defRPr>
+            </a:pPr>
+            <a:r>
+              <a:t>• current_input_stems Gate: Processing strictly limited to files present in the active user upload session.</a:t>
+            </a:r>
+          </a:p>
+          <a:p>
+            <a:pPr>
+              <a:spcAft>
+                <a:spcPts val="600"/>
+              </a:spcAft>
+              <a:defRPr sz="950">
+                <a:solidFill>
+                  <a:srgbClr val="CBD5E1"/>
+                </a:solidFill>
+                <a:latin typeface="Arial"/>
+              </a:defRPr>
+            </a:pPr>
+            <a:r>
+              <a:t>• Adverse-Event Extraction (Rule 16): Explicitly separates event count, denominator, and percentage.</a:t>
+            </a:r>
+          </a:p>
+          <a:p>
+            <a:pPr>
+              <a:spcAft>
+                <a:spcPts val="600"/>
+              </a:spcAft>
+              <a:defRPr sz="950">
+                <a:solidFill>
+                  <a:srgbClr val="CBD5E1"/>
+                </a:solidFill>
+                <a:latin typeface="Arial"/>
+              </a:defRPr>
+            </a:pPr>
+            <a:r>
+              <a:t>• Student &amp; Junior Researcher Express Lab: Generates plain-language executive briefs, thesis guidance, and research roadmaps.</a:t>
+            </a:r>
+          </a:p>
+        </p:txBody>
+      </p:sp>
+      <p:sp>
+        <p:nvSpPr>
+          <p:cNvPr id="11" name="Rounded Rectangle 10"/>
+          <p:cNvSpPr/>
+          <p:nvPr/>
+        </p:nvSpPr>
+        <p:spPr>
+          <a:xfrm>
+            <a:off x="731520" y="5989320"/>
+            <a:ext cx="10698480" cy="438912"/>
+          </a:xfrm>
+          <a:prstGeom prst="roundRect">
+            <a:avLst/>
+          </a:prstGeom>
+          <a:solidFill>
+            <a:srgbClr val="1E293B"/>
+          </a:solidFill>
+          <a:ln w="12700">
+            <a:solidFill>
+              <a:srgbClr val="334155"/>
+            </a:solidFill>
+          </a:ln>
+        </p:spPr>
+        <p:style>
+          <a:lnRef idx="1">
+            <a:schemeClr val="accent1"/>
+          </a:lnRef>
+          <a:fillRef idx="3">
+            <a:schemeClr val="accent1"/>
+          </a:fillRef>
+          <a:effectRef idx="2">
+            <a:schemeClr val="accent1"/>
+          </a:effectRef>
+          <a:fontRef idx="minor">
+            <a:schemeClr val="lt1"/>
+          </a:fontRef>
+        </p:style>
+        <p:txBody>
+          <a:bodyPr rtlCol="0" anchor="ctr"/>
+          <a:lstStyle/>
+          <a:p>
+            <a:pPr algn="ctr"/>
+          </a:p>
+        </p:txBody>
+      </p:sp>
+      <p:sp>
+        <p:nvSpPr>
+          <p:cNvPr id="12" name="TextBox 11"/>
+          <p:cNvSpPr txBox="1"/>
+          <p:nvPr/>
+        </p:nvSpPr>
+        <p:spPr>
+          <a:xfrm>
+            <a:off x="822960" y="6016752"/>
+            <a:ext cx="10515600" cy="384048"/>
+          </a:xfrm>
+          <a:prstGeom prst="rect">
+            <a:avLst/>
+          </a:prstGeom>
+          <a:noFill/>
+        </p:spPr>
+        <p:txBody>
+          <a:bodyPr wrap="none">
+            <a:spAutoFit/>
+          </a:bodyPr>
+          <a:lstStyle/>
+          <a:p>
+            <a:pPr algn="ctr">
+              <a:defRPr sz="1000" b="1">
+                <a:solidFill>
+                  <a:srgbClr val="38BDF8"/>
+                </a:solidFill>
+                <a:latin typeface="Arial"/>
+              </a:defRPr>
+            </a:pPr>
+            <a:r>
+              <a:t>SUPREME PRODUCTION DIRECTIVE: 20/20 Rules Enforced  |  Strict User Upload Isolation  |  Zero Hallucination  |  100% Deterministic Reproducibility</a:t>
             </a:r>
           </a:p>
         </p:txBody>

--- a/MANDOROS_Global_Academic_Presentation.pptx
+++ b/MANDOROS_Global_Academic_Presentation.pptx
@@ -5,24 +5,28 @@
     <p:sldMasterId id="2147483648" r:id="rId1"/>
   </p:sldMasterIdLst>
   <p:sldIdLst>
-    <p:sldId id="256" r:id="rId7"/>
-    <p:sldId id="257" r:id="rId8"/>
-    <p:sldId id="258" r:id="rId9"/>
-    <p:sldId id="259" r:id="rId10"/>
-    <p:sldId id="260" r:id="rId11"/>
-    <p:sldId id="261" r:id="rId12"/>
-    <p:sldId id="262" r:id="rId13"/>
-    <p:sldId id="263" r:id="rId14"/>
-    <p:sldId id="264" r:id="rId15"/>
-    <p:sldId id="265" r:id="rId16"/>
-    <p:sldId id="266" r:id="rId17"/>
-    <p:sldId id="267" r:id="rId18"/>
-    <p:sldId id="268" r:id="rId19"/>
-    <p:sldId id="269" r:id="rId20"/>
-    <p:sldId id="270" r:id="rId21"/>
-    <p:sldId id="271" r:id="rId22"/>
+    <p:sldId id="256" r:id="rId2"/>
+    <p:sldId id="257" r:id="rId3"/>
+    <p:sldId id="258" r:id="rId4"/>
+    <p:sldId id="259" r:id="rId5"/>
+    <p:sldId id="260" r:id="rId6"/>
+    <p:sldId id="261" r:id="rId7"/>
+    <p:sldId id="262" r:id="rId8"/>
+    <p:sldId id="263" r:id="rId9"/>
+    <p:sldId id="264" r:id="rId10"/>
+    <p:sldId id="265" r:id="rId11"/>
+    <p:sldId id="266" r:id="rId12"/>
+    <p:sldId id="267" r:id="rId13"/>
+    <p:sldId id="268" r:id="rId14"/>
+    <p:sldId id="269" r:id="rId15"/>
+    <p:sldId id="270" r:id="rId16"/>
+    <p:sldId id="271" r:id="rId18"/>
+    <p:sldId id="272" r:id="rId17"/>
+    <p:sldId id="273" r:id="rId23"/>
+    <p:sldId id="274" r:id="rId24"/>
+    <p:sldId id="275" r:id="rId25"/>
   </p:sldIdLst>
-  <p:sldSz cx="12191695" cy="6858000" type="screen4x3"/>
+  <p:sldSz cx="12192000" cy="6858000"/>
   <p:notesSz cx="6858000" cy="9144000"/>
   <p:defaultTextStyle>
     <a:defPPr>
@@ -119,6 +123,22 @@
       </a:defRPr>
     </a:lvl9pPr>
   </p:defaultTextStyle>
+  <p:extLst>
+    <p:ext uri="{EFAFB233-063F-42B5-8137-9DF3F51BA10A}">
+      <p15:sldGuideLst xmlns:p15="http://schemas.microsoft.com/office/powerpoint/2012/main">
+        <p15:guide id="1" orient="horz" pos="2160">
+          <p15:clr>
+            <a:srgbClr val="A4A3A4"/>
+          </p15:clr>
+        </p15:guide>
+        <p15:guide id="2" pos="2880">
+          <p15:clr>
+            <a:srgbClr val="A4A3A4"/>
+          </p15:clr>
+        </p15:guide>
+      </p15:sldGuideLst>
+    </p:ext>
+  </p:extLst>
 </p:presentation>
 </file>
 
@@ -160,10 +180,9 @@
           <a:lstStyle/>
           <a:p>
             <a:r>
-              <a:rPr lang="en-US" smtClean="0"/>
+              <a:rPr lang="en-US"/>
               <a:t>Click to edit Master title style</a:t>
             </a:r>
-            <a:endParaRPr lang="en-US"/>
           </a:p>
         </p:txBody>
       </p:sp>
@@ -279,10 +298,9 @@
           </a:lstStyle>
           <a:p>
             <a:r>
-              <a:rPr lang="en-US" smtClean="0"/>
+              <a:rPr lang="en-US"/>
               <a:t>Click to edit Master subtitle style</a:t>
             </a:r>
-            <a:endParaRPr lang="en-US"/>
           </a:p>
         </p:txBody>
       </p:sp>
@@ -303,7 +321,7 @@
           <a:p>
             <a:fld id="{5BCAD085-E8A6-8845-BD4E-CB4CCA059FC4}" type="datetimeFigureOut">
               <a:rPr lang="en-US" smtClean="0"/>
-              <a:t>1/27/13</a:t>
+              <a:t>10/21/2026</a:t>
             </a:fld>
             <a:endParaRPr lang="en-US"/>
           </a:p>
@@ -397,10 +415,9 @@
           <a:lstStyle/>
           <a:p>
             <a:r>
-              <a:rPr lang="en-US" smtClean="0"/>
+              <a:rPr lang="en-US"/>
               <a:t>Click to edit Master title style</a:t>
             </a:r>
-            <a:endParaRPr lang="en-US"/>
           </a:p>
         </p:txBody>
       </p:sp>
@@ -421,38 +438,37 @@
           <a:p>
             <a:pPr lvl="0"/>
             <a:r>
-              <a:rPr lang="en-US" smtClean="0"/>
+              <a:rPr lang="en-US"/>
               <a:t>Click to edit Master text styles</a:t>
             </a:r>
           </a:p>
           <a:p>
             <a:pPr lvl="1"/>
             <a:r>
-              <a:rPr lang="en-US" smtClean="0"/>
+              <a:rPr lang="en-US"/>
               <a:t>Second level</a:t>
             </a:r>
           </a:p>
           <a:p>
             <a:pPr lvl="2"/>
             <a:r>
-              <a:rPr lang="en-US" smtClean="0"/>
+              <a:rPr lang="en-US"/>
               <a:t>Third level</a:t>
             </a:r>
           </a:p>
           <a:p>
             <a:pPr lvl="3"/>
             <a:r>
-              <a:rPr lang="en-US" smtClean="0"/>
+              <a:rPr lang="en-US"/>
               <a:t>Fourth level</a:t>
             </a:r>
           </a:p>
           <a:p>
             <a:pPr lvl="4"/>
             <a:r>
-              <a:rPr lang="en-US" smtClean="0"/>
+              <a:rPr lang="en-US"/>
               <a:t>Fifth level</a:t>
             </a:r>
-            <a:endParaRPr lang="en-US"/>
           </a:p>
         </p:txBody>
       </p:sp>
@@ -473,7 +489,7 @@
           <a:p>
             <a:fld id="{5BCAD085-E8A6-8845-BD4E-CB4CCA059FC4}" type="datetimeFigureOut">
               <a:rPr lang="en-US" smtClean="0"/>
-              <a:t>1/27/13</a:t>
+              <a:t>10/21/2026</a:t>
             </a:fld>
             <a:endParaRPr lang="en-US"/>
           </a:p>
@@ -572,10 +588,9 @@
           <a:lstStyle/>
           <a:p>
             <a:r>
-              <a:rPr lang="en-US" smtClean="0"/>
+              <a:rPr lang="en-US"/>
               <a:t>Click to edit Master title style</a:t>
             </a:r>
-            <a:endParaRPr lang="en-US"/>
           </a:p>
         </p:txBody>
       </p:sp>
@@ -601,38 +616,37 @@
           <a:p>
             <a:pPr lvl="0"/>
             <a:r>
-              <a:rPr lang="en-US" smtClean="0"/>
+              <a:rPr lang="en-US"/>
               <a:t>Click to edit Master text styles</a:t>
             </a:r>
           </a:p>
           <a:p>
             <a:pPr lvl="1"/>
             <a:r>
-              <a:rPr lang="en-US" smtClean="0"/>
+              <a:rPr lang="en-US"/>
               <a:t>Second level</a:t>
             </a:r>
           </a:p>
           <a:p>
             <a:pPr lvl="2"/>
             <a:r>
-              <a:rPr lang="en-US" smtClean="0"/>
+              <a:rPr lang="en-US"/>
               <a:t>Third level</a:t>
             </a:r>
           </a:p>
           <a:p>
             <a:pPr lvl="3"/>
             <a:r>
-              <a:rPr lang="en-US" smtClean="0"/>
+              <a:rPr lang="en-US"/>
               <a:t>Fourth level</a:t>
             </a:r>
           </a:p>
           <a:p>
             <a:pPr lvl="4"/>
             <a:r>
-              <a:rPr lang="en-US" smtClean="0"/>
+              <a:rPr lang="en-US"/>
               <a:t>Fifth level</a:t>
             </a:r>
-            <a:endParaRPr lang="en-US"/>
           </a:p>
         </p:txBody>
       </p:sp>
@@ -653,7 +667,7 @@
           <a:p>
             <a:fld id="{5BCAD085-E8A6-8845-BD4E-CB4CCA059FC4}" type="datetimeFigureOut">
               <a:rPr lang="en-US" smtClean="0"/>
-              <a:t>1/27/13</a:t>
+              <a:t>10/21/2026</a:t>
             </a:fld>
             <a:endParaRPr lang="en-US"/>
           </a:p>
@@ -747,10 +761,9 @@
           <a:lstStyle/>
           <a:p>
             <a:r>
-              <a:rPr lang="en-US" smtClean="0"/>
+              <a:rPr lang="en-US"/>
               <a:t>Click to edit Master title style</a:t>
             </a:r>
-            <a:endParaRPr lang="en-US"/>
           </a:p>
         </p:txBody>
       </p:sp>
@@ -771,38 +784,37 @@
           <a:p>
             <a:pPr lvl="0"/>
             <a:r>
-              <a:rPr lang="en-US" smtClean="0"/>
+              <a:rPr lang="en-US"/>
               <a:t>Click to edit Master text styles</a:t>
             </a:r>
           </a:p>
           <a:p>
             <a:pPr lvl="1"/>
             <a:r>
-              <a:rPr lang="en-US" smtClean="0"/>
+              <a:rPr lang="en-US"/>
               <a:t>Second level</a:t>
             </a:r>
           </a:p>
           <a:p>
             <a:pPr lvl="2"/>
             <a:r>
-              <a:rPr lang="en-US" smtClean="0"/>
+              <a:rPr lang="en-US"/>
               <a:t>Third level</a:t>
             </a:r>
           </a:p>
           <a:p>
             <a:pPr lvl="3"/>
             <a:r>
-              <a:rPr lang="en-US" smtClean="0"/>
+              <a:rPr lang="en-US"/>
               <a:t>Fourth level</a:t>
             </a:r>
           </a:p>
           <a:p>
             <a:pPr lvl="4"/>
             <a:r>
-              <a:rPr lang="en-US" smtClean="0"/>
+              <a:rPr lang="en-US"/>
               <a:t>Fifth level</a:t>
             </a:r>
-            <a:endParaRPr lang="en-US"/>
           </a:p>
         </p:txBody>
       </p:sp>
@@ -823,7 +835,7 @@
           <a:p>
             <a:fld id="{5BCAD085-E8A6-8845-BD4E-CB4CCA059FC4}" type="datetimeFigureOut">
               <a:rPr lang="en-US" smtClean="0"/>
-              <a:t>1/27/13</a:t>
+              <a:t>10/21/2026</a:t>
             </a:fld>
             <a:endParaRPr lang="en-US"/>
           </a:p>
@@ -926,10 +938,9 @@
           </a:lstStyle>
           <a:p>
             <a:r>
-              <a:rPr lang="en-US" smtClean="0"/>
+              <a:rPr lang="en-US"/>
               <a:t>Click to edit Master title style</a:t>
             </a:r>
-            <a:endParaRPr lang="en-US"/>
           </a:p>
         </p:txBody>
       </p:sp>
@@ -1046,7 +1057,7 @@
           <a:p>
             <a:pPr lvl="0"/>
             <a:r>
-              <a:rPr lang="en-US" smtClean="0"/>
+              <a:rPr lang="en-US"/>
               <a:t>Click to edit Master text styles</a:t>
             </a:r>
           </a:p>
@@ -1069,7 +1080,7 @@
           <a:p>
             <a:fld id="{5BCAD085-E8A6-8845-BD4E-CB4CCA059FC4}" type="datetimeFigureOut">
               <a:rPr lang="en-US" smtClean="0"/>
-              <a:t>1/27/13</a:t>
+              <a:t>10/21/2026</a:t>
             </a:fld>
             <a:endParaRPr lang="en-US"/>
           </a:p>
@@ -1163,10 +1174,9 @@
           <a:lstStyle/>
           <a:p>
             <a:r>
-              <a:rPr lang="en-US" smtClean="0"/>
+              <a:rPr lang="en-US"/>
               <a:t>Click to edit Master title style</a:t>
             </a:r>
-            <a:endParaRPr lang="en-US"/>
           </a:p>
         </p:txBody>
       </p:sp>
@@ -1220,38 +1230,37 @@
           <a:p>
             <a:pPr lvl="0"/>
             <a:r>
-              <a:rPr lang="en-US" smtClean="0"/>
+              <a:rPr lang="en-US"/>
               <a:t>Click to edit Master text styles</a:t>
             </a:r>
           </a:p>
           <a:p>
             <a:pPr lvl="1"/>
             <a:r>
-              <a:rPr lang="en-US" smtClean="0"/>
+              <a:rPr lang="en-US"/>
               <a:t>Second level</a:t>
             </a:r>
           </a:p>
           <a:p>
             <a:pPr lvl="2"/>
             <a:r>
-              <a:rPr lang="en-US" smtClean="0"/>
+              <a:rPr lang="en-US"/>
               <a:t>Third level</a:t>
             </a:r>
           </a:p>
           <a:p>
             <a:pPr lvl="3"/>
             <a:r>
-              <a:rPr lang="en-US" smtClean="0"/>
+              <a:rPr lang="en-US"/>
               <a:t>Fourth level</a:t>
             </a:r>
           </a:p>
           <a:p>
             <a:pPr lvl="4"/>
             <a:r>
-              <a:rPr lang="en-US" smtClean="0"/>
+              <a:rPr lang="en-US"/>
               <a:t>Fifth level</a:t>
             </a:r>
-            <a:endParaRPr lang="en-US"/>
           </a:p>
         </p:txBody>
       </p:sp>
@@ -1305,38 +1314,37 @@
           <a:p>
             <a:pPr lvl="0"/>
             <a:r>
-              <a:rPr lang="en-US" smtClean="0"/>
+              <a:rPr lang="en-US"/>
               <a:t>Click to edit Master text styles</a:t>
             </a:r>
           </a:p>
           <a:p>
             <a:pPr lvl="1"/>
             <a:r>
-              <a:rPr lang="en-US" smtClean="0"/>
+              <a:rPr lang="en-US"/>
               <a:t>Second level</a:t>
             </a:r>
           </a:p>
           <a:p>
             <a:pPr lvl="2"/>
             <a:r>
-              <a:rPr lang="en-US" smtClean="0"/>
+              <a:rPr lang="en-US"/>
               <a:t>Third level</a:t>
             </a:r>
           </a:p>
           <a:p>
             <a:pPr lvl="3"/>
             <a:r>
-              <a:rPr lang="en-US" smtClean="0"/>
+              <a:rPr lang="en-US"/>
               <a:t>Fourth level</a:t>
             </a:r>
           </a:p>
           <a:p>
             <a:pPr lvl="4"/>
             <a:r>
-              <a:rPr lang="en-US" smtClean="0"/>
+              <a:rPr lang="en-US"/>
               <a:t>Fifth level</a:t>
             </a:r>
-            <a:endParaRPr lang="en-US"/>
           </a:p>
         </p:txBody>
       </p:sp>
@@ -1357,7 +1365,7 @@
           <a:p>
             <a:fld id="{5BCAD085-E8A6-8845-BD4E-CB4CCA059FC4}" type="datetimeFigureOut">
               <a:rPr lang="en-US" smtClean="0"/>
-              <a:t>1/27/13</a:t>
+              <a:t>10/21/2026</a:t>
             </a:fld>
             <a:endParaRPr lang="en-US"/>
           </a:p>
@@ -1455,10 +1463,9 @@
           </a:lstStyle>
           <a:p>
             <a:r>
-              <a:rPr lang="en-US" smtClean="0"/>
+              <a:rPr lang="en-US"/>
               <a:t>Click to edit Master title style</a:t>
             </a:r>
-            <a:endParaRPr lang="en-US"/>
           </a:p>
         </p:txBody>
       </p:sp>
@@ -1521,7 +1528,7 @@
           <a:p>
             <a:pPr lvl="0"/>
             <a:r>
-              <a:rPr lang="en-US" smtClean="0"/>
+              <a:rPr lang="en-US"/>
               <a:t>Click to edit Master text styles</a:t>
             </a:r>
           </a:p>
@@ -1577,38 +1584,37 @@
           <a:p>
             <a:pPr lvl="0"/>
             <a:r>
-              <a:rPr lang="en-US" smtClean="0"/>
+              <a:rPr lang="en-US"/>
               <a:t>Click to edit Master text styles</a:t>
             </a:r>
           </a:p>
           <a:p>
             <a:pPr lvl="1"/>
             <a:r>
-              <a:rPr lang="en-US" smtClean="0"/>
+              <a:rPr lang="en-US"/>
               <a:t>Second level</a:t>
             </a:r>
           </a:p>
           <a:p>
             <a:pPr lvl="2"/>
             <a:r>
-              <a:rPr lang="en-US" smtClean="0"/>
+              <a:rPr lang="en-US"/>
               <a:t>Third level</a:t>
             </a:r>
           </a:p>
           <a:p>
             <a:pPr lvl="3"/>
             <a:r>
-              <a:rPr lang="en-US" smtClean="0"/>
+              <a:rPr lang="en-US"/>
               <a:t>Fourth level</a:t>
             </a:r>
           </a:p>
           <a:p>
             <a:pPr lvl="4"/>
             <a:r>
-              <a:rPr lang="en-US" smtClean="0"/>
+              <a:rPr lang="en-US"/>
               <a:t>Fifth level</a:t>
             </a:r>
-            <a:endParaRPr lang="en-US"/>
           </a:p>
         </p:txBody>
       </p:sp>
@@ -1671,7 +1677,7 @@
           <a:p>
             <a:pPr lvl="0"/>
             <a:r>
-              <a:rPr lang="en-US" smtClean="0"/>
+              <a:rPr lang="en-US"/>
               <a:t>Click to edit Master text styles</a:t>
             </a:r>
           </a:p>
@@ -1727,38 +1733,37 @@
           <a:p>
             <a:pPr lvl="0"/>
             <a:r>
-              <a:rPr lang="en-US" smtClean="0"/>
+              <a:rPr lang="en-US"/>
               <a:t>Click to edit Master text styles</a:t>
             </a:r>
           </a:p>
           <a:p>
             <a:pPr lvl="1"/>
             <a:r>
-              <a:rPr lang="en-US" smtClean="0"/>
+              <a:rPr lang="en-US"/>
               <a:t>Second level</a:t>
             </a:r>
           </a:p>
           <a:p>
             <a:pPr lvl="2"/>
             <a:r>
-              <a:rPr lang="en-US" smtClean="0"/>
+              <a:rPr lang="en-US"/>
               <a:t>Third level</a:t>
             </a:r>
           </a:p>
           <a:p>
             <a:pPr lvl="3"/>
             <a:r>
-              <a:rPr lang="en-US" smtClean="0"/>
+              <a:rPr lang="en-US"/>
               <a:t>Fourth level</a:t>
             </a:r>
           </a:p>
           <a:p>
             <a:pPr lvl="4"/>
             <a:r>
-              <a:rPr lang="en-US" smtClean="0"/>
+              <a:rPr lang="en-US"/>
               <a:t>Fifth level</a:t>
             </a:r>
-            <a:endParaRPr lang="en-US"/>
           </a:p>
         </p:txBody>
       </p:sp>
@@ -1779,7 +1784,7 @@
           <a:p>
             <a:fld id="{5BCAD085-E8A6-8845-BD4E-CB4CCA059FC4}" type="datetimeFigureOut">
               <a:rPr lang="en-US" smtClean="0"/>
-              <a:t>1/27/13</a:t>
+              <a:t>10/21/2026</a:t>
             </a:fld>
             <a:endParaRPr lang="en-US"/>
           </a:p>
@@ -1873,10 +1878,9 @@
           <a:lstStyle/>
           <a:p>
             <a:r>
-              <a:rPr lang="en-US" smtClean="0"/>
+              <a:rPr lang="en-US"/>
               <a:t>Click to edit Master title style</a:t>
             </a:r>
-            <a:endParaRPr lang="en-US"/>
           </a:p>
         </p:txBody>
       </p:sp>
@@ -1897,7 +1901,7 @@
           <a:p>
             <a:fld id="{5BCAD085-E8A6-8845-BD4E-CB4CCA059FC4}" type="datetimeFigureOut">
               <a:rPr lang="en-US" smtClean="0"/>
-              <a:t>1/27/13</a:t>
+              <a:t>10/21/2026</a:t>
             </a:fld>
             <a:endParaRPr lang="en-US"/>
           </a:p>
@@ -1992,7 +1996,7 @@
           <a:p>
             <a:fld id="{5BCAD085-E8A6-8845-BD4E-CB4CCA059FC4}" type="datetimeFigureOut">
               <a:rPr lang="en-US" smtClean="0"/>
-              <a:t>1/27/13</a:t>
+              <a:t>10/21/2026</a:t>
             </a:fld>
             <a:endParaRPr lang="en-US"/>
           </a:p>
@@ -2095,10 +2099,9 @@
           </a:lstStyle>
           <a:p>
             <a:r>
-              <a:rPr lang="en-US" smtClean="0"/>
+              <a:rPr lang="en-US"/>
               <a:t>Click to edit Master title style</a:t>
             </a:r>
-            <a:endParaRPr lang="en-US"/>
           </a:p>
         </p:txBody>
       </p:sp>
@@ -2152,38 +2155,37 @@
           <a:p>
             <a:pPr lvl="0"/>
             <a:r>
-              <a:rPr lang="en-US" smtClean="0"/>
+              <a:rPr lang="en-US"/>
               <a:t>Click to edit Master text styles</a:t>
             </a:r>
           </a:p>
           <a:p>
             <a:pPr lvl="1"/>
             <a:r>
-              <a:rPr lang="en-US" smtClean="0"/>
+              <a:rPr lang="en-US"/>
               <a:t>Second level</a:t>
             </a:r>
           </a:p>
           <a:p>
             <a:pPr lvl="2"/>
             <a:r>
-              <a:rPr lang="en-US" smtClean="0"/>
+              <a:rPr lang="en-US"/>
               <a:t>Third level</a:t>
             </a:r>
           </a:p>
           <a:p>
             <a:pPr lvl="3"/>
             <a:r>
-              <a:rPr lang="en-US" smtClean="0"/>
+              <a:rPr lang="en-US"/>
               <a:t>Fourth level</a:t>
             </a:r>
           </a:p>
           <a:p>
             <a:pPr lvl="4"/>
             <a:r>
-              <a:rPr lang="en-US" smtClean="0"/>
+              <a:rPr lang="en-US"/>
               <a:t>Fifth level</a:t>
             </a:r>
-            <a:endParaRPr lang="en-US"/>
           </a:p>
         </p:txBody>
       </p:sp>
@@ -2246,7 +2248,7 @@
           <a:p>
             <a:pPr lvl="0"/>
             <a:r>
-              <a:rPr lang="en-US" smtClean="0"/>
+              <a:rPr lang="en-US"/>
               <a:t>Click to edit Master text styles</a:t>
             </a:r>
           </a:p>
@@ -2269,7 +2271,7 @@
           <a:p>
             <a:fld id="{5BCAD085-E8A6-8845-BD4E-CB4CCA059FC4}" type="datetimeFigureOut">
               <a:rPr lang="en-US" smtClean="0"/>
-              <a:t>1/27/13</a:t>
+              <a:t>10/21/2026</a:t>
             </a:fld>
             <a:endParaRPr lang="en-US"/>
           </a:p>
@@ -2372,10 +2374,9 @@
           </a:lstStyle>
           <a:p>
             <a:r>
-              <a:rPr lang="en-US" smtClean="0"/>
+              <a:rPr lang="en-US"/>
               <a:t>Click to edit Master title style</a:t>
             </a:r>
-            <a:endParaRPr lang="en-US"/>
           </a:p>
         </p:txBody>
       </p:sp>
@@ -2499,7 +2500,7 @@
           <a:p>
             <a:pPr lvl="0"/>
             <a:r>
-              <a:rPr lang="en-US" smtClean="0"/>
+              <a:rPr lang="en-US"/>
               <a:t>Click to edit Master text styles</a:t>
             </a:r>
           </a:p>
@@ -2522,7 +2523,7 @@
           <a:p>
             <a:fld id="{5BCAD085-E8A6-8845-BD4E-CB4CCA059FC4}" type="datetimeFigureOut">
               <a:rPr lang="en-US" smtClean="0"/>
-              <a:t>1/27/13</a:t>
+              <a:t>10/21/2026</a:t>
             </a:fld>
             <a:endParaRPr lang="en-US"/>
           </a:p>
@@ -2631,10 +2632,9 @@
           <a:lstStyle/>
           <a:p>
             <a:r>
-              <a:rPr lang="en-US" smtClean="0"/>
+              <a:rPr lang="en-US"/>
               <a:t>Click to edit Master title style</a:t>
             </a:r>
-            <a:endParaRPr lang="en-US"/>
           </a:p>
         </p:txBody>
       </p:sp>
@@ -2665,38 +2665,37 @@
           <a:p>
             <a:pPr lvl="0"/>
             <a:r>
-              <a:rPr lang="en-US" smtClean="0"/>
+              <a:rPr lang="en-US"/>
               <a:t>Click to edit Master text styles</a:t>
             </a:r>
           </a:p>
           <a:p>
             <a:pPr lvl="1"/>
             <a:r>
-              <a:rPr lang="en-US" smtClean="0"/>
+              <a:rPr lang="en-US"/>
               <a:t>Second level</a:t>
             </a:r>
           </a:p>
           <a:p>
             <a:pPr lvl="2"/>
             <a:r>
-              <a:rPr lang="en-US" smtClean="0"/>
+              <a:rPr lang="en-US"/>
               <a:t>Third level</a:t>
             </a:r>
           </a:p>
           <a:p>
             <a:pPr lvl="3"/>
             <a:r>
-              <a:rPr lang="en-US" smtClean="0"/>
+              <a:rPr lang="en-US"/>
               <a:t>Fourth level</a:t>
             </a:r>
           </a:p>
           <a:p>
             <a:pPr lvl="4"/>
             <a:r>
-              <a:rPr lang="en-US" smtClean="0"/>
+              <a:rPr lang="en-US"/>
               <a:t>Fifth level</a:t>
             </a:r>
-            <a:endParaRPr lang="en-US"/>
           </a:p>
         </p:txBody>
       </p:sp>
@@ -2735,7 +2734,7 @@
           <a:p>
             <a:fld id="{5BCAD085-E8A6-8845-BD4E-CB4CCA059FC4}" type="datetimeFigureOut">
               <a:rPr lang="en-US" smtClean="0"/>
-              <a:t>1/27/13</a:t>
+              <a:t>10/21/2026</a:t>
             </a:fld>
             <a:endParaRPr lang="en-US"/>
           </a:p>
@@ -3094,7 +3093,7 @@
 </file>
 
 <file path=ppt/slides/slide1.xml><?xml version="1.0" encoding="utf-8"?>
-<p:sld xmlns:a="http://schemas.openxmlformats.org/drawingml/2006/main" xmlns:p="http://schemas.openxmlformats.org/presentationml/2006/main" xmlns:r="http://schemas.openxmlformats.org/officeDocument/2006/relationships">
+<p:sld xmlns:a="http://schemas.openxmlformats.org/drawingml/2006/main" xmlns:r="http://schemas.openxmlformats.org/officeDocument/2006/relationships" xmlns:p="http://schemas.openxmlformats.org/presentationml/2006/main">
   <p:cSld>
     <p:spTree>
       <p:nvGrpSpPr>
@@ -3102,7 +3101,14 @@
         <p:cNvGrpSpPr/>
         <p:nvPr/>
       </p:nvGrpSpPr>
-      <p:grpSpPr/>
+      <p:grpSpPr>
+        <a:xfrm>
+          <a:off x="0" y="0"/>
+          <a:ext cx="0" cy="0"/>
+          <a:chOff x="0" y="0"/>
+          <a:chExt cx="0" cy="0"/>
+        </a:xfrm>
+      </p:grpSpPr>
       <p:sp>
         <p:nvSpPr>
           <p:cNvPr id="2" name="Rectangle 1"/>
@@ -3143,6 +3149,7 @@
           <a:lstStyle/>
           <a:p>
             <a:pPr algn="ctr"/>
+            <a:endParaRPr/>
           </a:p>
         </p:txBody>
       </p:sp>
@@ -3403,7 +3410,7 @@
 </file>
 
 <file path=ppt/slides/slide10.xml><?xml version="1.0" encoding="utf-8"?>
-<p:sld xmlns:a="http://schemas.openxmlformats.org/drawingml/2006/main" xmlns:p="http://schemas.openxmlformats.org/presentationml/2006/main" xmlns:r="http://schemas.openxmlformats.org/officeDocument/2006/relationships">
+<p:sld xmlns:a="http://schemas.openxmlformats.org/drawingml/2006/main" xmlns:r="http://schemas.openxmlformats.org/officeDocument/2006/relationships" xmlns:p="http://schemas.openxmlformats.org/presentationml/2006/main">
   <p:cSld>
     <p:spTree>
       <p:nvGrpSpPr>
@@ -3411,7 +3418,14 @@
         <p:cNvGrpSpPr/>
         <p:nvPr/>
       </p:nvGrpSpPr>
-      <p:grpSpPr/>
+      <p:grpSpPr>
+        <a:xfrm>
+          <a:off x="0" y="0"/>
+          <a:ext cx="0" cy="0"/>
+          <a:chOff x="0" y="0"/>
+          <a:chExt cx="0" cy="0"/>
+        </a:xfrm>
+      </p:grpSpPr>
       <p:sp>
         <p:nvSpPr>
           <p:cNvPr id="2" name="Rectangle 1"/>
@@ -3452,6 +3466,7 @@
           <a:lstStyle/>
           <a:p>
             <a:pPr algn="ctr"/>
+            <a:endParaRPr/>
           </a:p>
         </p:txBody>
       </p:sp>
@@ -3603,6 +3618,7 @@
           <a:lstStyle/>
           <a:p>
             <a:pPr algn="ctr"/>
+            <a:endParaRPr/>
           </a:p>
         </p:txBody>
       </p:sp>
@@ -3644,7 +3660,7 @@
           </a:fontRef>
         </p:style>
         <p:txBody>
-          <a:bodyPr rtlCol="0" anchor="ctr" wrap="square" lIns="274320"/>
+          <a:bodyPr wrap="square" lIns="274320" rtlCol="0" anchor="ctr"/>
           <a:lstStyle/>
           <a:p>
             <a:pPr algn="ctr">
@@ -3713,7 +3729,7 @@
           </a:fontRef>
         </p:style>
         <p:txBody>
-          <a:bodyPr rtlCol="0" anchor="ctr" wrap="square" lIns="182880"/>
+          <a:bodyPr wrap="square" lIns="182880" rtlCol="0" anchor="ctr"/>
           <a:lstStyle/>
           <a:p>
             <a:pPr algn="ctr">
@@ -3797,7 +3813,7 @@
           </a:fontRef>
         </p:style>
         <p:txBody>
-          <a:bodyPr rtlCol="0" anchor="ctr" wrap="square" lIns="182880"/>
+          <a:bodyPr wrap="square" lIns="182880" rtlCol="0" anchor="ctr"/>
           <a:lstStyle/>
           <a:p>
             <a:pPr algn="ctr">
@@ -3881,7 +3897,7 @@
           </a:fontRef>
         </p:style>
         <p:txBody>
-          <a:bodyPr rtlCol="0" anchor="ctr" wrap="square" lIns="182880"/>
+          <a:bodyPr wrap="square" lIns="182880" rtlCol="0" anchor="ctr"/>
           <a:lstStyle/>
           <a:p>
             <a:pPr algn="ctr">
@@ -3965,7 +3981,7 @@
           </a:fontRef>
         </p:style>
         <p:txBody>
-          <a:bodyPr rtlCol="0" anchor="ctr" wrap="square" lIns="182880"/>
+          <a:bodyPr wrap="square" lIns="182880" rtlCol="0" anchor="ctr"/>
           <a:lstStyle/>
           <a:p>
             <a:pPr algn="ctr">
@@ -4092,7 +4108,7 @@
 </file>
 
 <file path=ppt/slides/slide11.xml><?xml version="1.0" encoding="utf-8"?>
-<p:sld xmlns:a="http://schemas.openxmlformats.org/drawingml/2006/main" xmlns:p="http://schemas.openxmlformats.org/presentationml/2006/main" xmlns:r="http://schemas.openxmlformats.org/officeDocument/2006/relationships">
+<p:sld xmlns:a="http://schemas.openxmlformats.org/drawingml/2006/main" xmlns:r="http://schemas.openxmlformats.org/officeDocument/2006/relationships" xmlns:p="http://schemas.openxmlformats.org/presentationml/2006/main">
   <p:cSld>
     <p:spTree>
       <p:nvGrpSpPr>
@@ -4100,7 +4116,14 @@
         <p:cNvGrpSpPr/>
         <p:nvPr/>
       </p:nvGrpSpPr>
-      <p:grpSpPr/>
+      <p:grpSpPr>
+        <a:xfrm>
+          <a:off x="0" y="0"/>
+          <a:ext cx="0" cy="0"/>
+          <a:chOff x="0" y="0"/>
+          <a:chExt cx="0" cy="0"/>
+        </a:xfrm>
+      </p:grpSpPr>
       <p:sp>
         <p:nvSpPr>
           <p:cNvPr id="2" name="Rectangle 1"/>
@@ -4141,6 +4164,7 @@
           <a:lstStyle/>
           <a:p>
             <a:pPr algn="ctr"/>
+            <a:endParaRPr/>
           </a:p>
         </p:txBody>
       </p:sp>
@@ -4292,6 +4316,7 @@
           <a:lstStyle/>
           <a:p>
             <a:pPr algn="ctr"/>
+            <a:endParaRPr/>
           </a:p>
         </p:txBody>
       </p:sp>
@@ -4333,7 +4358,7 @@
           </a:fontRef>
         </p:style>
         <p:txBody>
-          <a:bodyPr rtlCol="0" anchor="ctr" wrap="square" lIns="274320"/>
+          <a:bodyPr wrap="square" lIns="274320" rtlCol="0" anchor="ctr"/>
           <a:lstStyle/>
           <a:p>
             <a:pPr algn="ctr">
@@ -4462,7 +4487,7 @@
           </a:fontRef>
         </p:style>
         <p:txBody>
-          <a:bodyPr rtlCol="0" anchor="ctr" wrap="square" lIns="274320"/>
+          <a:bodyPr wrap="square" lIns="274320" rtlCol="0" anchor="ctr"/>
           <a:lstStyle/>
           <a:p>
             <a:pPr algn="ctr">
@@ -4473,6 +4498,7 @@
               </a:defRPr>
             </a:pPr>
             <a:r>
+              <a:rPr dirty="0"/>
               <a:t>International Methodological Standards</a:t>
             </a:r>
           </a:p>
@@ -4488,6 +4514,7 @@
               </a:defRPr>
             </a:pPr>
             <a:r>
+              <a:rPr dirty="0"/>
               <a:t>• PRISMA 2020: Fully compliant with Preferred Reporting Items for Systematic Reviews and Meta-Analyses.</a:t>
             </a:r>
           </a:p>
@@ -4503,6 +4530,7 @@
               </a:defRPr>
             </a:pPr>
             <a:r>
+              <a:rPr dirty="0"/>
               <a:t>• CONSORT 2010: Aligned with Consolidated Standards of Reporting Trials guidelines for clinical trials.</a:t>
             </a:r>
           </a:p>
@@ -4518,6 +4546,7 @@
               </a:defRPr>
             </a:pPr>
             <a:r>
+              <a:rPr dirty="0"/>
               <a:t>• Cochrane Handbook Core: Inverted-variance weighting, random-effects models, and small-study bias auditing.</a:t>
             </a:r>
           </a:p>
@@ -4533,6 +4562,7 @@
               </a:defRPr>
             </a:pPr>
             <a:r>
+              <a:rPr dirty="0"/>
               <a:t>• GRADE Framework Ready: Transparent confidence grading on all reconstructed and pooled evidence recommendations.</a:t>
             </a:r>
           </a:p>
@@ -4548,7 +4578,16 @@
               </a:defRPr>
             </a:pPr>
             <a:r>
-              <a:t>• Open Science &amp; Reproducibility: Validated to yield identical numerical results to R metafor and netmeta.</a:t>
+              <a:rPr dirty="0"/>
+              <a:t>• Open Science &amp; Reproducibility: Validated to yield identical numerical results to R metafor and </a:t>
+            </a:r>
+            <a:r>
+              <a:rPr dirty="0" err="1"/>
+              <a:t>netmeta</a:t>
+            </a:r>
+            <a:r>
+              <a:rPr dirty="0"/>
+              <a:t>.</a:t>
             </a:r>
           </a:p>
         </p:txBody>
@@ -4634,7 +4673,7 @@
 </file>
 
 <file path=ppt/slides/slide12.xml><?xml version="1.0" encoding="utf-8"?>
-<p:sld xmlns:a="http://schemas.openxmlformats.org/drawingml/2006/main" xmlns:p="http://schemas.openxmlformats.org/presentationml/2006/main" xmlns:r="http://schemas.openxmlformats.org/officeDocument/2006/relationships">
+<p:sld xmlns:a="http://schemas.openxmlformats.org/drawingml/2006/main" xmlns:r="http://schemas.openxmlformats.org/officeDocument/2006/relationships" xmlns:p="http://schemas.openxmlformats.org/presentationml/2006/main">
   <p:cSld>
     <p:spTree>
       <p:nvGrpSpPr>
@@ -4642,7 +4681,14 @@
         <p:cNvGrpSpPr/>
         <p:nvPr/>
       </p:nvGrpSpPr>
-      <p:grpSpPr/>
+      <p:grpSpPr>
+        <a:xfrm>
+          <a:off x="0" y="0"/>
+          <a:ext cx="0" cy="0"/>
+          <a:chOff x="0" y="0"/>
+          <a:chExt cx="0" cy="0"/>
+        </a:xfrm>
+      </p:grpSpPr>
       <p:sp>
         <p:nvSpPr>
           <p:cNvPr id="2" name="Rectangle 1"/>
@@ -4683,6 +4729,7 @@
           <a:lstStyle/>
           <a:p>
             <a:pPr algn="ctr"/>
+            <a:endParaRPr/>
           </a:p>
         </p:txBody>
       </p:sp>
@@ -4754,8 +4801,8 @@
         </p:nvSpPr>
         <p:spPr>
           <a:xfrm>
-            <a:off x="1371600" y="3566160"/>
-            <a:ext cx="9448495" cy="1371600"/>
+            <a:off x="731520" y="3501192"/>
+            <a:ext cx="10504599" cy="954107"/>
           </a:xfrm>
           <a:prstGeom prst="rect">
             <a:avLst/>
@@ -4763,7 +4810,7 @@
           <a:noFill/>
         </p:spPr>
         <p:txBody>
-          <a:bodyPr wrap="none">
+          <a:bodyPr wrap="square">
             <a:spAutoFit/>
           </a:bodyPr>
           <a:lstStyle/>
@@ -4777,7 +4824,31 @@
               </a:defRPr>
             </a:pPr>
             <a:r>
-              <a:t>MANDOROS bridges the gap between massive clinical trial literature and rapid evidence-based medicine. By eliminating manual transcription, enforcing zero-hallucination verbatim citations, and deploying metafor-grade biostatistics, we empower academic institutions, healthcare systems, and pharmaceutical innovators to discover insights that save lives.</a:t>
+              <a:rPr dirty="0"/>
+              <a:t>MANDOROS bridges the gap between massive clinical trial literature and rapid evidence-based medicine. By eliminating manual transcription, enforcing zero-hallucination verbatim citations,</a:t>
+            </a:r>
+            <a:endParaRPr lang="ar-EG" dirty="0"/>
+          </a:p>
+          <a:p>
+            <a:pPr algn="ctr">
+              <a:defRPr sz="1400">
+                <a:solidFill>
+                  <a:srgbClr val="CBD5E1"/>
+                </a:solidFill>
+                <a:latin typeface="Arial"/>
+              </a:defRPr>
+            </a:pPr>
+            <a:r>
+              <a:rPr dirty="0"/>
+              <a:t> and deploying </a:t>
+            </a:r>
+            <a:r>
+              <a:rPr dirty="0" err="1"/>
+              <a:t>metafor</a:t>
+            </a:r>
+            <a:r>
+              <a:rPr dirty="0"/>
+              <a:t>-grade biostatistics, we empower academic institutions, healthcare systems, and pharmaceutical innovators to discover insights that save lives.</a:t>
             </a:r>
           </a:p>
         </p:txBody>
@@ -4917,7 +4988,7 @@
 </file>
 
 <file path=ppt/slides/slide13.xml><?xml version="1.0" encoding="utf-8"?>
-<p:sld xmlns:a="http://schemas.openxmlformats.org/drawingml/2006/main" xmlns:p="http://schemas.openxmlformats.org/presentationml/2006/main" xmlns:r="http://schemas.openxmlformats.org/officeDocument/2006/relationships">
+<p:sld xmlns:a="http://schemas.openxmlformats.org/drawingml/2006/main" xmlns:r="http://schemas.openxmlformats.org/officeDocument/2006/relationships" xmlns:p="http://schemas.openxmlformats.org/presentationml/2006/main">
   <p:cSld>
     <p:bg>
       <p:bgPr>
@@ -4933,7 +5004,14 @@
         <p:cNvGrpSpPr/>
         <p:nvPr/>
       </p:nvGrpSpPr>
-      <p:grpSpPr/>
+      <p:grpSpPr>
+        <a:xfrm>
+          <a:off x="0" y="0"/>
+          <a:ext cx="0" cy="0"/>
+          <a:chOff x="0" y="0"/>
+          <a:chExt cx="0" cy="0"/>
+        </a:xfrm>
+      </p:grpSpPr>
       <p:sp>
         <p:nvSpPr>
           <p:cNvPr id="2" name="TextBox 1"/>
@@ -5093,7 +5171,7 @@
           </a:fontRef>
         </p:style>
         <p:txBody>
-          <a:bodyPr rtlCol="0" anchor="ctr" wrap="square" lIns="228600" rIns="228600" tIns="228600" bIns="228600"/>
+          <a:bodyPr wrap="square" lIns="228600" tIns="228600" rIns="228600" bIns="228600" rtlCol="0" anchor="ctr"/>
           <a:lstStyle/>
           <a:p>
             <a:pPr algn="ctr">
@@ -5228,7 +5306,7 @@
           </a:fontRef>
         </p:style>
         <p:txBody>
-          <a:bodyPr rtlCol="0" anchor="ctr" wrap="square" lIns="228600" rIns="228600" tIns="228600" bIns="228600"/>
+          <a:bodyPr wrap="square" lIns="228600" tIns="228600" rIns="228600" bIns="228600" rtlCol="0" anchor="ctr"/>
           <a:lstStyle/>
           <a:p>
             <a:pPr algn="ctr">
@@ -5363,7 +5441,7 @@
           </a:fontRef>
         </p:style>
         <p:txBody>
-          <a:bodyPr rtlCol="0" anchor="ctr" wrap="square" lIns="228600" rIns="228600" tIns="228600" bIns="228600"/>
+          <a:bodyPr wrap="square" lIns="228600" tIns="228600" rIns="228600" bIns="228600" rtlCol="0" anchor="ctr"/>
           <a:lstStyle/>
           <a:p>
             <a:pPr algn="ctr">
@@ -5541,7 +5619,7 @@
 </file>
 
 <file path=ppt/slides/slide14.xml><?xml version="1.0" encoding="utf-8"?>
-<p:sld xmlns:a="http://schemas.openxmlformats.org/drawingml/2006/main" xmlns:p="http://schemas.openxmlformats.org/presentationml/2006/main" xmlns:r="http://schemas.openxmlformats.org/officeDocument/2006/relationships">
+<p:sld xmlns:a="http://schemas.openxmlformats.org/drawingml/2006/main" xmlns:r="http://schemas.openxmlformats.org/officeDocument/2006/relationships" xmlns:p="http://schemas.openxmlformats.org/presentationml/2006/main">
   <p:cSld>
     <p:bg>
       <p:bgPr>
@@ -5557,7 +5635,14 @@
         <p:cNvGrpSpPr/>
         <p:nvPr/>
       </p:nvGrpSpPr>
-      <p:grpSpPr/>
+      <p:grpSpPr>
+        <a:xfrm>
+          <a:off x="0" y="0"/>
+          <a:ext cx="0" cy="0"/>
+          <a:chOff x="0" y="0"/>
+          <a:chExt cx="0" cy="0"/>
+        </a:xfrm>
+      </p:grpSpPr>
       <p:sp>
         <p:nvSpPr>
           <p:cNvPr id="2" name="TextBox 1"/>
@@ -5721,6 +5806,7 @@
           <a:lstStyle/>
           <a:p>
             <a:pPr algn="ctr"/>
+            <a:endParaRPr/>
           </a:p>
         </p:txBody>
       </p:sp>
@@ -5901,6 +5987,7 @@
           <a:lstStyle/>
           <a:p>
             <a:pPr algn="ctr"/>
+            <a:endParaRPr/>
           </a:p>
         </p:txBody>
       </p:sp>
@@ -6081,6 +6168,7 @@
           <a:lstStyle/>
           <a:p>
             <a:pPr algn="ctr"/>
+            <a:endParaRPr/>
           </a:p>
         </p:txBody>
       </p:sp>
@@ -6245,6 +6333,7 @@
           <a:lstStyle/>
           <a:p>
             <a:pPr algn="ctr"/>
+            <a:endParaRPr/>
           </a:p>
         </p:txBody>
       </p:sp>
@@ -6293,7 +6382,7 @@
 </file>
 
 <file path=ppt/slides/slide15.xml><?xml version="1.0" encoding="utf-8"?>
-<p:sld xmlns:a="http://schemas.openxmlformats.org/drawingml/2006/main" xmlns:p="http://schemas.openxmlformats.org/presentationml/2006/main" xmlns:r="http://schemas.openxmlformats.org/officeDocument/2006/relationships">
+<p:sld xmlns:a="http://schemas.openxmlformats.org/drawingml/2006/main" xmlns:r="http://schemas.openxmlformats.org/officeDocument/2006/relationships" xmlns:p="http://schemas.openxmlformats.org/presentationml/2006/main">
   <p:cSld>
     <p:bg>
       <p:bgPr>
@@ -6309,7 +6398,14 @@
         <p:cNvGrpSpPr/>
         <p:nvPr/>
       </p:nvGrpSpPr>
-      <p:grpSpPr/>
+      <p:grpSpPr>
+        <a:xfrm>
+          <a:off x="0" y="0"/>
+          <a:ext cx="0" cy="0"/>
+          <a:chOff x="0" y="0"/>
+          <a:chExt cx="0" cy="0"/>
+        </a:xfrm>
+      </p:grpSpPr>
       <p:sp>
         <p:nvSpPr>
           <p:cNvPr id="2" name="TextBox 1"/>
@@ -6473,6 +6569,7 @@
           <a:lstStyle/>
           <a:p>
             <a:pPr algn="ctr"/>
+            <a:endParaRPr/>
           </a:p>
         </p:txBody>
       </p:sp>
@@ -6637,6 +6734,7 @@
           <a:lstStyle/>
           <a:p>
             <a:pPr algn="ctr"/>
+            <a:endParaRPr/>
           </a:p>
         </p:txBody>
       </p:sp>
@@ -6801,6 +6899,7 @@
           <a:lstStyle/>
           <a:p>
             <a:pPr algn="ctr"/>
+            <a:endParaRPr/>
           </a:p>
         </p:txBody>
       </p:sp>
@@ -6965,6 +7064,7 @@
           <a:lstStyle/>
           <a:p>
             <a:pPr algn="ctr"/>
+            <a:endParaRPr/>
           </a:p>
         </p:txBody>
       </p:sp>
@@ -7055,6 +7155,2166 @@
             <a:pPr>
               <a:defRPr sz="1000" b="1">
                 <a:solidFill>
+                  <a:srgbClr val="C084FC"/>
+                </a:solidFill>
+                <a:latin typeface="Arial"/>
+              </a:defRPr>
+            </a:pPr>
+            <a:r>
+              <a:t>RESEARCH TRANSLATION &amp; BIOSTATISTICAL RIGOR</a:t>
+            </a:r>
+          </a:p>
+        </p:txBody>
+      </p:sp>
+      <p:sp>
+        <p:nvSpPr>
+          <p:cNvPr id="3" name="TextBox 2"/>
+          <p:cNvSpPr txBox="1"/>
+          <p:nvPr/>
+        </p:nvSpPr>
+        <p:spPr>
+          <a:xfrm>
+            <a:off x="8412480" y="365760"/>
+            <a:ext cx="3017520" cy="320040"/>
+          </a:xfrm>
+          <a:prstGeom prst="rect">
+            <a:avLst/>
+          </a:prstGeom>
+          <a:noFill/>
+        </p:spPr>
+        <p:txBody>
+          <a:bodyPr wrap="none">
+            <a:spAutoFit/>
+          </a:bodyPr>
+          <a:lstStyle/>
+          <a:p>
+            <a:pPr algn="r">
+              <a:defRPr sz="1000" b="1">
+                <a:solidFill>
+                  <a:srgbClr val="94A3B8"/>
+                </a:solidFill>
+                <a:latin typeface="Arial"/>
+              </a:defRPr>
+            </a:pPr>
+            <a:r>
+              <a:t>THE 5 PILLARS OF RIGOR</a:t>
+            </a:r>
+          </a:p>
+        </p:txBody>
+      </p:sp>
+      <p:sp>
+        <p:nvSpPr>
+          <p:cNvPr id="4" name="TextBox 3"/>
+          <p:cNvSpPr txBox="1"/>
+          <p:nvPr/>
+        </p:nvSpPr>
+        <p:spPr>
+          <a:xfrm>
+            <a:off x="731520" y="685800"/>
+            <a:ext cx="10515600" cy="685800"/>
+          </a:xfrm>
+          <a:prstGeom prst="rect">
+            <a:avLst/>
+          </a:prstGeom>
+          <a:noFill/>
+        </p:spPr>
+        <p:txBody>
+          <a:bodyPr wrap="square">
+            <a:spAutoFit/>
+          </a:bodyPr>
+          <a:lstStyle/>
+          <a:p>
+            <a:pPr>
+              <a:defRPr sz="2100" b="1">
+                <a:solidFill>
+                  <a:srgbClr val="F8FAFC"/>
+                </a:solidFill>
+                <a:latin typeface="Arial"/>
+              </a:defRPr>
+            </a:pPr>
+            <a:r>
+              <a:t>The 5 Pillars of Academic Rigor &amp; Biostatistical Calibration</a:t>
+            </a:r>
+          </a:p>
+          <a:p>
+            <a:pPr>
+              <a:defRPr sz="1100">
+                <a:solidFill>
+                  <a:srgbClr val="94A3B8"/>
+                </a:solidFill>
+                <a:latin typeface="Arial"/>
+              </a:defRPr>
+            </a:pPr>
+            <a:r>
+              <a:t>End-to-End Methodology: From Cross-Study Evidence Matrix to Deterministic Power Calibration &amp; SPIRIT 2013 Protocol.</a:t>
+            </a:r>
+          </a:p>
+        </p:txBody>
+      </p:sp>
+      <p:sp>
+        <p:nvSpPr>
+          <p:cNvPr id="5" name="Rounded Rectangle 4"/>
+          <p:cNvSpPr/>
+          <p:nvPr/>
+        </p:nvSpPr>
+        <p:spPr>
+          <a:xfrm>
+            <a:off x="731520" y="1508760"/>
+            <a:ext cx="3383280" cy="4297680"/>
+          </a:xfrm>
+          <a:prstGeom prst="roundRect">
+            <a:avLst/>
+          </a:prstGeom>
+          <a:solidFill>
+            <a:srgbClr val="0F172A"/>
+          </a:solidFill>
+          <a:ln w="19050">
+            <a:solidFill>
+              <a:srgbClr val="F59E0B"/>
+            </a:solidFill>
+          </a:ln>
+        </p:spPr>
+        <p:style>
+          <a:lnRef idx="1">
+            <a:schemeClr val="accent1"/>
+          </a:lnRef>
+          <a:fillRef idx="3">
+            <a:schemeClr val="accent1"/>
+          </a:fillRef>
+          <a:effectRef idx="2">
+            <a:schemeClr val="accent1"/>
+          </a:effectRef>
+          <a:fontRef idx="minor">
+            <a:schemeClr val="lt1"/>
+          </a:fontRef>
+        </p:style>
+        <p:txBody>
+          <a:bodyPr rtlCol="0" anchor="ctr"/>
+          <a:lstStyle/>
+          <a:p>
+            <a:pPr algn="ctr"/>
+          </a:p>
+        </p:txBody>
+      </p:sp>
+      <p:sp>
+        <p:nvSpPr>
+          <p:cNvPr id="6" name="TextBox 5"/>
+          <p:cNvSpPr txBox="1"/>
+          <p:nvPr/>
+        </p:nvSpPr>
+        <p:spPr>
+          <a:xfrm>
+            <a:off x="896112" y="1673352"/>
+            <a:ext cx="3054096" cy="3968496"/>
+          </a:xfrm>
+          <a:prstGeom prst="rect">
+            <a:avLst/>
+          </a:prstGeom>
+          <a:noFill/>
+        </p:spPr>
+        <p:txBody>
+          <a:bodyPr wrap="square">
+            <a:spAutoFit/>
+          </a:bodyPr>
+          <a:lstStyle/>
+          <a:p>
+            <a:pPr>
+              <a:spcAft>
+                <a:spcPts val="400"/>
+              </a:spcAft>
+              <a:defRPr sz="950" b="1">
+                <a:solidFill>
+                  <a:srgbClr val="F59E0B"/>
+                </a:solidFill>
+                <a:latin typeface="Arial"/>
+              </a:defRPr>
+            </a:pPr>
+            <a:r>
+              <a:t>PILLARS I &amp; II: DISCOVERY &amp; REALITY GATE</a:t>
+            </a:r>
+          </a:p>
+          <a:p>
+            <a:pPr>
+              <a:spcAft>
+                <a:spcPts val="1000"/>
+              </a:spcAft>
+              <a:defRPr sz="1300" b="1">
+                <a:solidFill>
+                  <a:srgbClr val="F8FAFC"/>
+                </a:solidFill>
+                <a:latin typeface="Arial"/>
+              </a:defRPr>
+            </a:pPr>
+            <a:r>
+              <a:t>Cross-Study Evidence Matrix &amp; Reality Gate</a:t>
+            </a:r>
+          </a:p>
+          <a:p>
+            <a:pPr>
+              <a:spcAft>
+                <a:spcPts val="600"/>
+              </a:spcAft>
+              <a:defRPr sz="950">
+                <a:solidFill>
+                  <a:srgbClr val="CBD5E1"/>
+                </a:solidFill>
+                <a:latin typeface="Arial"/>
+              </a:defRPr>
+            </a:pPr>
+            <a:r>
+              <a:t>• Cross-Study Evidence Matrix (Pillar I): Dynamically aggregates PICO characteristics, comparator arms, patient demographics, and multi-endpoint data across all ingested trials.</a:t>
+            </a:r>
+          </a:p>
+          <a:p>
+            <a:pPr>
+              <a:spcAft>
+                <a:spcPts val="600"/>
+              </a:spcAft>
+              <a:defRPr sz="950">
+                <a:solidFill>
+                  <a:srgbClr val="CBD5E1"/>
+                </a:solidFill>
+                <a:latin typeface="Arial"/>
+              </a:defRPr>
+            </a:pPr>
+            <a:r>
+              <a:t>• 5 Algorithmic Gap Archetypes: Detects active comparator voids, unmeasured patient-reported outcomes (PROs), high-risk subpopulations (e.g. eGFR &lt; 30 / geriatrics), duration plateaus, and dose-titration voids.</a:t>
+            </a:r>
+          </a:p>
+          <a:p>
+            <a:pPr>
+              <a:spcAft>
+                <a:spcPts val="600"/>
+              </a:spcAft>
+              <a:defRPr sz="950">
+                <a:solidFill>
+                  <a:srgbClr val="CBD5E1"/>
+                </a:solidFill>
+                <a:latin typeface="Arial"/>
+              </a:defRPr>
+            </a:pPr>
+            <a:r>
+              <a:t>• Live Scholarly Reality Check (Pillar II): Automates real-time verification queries against ClinicalTrials.gov APIv2, PubMed, and OpenAlex to cross-reference ongoing research.</a:t>
+            </a:r>
+          </a:p>
+          <a:p>
+            <a:pPr>
+              <a:spcAft>
+                <a:spcPts val="600"/>
+              </a:spcAft>
+              <a:defRPr sz="950">
+                <a:solidFill>
+                  <a:srgbClr val="CBD5E1"/>
+                </a:solidFill>
+                <a:latin typeface="Arial"/>
+              </a:defRPr>
+            </a:pPr>
+            <a:r>
+              <a:t>• Evidence Saturation Classification: Categorizes candidate hypotheses as Open Unexplored, In-Progress, or Saturated to eliminate redundant academic waste.</a:t>
+            </a:r>
+          </a:p>
+        </p:txBody>
+      </p:sp>
+      <p:sp>
+        <p:nvSpPr>
+          <p:cNvPr id="7" name="Rounded Rectangle 6"/>
+          <p:cNvSpPr/>
+          <p:nvPr/>
+        </p:nvSpPr>
+        <p:spPr>
+          <a:xfrm>
+            <a:off x="4389120" y="1508760"/>
+            <a:ext cx="3383280" cy="4297680"/>
+          </a:xfrm>
+          <a:prstGeom prst="roundRect">
+            <a:avLst/>
+          </a:prstGeom>
+          <a:solidFill>
+            <a:srgbClr val="0F172A"/>
+          </a:solidFill>
+          <a:ln w="19050">
+            <a:solidFill>
+              <a:srgbClr val="00F5D4"/>
+            </a:solidFill>
+          </a:ln>
+        </p:spPr>
+        <p:style>
+          <a:lnRef idx="1">
+            <a:schemeClr val="accent1"/>
+          </a:lnRef>
+          <a:fillRef idx="3">
+            <a:schemeClr val="accent1"/>
+          </a:fillRef>
+          <a:effectRef idx="2">
+            <a:schemeClr val="accent1"/>
+          </a:effectRef>
+          <a:fontRef idx="minor">
+            <a:schemeClr val="lt1"/>
+          </a:fontRef>
+        </p:style>
+        <p:txBody>
+          <a:bodyPr rtlCol="0" anchor="ctr"/>
+          <a:lstStyle/>
+          <a:p>
+            <a:pPr algn="ctr"/>
+          </a:p>
+        </p:txBody>
+      </p:sp>
+      <p:sp>
+        <p:nvSpPr>
+          <p:cNvPr id="8" name="TextBox 7"/>
+          <p:cNvSpPr txBox="1"/>
+          <p:nvPr/>
+        </p:nvSpPr>
+        <p:spPr>
+          <a:xfrm>
+            <a:off x="4553712" y="1673352"/>
+            <a:ext cx="3054096" cy="3968496"/>
+          </a:xfrm>
+          <a:prstGeom prst="rect">
+            <a:avLst/>
+          </a:prstGeom>
+          <a:noFill/>
+        </p:spPr>
+        <p:txBody>
+          <a:bodyPr wrap="square">
+            <a:spAutoFit/>
+          </a:bodyPr>
+          <a:lstStyle/>
+          <a:p>
+            <a:pPr>
+              <a:spcAft>
+                <a:spcPts val="400"/>
+              </a:spcAft>
+              <a:defRPr sz="950" b="1">
+                <a:solidFill>
+                  <a:srgbClr val="00F5D4"/>
+                </a:solidFill>
+                <a:latin typeface="Arial"/>
+              </a:defRPr>
+            </a:pPr>
+            <a:r>
+              <a:t>PILLAR III: METHODOLOGICAL QUALITY</a:t>
+            </a:r>
+          </a:p>
+          <a:p>
+            <a:pPr>
+              <a:spcAft>
+                <a:spcPts val="1000"/>
+              </a:spcAft>
+              <a:defRPr sz="1300" b="1">
+                <a:solidFill>
+                  <a:srgbClr val="F8FAFC"/>
+                </a:solidFill>
+                <a:latin typeface="Arial"/>
+              </a:defRPr>
+            </a:pPr>
+            <a:r>
+              <a:t>Cochrane RoB 2.0 &amp; robvis Traffic-Light</a:t>
+            </a:r>
+          </a:p>
+          <a:p>
+            <a:pPr>
+              <a:spcAft>
+                <a:spcPts val="600"/>
+              </a:spcAft>
+              <a:defRPr sz="950">
+                <a:solidFill>
+                  <a:srgbClr val="CBD5E1"/>
+                </a:solidFill>
+                <a:latin typeface="Arial"/>
+              </a:defRPr>
+            </a:pPr>
+            <a:r>
+              <a:t>• Domain-by-Domain Bias Appraisal: Programmatically audits Cochrane RoB 2.0 domains (D1: Randomization, D2: Deviations, D3: Missing Outcomes, D4: Measurement, D5: Reporting).</a:t>
+            </a:r>
+          </a:p>
+          <a:p>
+            <a:pPr>
+              <a:spcAft>
+                <a:spcPts val="600"/>
+              </a:spcAft>
+              <a:defRPr sz="950">
+                <a:solidFill>
+                  <a:srgbClr val="CBD5E1"/>
+                </a:solidFill>
+                <a:latin typeface="Arial"/>
+              </a:defRPr>
+            </a:pPr>
+            <a:r>
+              <a:t>• Verbatim-Anchored Justifications: Binds every RoB rating to exact chunk-level text quotes extracted from the trial PDF; zero unreferenced judgments.</a:t>
+            </a:r>
+          </a:p>
+          <a:p>
+            <a:pPr>
+              <a:spcAft>
+                <a:spcPts val="600"/>
+              </a:spcAft>
+              <a:defRPr sz="950">
+                <a:solidFill>
+                  <a:srgbClr val="CBD5E1"/>
+                </a:solidFill>
+                <a:latin typeface="Arial"/>
+              </a:defRPr>
+            </a:pPr>
+            <a:r>
+              <a:t>• robvis-Grade Traffic-Light Visualization: Generates interactive Cochrane summary matrix and bar charts displaying risk distributions across the trial cohort.</a:t>
+            </a:r>
+          </a:p>
+          <a:p>
+            <a:pPr>
+              <a:spcAft>
+                <a:spcPts val="600"/>
+              </a:spcAft>
+              <a:defRPr sz="950">
+                <a:solidFill>
+                  <a:srgbClr val="CBD5E1"/>
+                </a:solidFill>
+                <a:latin typeface="Arial"/>
+              </a:defRPr>
+            </a:pPr>
+            <a:r>
+              <a:t>• CONSORT 2010 Reporting Completeness: Dissects 25-item checklist compliance including sample size prespecification, blinding mechanisms, and ITT fidelity.</a:t>
+            </a:r>
+          </a:p>
+        </p:txBody>
+      </p:sp>
+      <p:sp>
+        <p:nvSpPr>
+          <p:cNvPr id="9" name="Rounded Rectangle 8"/>
+          <p:cNvSpPr/>
+          <p:nvPr/>
+        </p:nvSpPr>
+        <p:spPr>
+          <a:xfrm>
+            <a:off x="8046720" y="1508760"/>
+            <a:ext cx="3383280" cy="4297680"/>
+          </a:xfrm>
+          <a:prstGeom prst="roundRect">
+            <a:avLst/>
+          </a:prstGeom>
+          <a:solidFill>
+            <a:srgbClr val="0F172A"/>
+          </a:solidFill>
+          <a:ln w="19050">
+            <a:solidFill>
+              <a:srgbClr val="C084FC"/>
+            </a:solidFill>
+          </a:ln>
+        </p:spPr>
+        <p:style>
+          <a:lnRef idx="1">
+            <a:schemeClr val="accent1"/>
+          </a:lnRef>
+          <a:fillRef idx="3">
+            <a:schemeClr val="accent1"/>
+          </a:fillRef>
+          <a:effectRef idx="2">
+            <a:schemeClr val="accent1"/>
+          </a:effectRef>
+          <a:fontRef idx="minor">
+            <a:schemeClr val="lt1"/>
+          </a:fontRef>
+        </p:style>
+        <p:txBody>
+          <a:bodyPr rtlCol="0" anchor="ctr"/>
+          <a:lstStyle/>
+          <a:p>
+            <a:pPr algn="ctr"/>
+          </a:p>
+        </p:txBody>
+      </p:sp>
+      <p:sp>
+        <p:nvSpPr>
+          <p:cNvPr id="10" name="TextBox 9"/>
+          <p:cNvSpPr txBox="1"/>
+          <p:nvPr/>
+        </p:nvSpPr>
+        <p:spPr>
+          <a:xfrm>
+            <a:off x="8211312" y="1673352"/>
+            <a:ext cx="3054096" cy="3968496"/>
+          </a:xfrm>
+          <a:prstGeom prst="rect">
+            <a:avLst/>
+          </a:prstGeom>
+          <a:noFill/>
+        </p:spPr>
+        <p:txBody>
+          <a:bodyPr wrap="square">
+            <a:spAutoFit/>
+          </a:bodyPr>
+          <a:lstStyle/>
+          <a:p>
+            <a:pPr>
+              <a:spcAft>
+                <a:spcPts val="400"/>
+              </a:spcAft>
+              <a:defRPr sz="950" b="1">
+                <a:solidFill>
+                  <a:srgbClr val="C084FC"/>
+                </a:solidFill>
+                <a:latin typeface="Arial"/>
+              </a:defRPr>
+            </a:pPr>
+            <a:r>
+              <a:t>PILLARS IV &amp; V: PROTOCOL &amp; POWER</a:t>
+            </a:r>
+          </a:p>
+          <a:p>
+            <a:pPr>
+              <a:spcAft>
+                <a:spcPts val="1000"/>
+              </a:spcAft>
+              <a:defRPr sz="1300" b="1">
+                <a:solidFill>
+                  <a:srgbClr val="F8FAFC"/>
+                </a:solidFill>
+                <a:latin typeface="Arial"/>
+              </a:defRPr>
+            </a:pPr>
+            <a:r>
+              <a:t>FINER Blueprint &amp; Deterministic Power</a:t>
+            </a:r>
+          </a:p>
+          <a:p>
+            <a:pPr>
+              <a:spcAft>
+                <a:spcPts val="600"/>
+              </a:spcAft>
+              <a:defRPr sz="950">
+                <a:solidFill>
+                  <a:srgbClr val="CBD5E1"/>
+                </a:solidFill>
+                <a:latin typeface="Arial"/>
+              </a:defRPr>
+            </a:pPr>
+            <a:r>
+              <a:t>• FINER Hypothesis Formulation (Pillar IV): Structures hypotheses satisfying Feasible, Interesting, Novel, Ethical, and Relevant criteria with full academic IMRAD rationale.</a:t>
+            </a:r>
+          </a:p>
+          <a:p>
+            <a:pPr>
+              <a:spcAft>
+                <a:spcPts val="600"/>
+              </a:spcAft>
+              <a:defRPr sz="950">
+                <a:solidFill>
+                  <a:srgbClr val="CBD5E1"/>
+                </a:solidFill>
+                <a:latin typeface="Arial"/>
+              </a:defRPr>
+            </a:pPr>
+            <a:r>
+              <a:t>• Deterministic Power &amp; Sample Size (Pillar V): Code-level biostatistical calculation for continuous &amp; binary endpoints; solves for N at alpha=0.05, 80% &amp; 90% power with attrition buffer.</a:t>
+            </a:r>
+          </a:p>
+          <a:p>
+            <a:pPr>
+              <a:spcAft>
+                <a:spcPts val="600"/>
+              </a:spcAft>
+              <a:defRPr sz="950">
+                <a:solidFill>
+                  <a:srgbClr val="CBD5E1"/>
+                </a:solidFill>
+                <a:latin typeface="Arial"/>
+              </a:defRPr>
+            </a:pPr>
+            <a:r>
+              <a:t>• Superiority &amp; Non-Inferiority Architecture: Supports two-sample superiority designs and non-inferiority trials with customizable margin (Delta_NI) and pooled SD (sigma).</a:t>
+            </a:r>
+          </a:p>
+          <a:p>
+            <a:pPr>
+              <a:spcAft>
+                <a:spcPts val="600"/>
+              </a:spcAft>
+              <a:defRPr sz="950">
+                <a:solidFill>
+                  <a:srgbClr val="CBD5E1"/>
+                </a:solidFill>
+                <a:latin typeface="Arial"/>
+              </a:defRPr>
+            </a:pPr>
+            <a:r>
+              <a:t>• 7-Sheet Phase 3 Research Package: Exports standardized Excel sheets (Evidence Matrix, Gaps, Reality Check, RoB, SAP, Power) plus ready-to-defend Markdown thesis dossier.</a:t>
+            </a:r>
+          </a:p>
+        </p:txBody>
+      </p:sp>
+      <p:sp>
+        <p:nvSpPr>
+          <p:cNvPr id="11" name="Rounded Rectangle 10"/>
+          <p:cNvSpPr/>
+          <p:nvPr/>
+        </p:nvSpPr>
+        <p:spPr>
+          <a:xfrm>
+            <a:off x="731520" y="5989320"/>
+            <a:ext cx="10698480" cy="438912"/>
+          </a:xfrm>
+          <a:prstGeom prst="roundRect">
+            <a:avLst/>
+          </a:prstGeom>
+          <a:solidFill>
+            <a:srgbClr val="1E293B"/>
+          </a:solidFill>
+          <a:ln w="12700">
+            <a:solidFill>
+              <a:srgbClr val="334155"/>
+            </a:solidFill>
+          </a:ln>
+        </p:spPr>
+        <p:style>
+          <a:lnRef idx="1">
+            <a:schemeClr val="accent1"/>
+          </a:lnRef>
+          <a:fillRef idx="3">
+            <a:schemeClr val="accent1"/>
+          </a:fillRef>
+          <a:effectRef idx="2">
+            <a:schemeClr val="accent1"/>
+          </a:effectRef>
+          <a:fontRef idx="minor">
+            <a:schemeClr val="lt1"/>
+          </a:fontRef>
+        </p:style>
+        <p:txBody>
+          <a:bodyPr rtlCol="0" anchor="ctr"/>
+          <a:lstStyle/>
+          <a:p>
+            <a:pPr algn="ctr"/>
+          </a:p>
+        </p:txBody>
+      </p:sp>
+      <p:sp>
+        <p:nvSpPr>
+          <p:cNvPr id="12" name="TextBox 11"/>
+          <p:cNvSpPr txBox="1"/>
+          <p:nvPr/>
+        </p:nvSpPr>
+        <p:spPr>
+          <a:xfrm>
+            <a:off x="822960" y="6016752"/>
+            <a:ext cx="10515600" cy="384048"/>
+          </a:xfrm>
+          <a:prstGeom prst="rect">
+            <a:avLst/>
+          </a:prstGeom>
+          <a:noFill/>
+        </p:spPr>
+        <p:txBody>
+          <a:bodyPr wrap="none">
+            <a:spAutoFit/>
+          </a:bodyPr>
+          <a:lstStyle/>
+          <a:p>
+            <a:pPr algn="ctr">
+              <a:defRPr sz="1000" b="1">
+                <a:solidFill>
+                  <a:srgbClr val="C084FC"/>
+                </a:solidFill>
+                <a:latin typeface="Arial"/>
+              </a:defRPr>
+            </a:pPr>
+            <a:r>
+              <a:t>5 PILLARS CERTIFIED: Evidence Matrix  |  PubMed &amp; ClinicalTrials.gov Reality Gate  |  Cochrane RoB 2.0  |  FINER Thesis  |  80/90% Power Calibration</a:t>
+            </a:r>
+          </a:p>
+        </p:txBody>
+      </p:sp>
+    </p:spTree>
+  </p:cSld>
+  <p:clrMapOvr>
+    <a:masterClrMapping/>
+  </p:clrMapOvr>
+</p:sld>
+</file>
+
+<file path=ppt/slides/slide17.xml><?xml version="1.0" encoding="utf-8"?>
+<p:sld xmlns:a="http://schemas.openxmlformats.org/drawingml/2006/main" xmlns:p="http://schemas.openxmlformats.org/presentationml/2006/main" xmlns:r="http://schemas.openxmlformats.org/officeDocument/2006/relationships">
+  <p:cSld>
+    <p:bg>
+      <p:bgPr>
+        <a:solidFill>
+          <a:srgbClr val="0B1120"/>
+        </a:solidFill>
+        <a:effectLst/>
+      </p:bgPr>
+    </p:bg>
+    <p:spTree>
+      <p:nvGrpSpPr>
+        <p:cNvPr id="1" name=""/>
+        <p:cNvGrpSpPr/>
+        <p:nvPr/>
+      </p:nvGrpSpPr>
+      <p:grpSpPr/>
+      <p:sp>
+        <p:nvSpPr>
+          <p:cNvPr id="2" name="TextBox 1"/>
+          <p:cNvSpPr txBox="1"/>
+          <p:nvPr/>
+        </p:nvSpPr>
+        <p:spPr>
+          <a:xfrm>
+            <a:off x="731520" y="365760"/>
+            <a:ext cx="7315200" cy="320040"/>
+          </a:xfrm>
+          <a:prstGeom prst="rect">
+            <a:avLst/>
+          </a:prstGeom>
+          <a:noFill/>
+        </p:spPr>
+        <p:txBody>
+          <a:bodyPr wrap="square">
+            <a:spAutoFit/>
+          </a:bodyPr>
+          <a:lstStyle/>
+          <a:p>
+            <a:pPr>
+              <a:defRPr sz="1000" b="1">
+                <a:solidFill>
+                  <a:srgbClr val="10B981"/>
+                </a:solidFill>
+                <a:latin typeface="Arial"/>
+              </a:defRPr>
+            </a:pPr>
+            <a:r>
+              <a:t>SYSTEMATIC REVIEW STANDARDS &amp; FLOW INTEGRITY</a:t>
+            </a:r>
+          </a:p>
+        </p:txBody>
+      </p:sp>
+      <p:sp>
+        <p:nvSpPr>
+          <p:cNvPr id="3" name="TextBox 2"/>
+          <p:cNvSpPr txBox="1"/>
+          <p:nvPr/>
+        </p:nvSpPr>
+        <p:spPr>
+          <a:xfrm>
+            <a:off x="8412480" y="365760"/>
+            <a:ext cx="3017520" cy="320040"/>
+          </a:xfrm>
+          <a:prstGeom prst="rect">
+            <a:avLst/>
+          </a:prstGeom>
+          <a:noFill/>
+        </p:spPr>
+        <p:txBody>
+          <a:bodyPr wrap="none">
+            <a:spAutoFit/>
+          </a:bodyPr>
+          <a:lstStyle/>
+          <a:p>
+            <a:pPr algn="r">
+              <a:defRPr sz="1000" b="1">
+                <a:solidFill>
+                  <a:srgbClr val="94A3B8"/>
+                </a:solidFill>
+                <a:latin typeface="Arial"/>
+              </a:defRPr>
+            </a:pPr>
+            <a:r>
+              <a:t>PRISMA 2020 CERTIFIED</a:t>
+            </a:r>
+          </a:p>
+        </p:txBody>
+      </p:sp>
+      <p:sp>
+        <p:nvSpPr>
+          <p:cNvPr id="4" name="TextBox 3"/>
+          <p:cNvSpPr txBox="1"/>
+          <p:nvPr/>
+        </p:nvSpPr>
+        <p:spPr>
+          <a:xfrm>
+            <a:off x="731520" y="685800"/>
+            <a:ext cx="10515600" cy="685800"/>
+          </a:xfrm>
+          <a:prstGeom prst="rect">
+            <a:avLst/>
+          </a:prstGeom>
+          <a:noFill/>
+        </p:spPr>
+        <p:txBody>
+          <a:bodyPr wrap="square">
+            <a:spAutoFit/>
+          </a:bodyPr>
+          <a:lstStyle/>
+          <a:p>
+            <a:pPr>
+              <a:defRPr sz="2100" b="1">
+                <a:solidFill>
+                  <a:srgbClr val="F8FAFC"/>
+                </a:solidFill>
+                <a:latin typeface="Arial"/>
+              </a:defRPr>
+            </a:pPr>
+            <a:r>
+              <a:t>PRISMA 2020 Intelligence &amp; Interactive Flow Architecture</a:t>
+            </a:r>
+          </a:p>
+          <a:p>
+            <a:pPr>
+              <a:defRPr sz="1100">
+                <a:solidFill>
+                  <a:srgbClr val="94A3B8"/>
+                </a:solidFill>
+                <a:latin typeface="Arial"/>
+              </a:defRPr>
+            </a:pPr>
+            <a:r>
+              <a:t>Transparent Study Selection: 4-Stage Flow Diagram, Automated Deduplication, Zero-FN Screening, and Reporting Auditing.</a:t>
+            </a:r>
+          </a:p>
+        </p:txBody>
+      </p:sp>
+      <p:sp>
+        <p:nvSpPr>
+          <p:cNvPr id="5" name="Rounded Rectangle 4"/>
+          <p:cNvSpPr/>
+          <p:nvPr/>
+        </p:nvSpPr>
+        <p:spPr>
+          <a:xfrm>
+            <a:off x="731520" y="1508760"/>
+            <a:ext cx="3383280" cy="4297680"/>
+          </a:xfrm>
+          <a:prstGeom prst="roundRect">
+            <a:avLst/>
+          </a:prstGeom>
+          <a:solidFill>
+            <a:srgbClr val="0F172A"/>
+          </a:solidFill>
+          <a:ln w="19050">
+            <a:solidFill>
+              <a:srgbClr val="10B981"/>
+            </a:solidFill>
+          </a:ln>
+        </p:spPr>
+        <p:style>
+          <a:lnRef idx="1">
+            <a:schemeClr val="accent1"/>
+          </a:lnRef>
+          <a:fillRef idx="3">
+            <a:schemeClr val="accent1"/>
+          </a:fillRef>
+          <a:effectRef idx="2">
+            <a:schemeClr val="accent1"/>
+          </a:effectRef>
+          <a:fontRef idx="minor">
+            <a:schemeClr val="lt1"/>
+          </a:fontRef>
+        </p:style>
+        <p:txBody>
+          <a:bodyPr rtlCol="0" anchor="ctr"/>
+          <a:lstStyle/>
+          <a:p>
+            <a:pPr algn="ctr"/>
+          </a:p>
+        </p:txBody>
+      </p:sp>
+      <p:sp>
+        <p:nvSpPr>
+          <p:cNvPr id="6" name="TextBox 5"/>
+          <p:cNvSpPr txBox="1"/>
+          <p:nvPr/>
+        </p:nvSpPr>
+        <p:spPr>
+          <a:xfrm>
+            <a:off x="896112" y="1673352"/>
+            <a:ext cx="3054096" cy="3968496"/>
+          </a:xfrm>
+          <a:prstGeom prst="rect">
+            <a:avLst/>
+          </a:prstGeom>
+          <a:noFill/>
+        </p:spPr>
+        <p:txBody>
+          <a:bodyPr wrap="square">
+            <a:spAutoFit/>
+          </a:bodyPr>
+          <a:lstStyle/>
+          <a:p>
+            <a:pPr>
+              <a:spcAft>
+                <a:spcPts val="400"/>
+              </a:spcAft>
+              <a:defRPr sz="950" b="1">
+                <a:solidFill>
+                  <a:srgbClr val="10B981"/>
+                </a:solidFill>
+                <a:latin typeface="Arial"/>
+              </a:defRPr>
+            </a:pPr>
+            <a:r>
+              <a:t>4-STAGE SELECTION ARCHITECTURE</a:t>
+            </a:r>
+          </a:p>
+          <a:p>
+            <a:pPr>
+              <a:spcAft>
+                <a:spcPts val="1000"/>
+              </a:spcAft>
+              <a:defRPr sz="1300" b="1">
+                <a:solidFill>
+                  <a:srgbClr val="F8FAFC"/>
+                </a:solidFill>
+                <a:latin typeface="Arial"/>
+              </a:defRPr>
+            </a:pPr>
+            <a:r>
+              <a:t>PRISMA 2020 Flow Diagram Engine</a:t>
+            </a:r>
+          </a:p>
+          <a:p>
+            <a:pPr>
+              <a:spcAft>
+                <a:spcPts val="600"/>
+              </a:spcAft>
+              <a:defRPr sz="950">
+                <a:solidFill>
+                  <a:srgbClr val="CBD5E1"/>
+                </a:solidFill>
+                <a:latin typeface="Arial"/>
+              </a:defRPr>
+            </a:pPr>
+            <a:r>
+              <a:t>• Stage 1 — Identification: Consolidates literature hits from PubMed/Medline, clinical registers (ClinicalTrials.gov), and manual PDF uploads with automated title/DOI deduplication.</a:t>
+            </a:r>
+          </a:p>
+          <a:p>
+            <a:pPr>
+              <a:spcAft>
+                <a:spcPts val="600"/>
+              </a:spcAft>
+              <a:defRPr sz="950">
+                <a:solidFill>
+                  <a:srgbClr val="CBD5E1"/>
+                </a:solidFill>
+                <a:latin typeface="Arial"/>
+              </a:defRPr>
+            </a:pPr>
+            <a:r>
+              <a:t>• Stage 2 — Screening: Systematic screening of titles and abstracts; records evaluated against pre-defined inclusion criteria with quantified exclusion logging.</a:t>
+            </a:r>
+          </a:p>
+          <a:p>
+            <a:pPr>
+              <a:spcAft>
+                <a:spcPts val="600"/>
+              </a:spcAft>
+              <a:defRPr sz="950">
+                <a:solidFill>
+                  <a:srgbClr val="CBD5E1"/>
+                </a:solidFill>
+                <a:latin typeface="Arial"/>
+              </a:defRPr>
+            </a:pPr>
+            <a:r>
+              <a:t>• Stage 3 — Eligibility: Full-text appraisal against atomic eligibility properties; every excluded record is tagged with an immutable, transparent exclusion reason.</a:t>
+            </a:r>
+          </a:p>
+          <a:p>
+            <a:pPr>
+              <a:spcAft>
+                <a:spcPts val="600"/>
+              </a:spcAft>
+              <a:defRPr sz="950">
+                <a:solidFill>
+                  <a:srgbClr val="CBD5E1"/>
+                </a:solidFill>
+                <a:latin typeface="Arial"/>
+              </a:defRPr>
+            </a:pPr>
+            <a:r>
+              <a:t>• Stage 4 — Included: Final cohort synthesis determining studies eligible for qualitative systematic review and quantitative metafor-grade pooling.</a:t>
+            </a:r>
+          </a:p>
+        </p:txBody>
+      </p:sp>
+      <p:sp>
+        <p:nvSpPr>
+          <p:cNvPr id="7" name="Rounded Rectangle 6"/>
+          <p:cNvSpPr/>
+          <p:nvPr/>
+        </p:nvSpPr>
+        <p:spPr>
+          <a:xfrm>
+            <a:off x="4389120" y="1508760"/>
+            <a:ext cx="3383280" cy="4297680"/>
+          </a:xfrm>
+          <a:prstGeom prst="roundRect">
+            <a:avLst/>
+          </a:prstGeom>
+          <a:solidFill>
+            <a:srgbClr val="0F172A"/>
+          </a:solidFill>
+          <a:ln w="19050">
+            <a:solidFill>
+              <a:srgbClr val="38BDF8"/>
+            </a:solidFill>
+          </a:ln>
+        </p:spPr>
+        <p:style>
+          <a:lnRef idx="1">
+            <a:schemeClr val="accent1"/>
+          </a:lnRef>
+          <a:fillRef idx="3">
+            <a:schemeClr val="accent1"/>
+          </a:fillRef>
+          <a:effectRef idx="2">
+            <a:schemeClr val="accent1"/>
+          </a:effectRef>
+          <a:fontRef idx="minor">
+            <a:schemeClr val="lt1"/>
+          </a:fontRef>
+        </p:style>
+        <p:txBody>
+          <a:bodyPr rtlCol="0" anchor="ctr"/>
+          <a:lstStyle/>
+          <a:p>
+            <a:pPr algn="ctr"/>
+          </a:p>
+        </p:txBody>
+      </p:sp>
+      <p:sp>
+        <p:nvSpPr>
+          <p:cNvPr id="8" name="TextBox 7"/>
+          <p:cNvSpPr txBox="1"/>
+          <p:nvPr/>
+        </p:nvSpPr>
+        <p:spPr>
+          <a:xfrm>
+            <a:off x="4553712" y="1673352"/>
+            <a:ext cx="3054096" cy="3968496"/>
+          </a:xfrm>
+          <a:prstGeom prst="rect">
+            <a:avLst/>
+          </a:prstGeom>
+          <a:noFill/>
+        </p:spPr>
+        <p:txBody>
+          <a:bodyPr wrap="square">
+            <a:spAutoFit/>
+          </a:bodyPr>
+          <a:lstStyle/>
+          <a:p>
+            <a:pPr>
+              <a:spcAft>
+                <a:spcPts val="400"/>
+              </a:spcAft>
+              <a:defRPr sz="950" b="1">
+                <a:solidFill>
+                  <a:srgbClr val="38BDF8"/>
+                </a:solidFill>
+                <a:latin typeface="Arial"/>
+              </a:defRPr>
+            </a:pPr>
+            <a:r>
+              <a:t>ZERO-FN REASONING MIDDLEWARE</a:t>
+            </a:r>
+          </a:p>
+          <a:p>
+            <a:pPr>
+              <a:spcAft>
+                <a:spcPts val="1000"/>
+              </a:spcAft>
+              <a:defRPr sz="1300" b="1">
+                <a:solidFill>
+                  <a:srgbClr val="F8FAFC"/>
+                </a:solidFill>
+                <a:latin typeface="Arial"/>
+              </a:defRPr>
+            </a:pPr>
+            <a:r>
+              <a:t>Ternary Screening &amp; Zero-FN Gate</a:t>
+            </a:r>
+          </a:p>
+          <a:p>
+            <a:pPr>
+              <a:spcAft>
+                <a:spcPts val="600"/>
+              </a:spcAft>
+              <a:defRPr sz="950">
+                <a:solidFill>
+                  <a:srgbClr val="CBD5E1"/>
+                </a:solidFill>
+                <a:latin typeface="Arial"/>
+              </a:defRPr>
+            </a:pPr>
+            <a:r>
+              <a:t>• Ternary Decision Logic (+1, -1, 0): AI assesses text chunks using strict ternary voting; indeterminate evidence (0) is never prematurely discarded.</a:t>
+            </a:r>
+          </a:p>
+          <a:p>
+            <a:pPr>
+              <a:spcAft>
+                <a:spcPts val="600"/>
+              </a:spcAft>
+              <a:defRPr sz="950">
+                <a:solidFill>
+                  <a:srgbClr val="CBD5E1"/>
+                </a:solidFill>
+                <a:latin typeface="Arial"/>
+              </a:defRPr>
+            </a:pPr>
+            <a:r>
+              <a:t>• Zero-False-Negative Safeguard: Ambiguous or borderline trials automatically pass to full-text human referee inspection, preventing accidental exclusion of key evidence.</a:t>
+            </a:r>
+          </a:p>
+          <a:p>
+            <a:pPr>
+              <a:spcAft>
+                <a:spcPts val="600"/>
+              </a:spcAft>
+              <a:defRPr sz="950">
+                <a:solidFill>
+                  <a:srgbClr val="CBD5E1"/>
+                </a:solidFill>
+                <a:latin typeface="Arial"/>
+              </a:defRPr>
+            </a:pPr>
+            <a:r>
+              <a:t>• Chunk-Level Provenance Anchoring: Every inclusion/exclusion decision is permanently anchored to document chunk IDs with verbatim justification quotes.</a:t>
+            </a:r>
+          </a:p>
+          <a:p>
+            <a:pPr>
+              <a:spcAft>
+                <a:spcPts val="600"/>
+              </a:spcAft>
+              <a:defRPr sz="950">
+                <a:solidFill>
+                  <a:srgbClr val="CBD5E1"/>
+                </a:solidFill>
+                <a:latin typeface="Arial"/>
+              </a:defRPr>
+            </a:pPr>
+            <a:r>
+              <a:t>• Multi-Reviewer Emulation: Replicates dual independent reviewer paradigms with consensus resolution for Cochrane-standard review fidelity.</a:t>
+            </a:r>
+          </a:p>
+        </p:txBody>
+      </p:sp>
+      <p:sp>
+        <p:nvSpPr>
+          <p:cNvPr id="9" name="Rounded Rectangle 8"/>
+          <p:cNvSpPr/>
+          <p:nvPr/>
+        </p:nvSpPr>
+        <p:spPr>
+          <a:xfrm>
+            <a:off x="8046720" y="1508760"/>
+            <a:ext cx="3383280" cy="4297680"/>
+          </a:xfrm>
+          <a:prstGeom prst="roundRect">
+            <a:avLst/>
+          </a:prstGeom>
+          <a:solidFill>
+            <a:srgbClr val="0F172A"/>
+          </a:solidFill>
+          <a:ln w="19050">
+            <a:solidFill>
+              <a:srgbClr val="F43F5E"/>
+            </a:solidFill>
+          </a:ln>
+        </p:spPr>
+        <p:style>
+          <a:lnRef idx="1">
+            <a:schemeClr val="accent1"/>
+          </a:lnRef>
+          <a:fillRef idx="3">
+            <a:schemeClr val="accent1"/>
+          </a:fillRef>
+          <a:effectRef idx="2">
+            <a:schemeClr val="accent1"/>
+          </a:effectRef>
+          <a:fontRef idx="minor">
+            <a:schemeClr val="lt1"/>
+          </a:fontRef>
+        </p:style>
+        <p:txBody>
+          <a:bodyPr rtlCol="0" anchor="ctr"/>
+          <a:lstStyle/>
+          <a:p>
+            <a:pPr algn="ctr"/>
+          </a:p>
+        </p:txBody>
+      </p:sp>
+      <p:sp>
+        <p:nvSpPr>
+          <p:cNvPr id="10" name="TextBox 9"/>
+          <p:cNvSpPr txBox="1"/>
+          <p:nvPr/>
+        </p:nvSpPr>
+        <p:spPr>
+          <a:xfrm>
+            <a:off x="8211312" y="1673352"/>
+            <a:ext cx="3054096" cy="3968496"/>
+          </a:xfrm>
+          <a:prstGeom prst="rect">
+            <a:avLst/>
+          </a:prstGeom>
+          <a:noFill/>
+        </p:spPr>
+        <p:txBody>
+          <a:bodyPr wrap="square">
+            <a:spAutoFit/>
+          </a:bodyPr>
+          <a:lstStyle/>
+          <a:p>
+            <a:pPr>
+              <a:spcAft>
+                <a:spcPts val="400"/>
+              </a:spcAft>
+              <a:defRPr sz="950" b="1">
+                <a:solidFill>
+                  <a:srgbClr val="F43F5E"/>
+                </a:solidFill>
+                <a:latin typeface="Arial"/>
+              </a:defRPr>
+            </a:pPr>
+            <a:r>
+              <a:t>COMPLIANCE &amp; VISUALIZATION</a:t>
+            </a:r>
+          </a:p>
+          <a:p>
+            <a:pPr>
+              <a:spcAft>
+                <a:spcPts val="1000"/>
+              </a:spcAft>
+              <a:defRPr sz="1300" b="1">
+                <a:solidFill>
+                  <a:srgbClr val="F8FAFC"/>
+                </a:solidFill>
+                <a:latin typeface="Arial"/>
+              </a:defRPr>
+            </a:pPr>
+            <a:r>
+              <a:t>PRISMA 2020 Checklist &amp; Dashboard</a:t>
+            </a:r>
+          </a:p>
+          <a:p>
+            <a:pPr>
+              <a:spcAft>
+                <a:spcPts val="600"/>
+              </a:spcAft>
+              <a:defRPr sz="950">
+                <a:solidFill>
+                  <a:srgbClr val="CBD5E1"/>
+                </a:solidFill>
+                <a:latin typeface="Arial"/>
+              </a:defRPr>
+            </a:pPr>
+            <a:r>
+              <a:t>• 27-Item PRISMA 2020 Checklist Auditor: Evaluates reporting fidelity across Title, Abstract, Introduction, Methods, Results, Discussion, and Funding.</a:t>
+            </a:r>
+          </a:p>
+          <a:p>
+            <a:pPr>
+              <a:spcAft>
+                <a:spcPts val="600"/>
+              </a:spcAft>
+              <a:defRPr sz="950">
+                <a:solidFill>
+                  <a:srgbClr val="CBD5E1"/>
+                </a:solidFill>
+                <a:latin typeface="Arial"/>
+              </a:defRPr>
+            </a:pPr>
+            <a:r>
+              <a:t>• Stand-Alone Interactive HTML Dashboard: Renders dynamic SVG/Plotly PRISMA flowcharts with clickable nodes revealing study IDs, counts, and exclusion breakdowns.</a:t>
+            </a:r>
+          </a:p>
+          <a:p>
+            <a:pPr>
+              <a:spcAft>
+                <a:spcPts val="600"/>
+              </a:spcAft>
+              <a:defRPr sz="950">
+                <a:solidFill>
+                  <a:srgbClr val="CBD5E1"/>
+                </a:solidFill>
+                <a:latin typeface="Arial"/>
+              </a:defRPr>
+            </a:pPr>
+            <a:r>
+              <a:t>• Deterministic Attrition Accounting: Enforces mathematical consistency across nodes: Identified - Duplicates = Screened; Screened - Excluded = Eligible.</a:t>
+            </a:r>
+          </a:p>
+          <a:p>
+            <a:pPr>
+              <a:spcAft>
+                <a:spcPts val="600"/>
+              </a:spcAft>
+              <a:defRPr sz="950">
+                <a:solidFill>
+                  <a:srgbClr val="CBD5E1"/>
+                </a:solidFill>
+                <a:latin typeface="Arial"/>
+              </a:defRPr>
+            </a:pPr>
+            <a:r>
+              <a:t>• Publication-Ready Vector &amp; Data Export: One-click export of PRISMA flowcharts in SVG/PNG and full audit logs in Excel for peer-reviewed journal submission.</a:t>
+            </a:r>
+          </a:p>
+        </p:txBody>
+      </p:sp>
+      <p:sp>
+        <p:nvSpPr>
+          <p:cNvPr id="11" name="Rounded Rectangle 10"/>
+          <p:cNvSpPr/>
+          <p:nvPr/>
+        </p:nvSpPr>
+        <p:spPr>
+          <a:xfrm>
+            <a:off x="731520" y="5989320"/>
+            <a:ext cx="10698480" cy="438912"/>
+          </a:xfrm>
+          <a:prstGeom prst="roundRect">
+            <a:avLst/>
+          </a:prstGeom>
+          <a:solidFill>
+            <a:srgbClr val="1E293B"/>
+          </a:solidFill>
+          <a:ln w="12700">
+            <a:solidFill>
+              <a:srgbClr val="334155"/>
+            </a:solidFill>
+          </a:ln>
+        </p:spPr>
+        <p:style>
+          <a:lnRef idx="1">
+            <a:schemeClr val="accent1"/>
+          </a:lnRef>
+          <a:fillRef idx="3">
+            <a:schemeClr val="accent1"/>
+          </a:fillRef>
+          <a:effectRef idx="2">
+            <a:schemeClr val="accent1"/>
+          </a:effectRef>
+          <a:fontRef idx="minor">
+            <a:schemeClr val="lt1"/>
+          </a:fontRef>
+        </p:style>
+        <p:txBody>
+          <a:bodyPr rtlCol="0" anchor="ctr"/>
+          <a:lstStyle/>
+          <a:p>
+            <a:pPr algn="ctr"/>
+          </a:p>
+        </p:txBody>
+      </p:sp>
+      <p:sp>
+        <p:nvSpPr>
+          <p:cNvPr id="12" name="TextBox 11"/>
+          <p:cNvSpPr txBox="1"/>
+          <p:nvPr/>
+        </p:nvSpPr>
+        <p:spPr>
+          <a:xfrm>
+            <a:off x="822960" y="6016752"/>
+            <a:ext cx="10515600" cy="384048"/>
+          </a:xfrm>
+          <a:prstGeom prst="rect">
+            <a:avLst/>
+          </a:prstGeom>
+          <a:noFill/>
+        </p:spPr>
+        <p:txBody>
+          <a:bodyPr wrap="none">
+            <a:spAutoFit/>
+          </a:bodyPr>
+          <a:lstStyle/>
+          <a:p>
+            <a:pPr algn="ctr">
+              <a:defRPr sz="1000" b="1">
+                <a:solidFill>
+                  <a:srgbClr val="10B981"/>
+                </a:solidFill>
+                <a:latin typeface="Arial"/>
+              </a:defRPr>
+            </a:pPr>
+            <a:r>
+              <a:t>PRISMA 2020 AUDIT: 4-Stage Flow Diagram  |  Ternary Zero-FN Screening  |  27-Item Checklist  |  Interactive SVG Dashboard</a:t>
+            </a:r>
+          </a:p>
+        </p:txBody>
+      </p:sp>
+    </p:spTree>
+  </p:cSld>
+  <p:clrMapOvr>
+    <a:masterClrMapping/>
+  </p:clrMapOvr>
+</p:sld>
+</file>
+
+<file path=ppt/slides/slide18.xml><?xml version="1.0" encoding="utf-8"?>
+<p:sld xmlns:a="http://schemas.openxmlformats.org/drawingml/2006/main" xmlns:p="http://schemas.openxmlformats.org/presentationml/2006/main" xmlns:r="http://schemas.openxmlformats.org/officeDocument/2006/relationships">
+  <p:cSld>
+    <p:bg>
+      <p:bgPr>
+        <a:solidFill>
+          <a:srgbClr val="0B1120"/>
+        </a:solidFill>
+        <a:effectLst/>
+      </p:bgPr>
+    </p:bg>
+    <p:spTree>
+      <p:nvGrpSpPr>
+        <p:cNvPr id="1" name=""/>
+        <p:cNvGrpSpPr/>
+        <p:nvPr/>
+      </p:nvGrpSpPr>
+      <p:grpSpPr/>
+      <p:sp>
+        <p:nvSpPr>
+          <p:cNvPr id="2" name="TextBox 1"/>
+          <p:cNvSpPr txBox="1"/>
+          <p:nvPr/>
+        </p:nvSpPr>
+        <p:spPr>
+          <a:xfrm>
+            <a:off x="731520" y="365760"/>
+            <a:ext cx="7315200" cy="320040"/>
+          </a:xfrm>
+          <a:prstGeom prst="rect">
+            <a:avLst/>
+          </a:prstGeom>
+          <a:noFill/>
+        </p:spPr>
+        <p:txBody>
+          <a:bodyPr wrap="square">
+            <a:spAutoFit/>
+          </a:bodyPr>
+          <a:lstStyle/>
+          <a:p>
+            <a:pPr>
+              <a:defRPr sz="1000" b="1">
+                <a:solidFill>
+                  <a:srgbClr val="38BDF8"/>
+                </a:solidFill>
+                <a:latin typeface="Arial"/>
+              </a:defRPr>
+            </a:pPr>
+            <a:r>
+              <a:t>CLINICAL KNOWLEDGE BASES &amp; INTEROPERABILITY</a:t>
+            </a:r>
+          </a:p>
+        </p:txBody>
+      </p:sp>
+      <p:sp>
+        <p:nvSpPr>
+          <p:cNvPr id="3" name="TextBox 2"/>
+          <p:cNvSpPr txBox="1"/>
+          <p:nvPr/>
+        </p:nvSpPr>
+        <p:spPr>
+          <a:xfrm>
+            <a:off x="8412480" y="365760"/>
+            <a:ext cx="3017520" cy="320040"/>
+          </a:xfrm>
+          <a:prstGeom prst="rect">
+            <a:avLst/>
+          </a:prstGeom>
+          <a:noFill/>
+        </p:spPr>
+        <p:txBody>
+          <a:bodyPr wrap="none">
+            <a:spAutoFit/>
+          </a:bodyPr>
+          <a:lstStyle/>
+          <a:p>
+            <a:pPr algn="r">
+              <a:defRPr sz="1000" b="1">
+                <a:solidFill>
+                  <a:srgbClr val="94A3B8"/>
+                </a:solidFill>
+                <a:latin typeface="Arial"/>
+              </a:defRPr>
+            </a:pPr>
+            <a:r>
+              <a:t>NCPI FHIR &amp; NIH APIS</a:t>
+            </a:r>
+          </a:p>
+        </p:txBody>
+      </p:sp>
+      <p:sp>
+        <p:nvSpPr>
+          <p:cNvPr id="4" name="TextBox 3"/>
+          <p:cNvSpPr txBox="1"/>
+          <p:nvPr/>
+        </p:nvSpPr>
+        <p:spPr>
+          <a:xfrm>
+            <a:off x="731520" y="685800"/>
+            <a:ext cx="10515600" cy="685800"/>
+          </a:xfrm>
+          <a:prstGeom prst="rect">
+            <a:avLst/>
+          </a:prstGeom>
+          <a:noFill/>
+        </p:spPr>
+        <p:txBody>
+          <a:bodyPr wrap="square">
+            <a:spAutoFit/>
+          </a:bodyPr>
+          <a:lstStyle/>
+          <a:p>
+            <a:pPr>
+              <a:defRPr sz="2100" b="1">
+                <a:solidFill>
+                  <a:srgbClr val="F8FAFC"/>
+                </a:solidFill>
+                <a:latin typeface="Arial"/>
+              </a:defRPr>
+            </a:pPr>
+            <a:r>
+              <a:t>External Clinical Databases, PubMed &amp; NCPI FHIR Ecosystem</a:t>
+            </a:r>
+          </a:p>
+          <a:p>
+            <a:pPr>
+              <a:defRPr sz="1100">
+                <a:solidFill>
+                  <a:srgbClr val="94A3B8"/>
+                </a:solidFill>
+                <a:latin typeface="Arial"/>
+              </a:defRPr>
+            </a:pPr>
+            <a:r>
+              <a:t>Live Bidirectional Interoperability: PubMed E-utilities, ClinicalTrials.gov APIv2, NLM RxNorm, and HL7 FHIR R4 ResearchStudy.</a:t>
+            </a:r>
+          </a:p>
+        </p:txBody>
+      </p:sp>
+      <p:sp>
+        <p:nvSpPr>
+          <p:cNvPr id="5" name="Rounded Rectangle 4"/>
+          <p:cNvSpPr/>
+          <p:nvPr/>
+        </p:nvSpPr>
+        <p:spPr>
+          <a:xfrm>
+            <a:off x="731520" y="1508760"/>
+            <a:ext cx="3383280" cy="4297680"/>
+          </a:xfrm>
+          <a:prstGeom prst="roundRect">
+            <a:avLst/>
+          </a:prstGeom>
+          <a:solidFill>
+            <a:srgbClr val="0F172A"/>
+          </a:solidFill>
+          <a:ln w="19050">
+            <a:solidFill>
+              <a:srgbClr val="38BDF8"/>
+            </a:solidFill>
+          </a:ln>
+        </p:spPr>
+        <p:style>
+          <a:lnRef idx="1">
+            <a:schemeClr val="accent1"/>
+          </a:lnRef>
+          <a:fillRef idx="3">
+            <a:schemeClr val="accent1"/>
+          </a:fillRef>
+          <a:effectRef idx="2">
+            <a:schemeClr val="accent1"/>
+          </a:effectRef>
+          <a:fontRef idx="minor">
+            <a:schemeClr val="lt1"/>
+          </a:fontRef>
+        </p:style>
+        <p:txBody>
+          <a:bodyPr rtlCol="0" anchor="ctr"/>
+          <a:lstStyle/>
+          <a:p>
+            <a:pPr algn="ctr"/>
+          </a:p>
+        </p:txBody>
+      </p:sp>
+      <p:sp>
+        <p:nvSpPr>
+          <p:cNvPr id="6" name="TextBox 5"/>
+          <p:cNvSpPr txBox="1"/>
+          <p:nvPr/>
+        </p:nvSpPr>
+        <p:spPr>
+          <a:xfrm>
+            <a:off x="896112" y="1673352"/>
+            <a:ext cx="3054096" cy="3968496"/>
+          </a:xfrm>
+          <a:prstGeom prst="rect">
+            <a:avLst/>
+          </a:prstGeom>
+          <a:noFill/>
+        </p:spPr>
+        <p:txBody>
+          <a:bodyPr wrap="square">
+            <a:spAutoFit/>
+          </a:bodyPr>
+          <a:lstStyle/>
+          <a:p>
+            <a:pPr>
+              <a:spcAft>
+                <a:spcPts val="400"/>
+              </a:spcAft>
+              <a:defRPr sz="950" b="1">
+                <a:solidFill>
+                  <a:srgbClr val="38BDF8"/>
+                </a:solidFill>
+                <a:latin typeface="Arial"/>
+              </a:defRPr>
+            </a:pPr>
+            <a:r>
+              <a:t>BIOMEDICAL LITERATURE ENGINE</a:t>
+            </a:r>
+          </a:p>
+          <a:p>
+            <a:pPr>
+              <a:spcAft>
+                <a:spcPts val="1000"/>
+              </a:spcAft>
+              <a:defRPr sz="1300" b="1">
+                <a:solidFill>
+                  <a:srgbClr val="F8FAFC"/>
+                </a:solidFill>
+                <a:latin typeface="Arial"/>
+              </a:defRPr>
+            </a:pPr>
+            <a:r>
+              <a:t>PubMed &amp; NCBI E-utilities Integration</a:t>
+            </a:r>
+          </a:p>
+          <a:p>
+            <a:pPr>
+              <a:spcAft>
+                <a:spcPts val="600"/>
+              </a:spcAft>
+              <a:defRPr sz="950">
+                <a:solidFill>
+                  <a:srgbClr val="CBD5E1"/>
+                </a:solidFill>
+                <a:latin typeface="Arial"/>
+              </a:defRPr>
+            </a:pPr>
+            <a:r>
+              <a:t>• Direct E-utilities Protocol: Interfaces NCBI Entrez API (esearch, esummary, efetch) for real-time biomedical literature verification.</a:t>
+            </a:r>
+          </a:p>
+          <a:p>
+            <a:pPr>
+              <a:spcAft>
+                <a:spcPts val="600"/>
+              </a:spcAft>
+              <a:defRPr sz="950">
+                <a:solidFill>
+                  <a:srgbClr val="CBD5E1"/>
+                </a:solidFill>
+                <a:latin typeface="Arial"/>
+              </a:defRPr>
+            </a:pPr>
+            <a:r>
+              <a:t>• PICO Deconstruction &amp; MeSH Expansion: Automatically decomposes research questions into MeSH ontology descriptors, achieving &gt;= 78% search recall.</a:t>
+            </a:r>
+          </a:p>
+          <a:p>
+            <a:pPr>
+              <a:spcAft>
+                <a:spcPts val="600"/>
+              </a:spcAft>
+              <a:defRPr sz="950">
+                <a:solidFill>
+                  <a:srgbClr val="CBD5E1"/>
+                </a:solidFill>
+                <a:latin typeface="Arial"/>
+              </a:defRPr>
+            </a:pPr>
+            <a:r>
+              <a:t>• Scholarly Gap Saturation Verification: Queries Medline to verify if discovered evidence gaps have already been addressed in recent published trials.</a:t>
+            </a:r>
+          </a:p>
+          <a:p>
+            <a:pPr>
+              <a:spcAft>
+                <a:spcPts val="600"/>
+              </a:spcAft>
+              <a:defRPr sz="950">
+                <a:solidFill>
+                  <a:srgbClr val="CBD5E1"/>
+                </a:solidFill>
+                <a:latin typeface="Arial"/>
+              </a:defRPr>
+            </a:pPr>
+            <a:r>
+              <a:t>• PubMed Central (PMC) BioC Text Mining: Extracts open-access full-text sections, tables, and XML metadata for automated citation cross-matching.</a:t>
+            </a:r>
+          </a:p>
+        </p:txBody>
+      </p:sp>
+      <p:sp>
+        <p:nvSpPr>
+          <p:cNvPr id="7" name="Rounded Rectangle 6"/>
+          <p:cNvSpPr/>
+          <p:nvPr/>
+        </p:nvSpPr>
+        <p:spPr>
+          <a:xfrm>
+            <a:off x="4389120" y="1508760"/>
+            <a:ext cx="3383280" cy="4297680"/>
+          </a:xfrm>
+          <a:prstGeom prst="roundRect">
+            <a:avLst/>
+          </a:prstGeom>
+          <a:solidFill>
+            <a:srgbClr val="0F172A"/>
+          </a:solidFill>
+          <a:ln w="19050">
+            <a:solidFill>
+              <a:srgbClr val="F59E0B"/>
+            </a:solidFill>
+          </a:ln>
+        </p:spPr>
+        <p:style>
+          <a:lnRef idx="1">
+            <a:schemeClr val="accent1"/>
+          </a:lnRef>
+          <a:fillRef idx="3">
+            <a:schemeClr val="accent1"/>
+          </a:fillRef>
+          <a:effectRef idx="2">
+            <a:schemeClr val="accent1"/>
+          </a:effectRef>
+          <a:fontRef idx="minor">
+            <a:schemeClr val="lt1"/>
+          </a:fontRef>
+        </p:style>
+        <p:txBody>
+          <a:bodyPr rtlCol="0" anchor="ctr"/>
+          <a:lstStyle/>
+          <a:p>
+            <a:pPr algn="ctr"/>
+          </a:p>
+        </p:txBody>
+      </p:sp>
+      <p:sp>
+        <p:nvSpPr>
+          <p:cNvPr id="8" name="TextBox 7"/>
+          <p:cNvSpPr txBox="1"/>
+          <p:nvPr/>
+        </p:nvSpPr>
+        <p:spPr>
+          <a:xfrm>
+            <a:off x="4553712" y="1673352"/>
+            <a:ext cx="3054096" cy="3968496"/>
+          </a:xfrm>
+          <a:prstGeom prst="rect">
+            <a:avLst/>
+          </a:prstGeom>
+          <a:noFill/>
+        </p:spPr>
+        <p:txBody>
+          <a:bodyPr wrap="square">
+            <a:spAutoFit/>
+          </a:bodyPr>
+          <a:lstStyle/>
+          <a:p>
+            <a:pPr>
+              <a:spcAft>
+                <a:spcPts val="400"/>
+              </a:spcAft>
+              <a:defRPr sz="950" b="1">
+                <a:solidFill>
+                  <a:srgbClr val="F59E0B"/>
+                </a:solidFill>
+                <a:latin typeface="Arial"/>
+              </a:defRPr>
+            </a:pPr>
+            <a:r>
+              <a:t>TRIAL REGISTRY &amp; BENCHMARKING</a:t>
+            </a:r>
+          </a:p>
+          <a:p>
+            <a:pPr>
+              <a:spcAft>
+                <a:spcPts val="1000"/>
+              </a:spcAft>
+              <a:defRPr sz="1300" b="1">
+                <a:solidFill>
+                  <a:srgbClr val="F8FAFC"/>
+                </a:solidFill>
+                <a:latin typeface="Arial"/>
+              </a:defRPr>
+            </a:pPr>
+            <a:r>
+              <a:t>Live ClinicalTrials.gov APIv2 Registry</a:t>
+            </a:r>
+          </a:p>
+          <a:p>
+            <a:pPr>
+              <a:spcAft>
+                <a:spcPts val="600"/>
+              </a:spcAft>
+              <a:defRPr sz="950">
+                <a:solidFill>
+                  <a:srgbClr val="CBD5E1"/>
+                </a:solidFill>
+                <a:latin typeface="Arial"/>
+              </a:defRPr>
+            </a:pPr>
+            <a:r>
+              <a:t>• Live Registry Synchronization: Native HTTP client directly queries ClinicalTrials.gov APIv2 REST endpoints without third-party middleware.</a:t>
+            </a:r>
+          </a:p>
+          <a:p>
+            <a:pPr>
+              <a:spcAft>
+                <a:spcPts val="600"/>
+              </a:spcAft>
+              <a:defRPr sz="950">
+                <a:solidFill>
+                  <a:srgbClr val="CBD5E1"/>
+                </a:solidFill>
+                <a:latin typeface="Arial"/>
+              </a:defRPr>
+            </a:pPr>
+            <a:r>
+              <a:t>• Automated NCT Protocol Benchmarking: Pulls official registered study protocols by NCT ID to verify pre-specified primary/secondary endpoints vs published outcomes.</a:t>
+            </a:r>
+          </a:p>
+          <a:p>
+            <a:pPr>
+              <a:spcAft>
+                <a:spcPts val="600"/>
+              </a:spcAft>
+              <a:defRPr sz="950">
+                <a:solidFill>
+                  <a:srgbClr val="CBD5E1"/>
+                </a:solidFill>
+                <a:latin typeface="Arial"/>
+              </a:defRPr>
+            </a:pPr>
+            <a:r>
+              <a:t>• Trial Recruitment &amp; Status Tracking: Audits active recruiting, completed, active-not-recruiting, and terminated trials across global sponsor portfolios.</a:t>
+            </a:r>
+          </a:p>
+          <a:p>
+            <a:pPr>
+              <a:spcAft>
+                <a:spcPts val="600"/>
+              </a:spcAft>
+              <a:defRPr sz="950">
+                <a:solidFill>
+                  <a:srgbClr val="CBD5E1"/>
+                </a:solidFill>
+                <a:latin typeface="Arial"/>
+              </a:defRPr>
+            </a:pPr>
+            <a:r>
+              <a:t>• Outcome Reporting Bias Detection: Flags discrepancies between registered trial registry endpoints and selectively reported journal publications.</a:t>
+            </a:r>
+          </a:p>
+        </p:txBody>
+      </p:sp>
+      <p:sp>
+        <p:nvSpPr>
+          <p:cNvPr id="9" name="Rounded Rectangle 8"/>
+          <p:cNvSpPr/>
+          <p:nvPr/>
+        </p:nvSpPr>
+        <p:spPr>
+          <a:xfrm>
+            <a:off x="8046720" y="1508760"/>
+            <a:ext cx="3383280" cy="4297680"/>
+          </a:xfrm>
+          <a:prstGeom prst="roundRect">
+            <a:avLst/>
+          </a:prstGeom>
+          <a:solidFill>
+            <a:srgbClr val="0F172A"/>
+          </a:solidFill>
+          <a:ln w="19050">
+            <a:solidFill>
+              <a:srgbClr val="10B981"/>
+            </a:solidFill>
+          </a:ln>
+        </p:spPr>
+        <p:style>
+          <a:lnRef idx="1">
+            <a:schemeClr val="accent1"/>
+          </a:lnRef>
+          <a:fillRef idx="3">
+            <a:schemeClr val="accent1"/>
+          </a:fillRef>
+          <a:effectRef idx="2">
+            <a:schemeClr val="accent1"/>
+          </a:effectRef>
+          <a:fontRef idx="minor">
+            <a:schemeClr val="lt1"/>
+          </a:fontRef>
+        </p:style>
+        <p:txBody>
+          <a:bodyPr rtlCol="0" anchor="ctr"/>
+          <a:lstStyle/>
+          <a:p>
+            <a:pPr algn="ctr"/>
+          </a:p>
+        </p:txBody>
+      </p:sp>
+      <p:sp>
+        <p:nvSpPr>
+          <p:cNvPr id="10" name="TextBox 9"/>
+          <p:cNvSpPr txBox="1"/>
+          <p:nvPr/>
+        </p:nvSpPr>
+        <p:spPr>
+          <a:xfrm>
+            <a:off x="8211312" y="1673352"/>
+            <a:ext cx="3054096" cy="3968496"/>
+          </a:xfrm>
+          <a:prstGeom prst="rect">
+            <a:avLst/>
+          </a:prstGeom>
+          <a:noFill/>
+        </p:spPr>
+        <p:txBody>
+          <a:bodyPr wrap="square">
+            <a:spAutoFit/>
+          </a:bodyPr>
+          <a:lstStyle/>
+          <a:p>
+            <a:pPr>
+              <a:spcAft>
+                <a:spcPts val="400"/>
+              </a:spcAft>
+              <a:defRPr sz="950" b="1">
+                <a:solidFill>
+                  <a:srgbClr val="10B981"/>
+                </a:solidFill>
+                <a:latin typeface="Arial"/>
+              </a:defRPr>
+            </a:pPr>
+            <a:r>
+              <a:t>STANDARDS &amp; INTEROPERABILITY</a:t>
+            </a:r>
+          </a:p>
+          <a:p>
+            <a:pPr>
+              <a:spcAft>
+                <a:spcPts val="1000"/>
+              </a:spcAft>
+              <a:defRPr sz="1300" b="1">
+                <a:solidFill>
+                  <a:srgbClr val="F8FAFC"/>
+                </a:solidFill>
+                <a:latin typeface="Arial"/>
+              </a:defRPr>
+            </a:pPr>
+            <a:r>
+              <a:t>NLM RxNorm &amp; HL7 FHIR Interoperability</a:t>
+            </a:r>
+          </a:p>
+          <a:p>
+            <a:pPr>
+              <a:spcAft>
+                <a:spcPts val="600"/>
+              </a:spcAft>
+              <a:defRPr sz="950">
+                <a:solidFill>
+                  <a:srgbClr val="CBD5E1"/>
+                </a:solidFill>
+                <a:latin typeface="Arial"/>
+              </a:defRPr>
+            </a:pPr>
+            <a:r>
+              <a:t>• NLM RxNorm Drug Normalization: Client-side integration with rxnav.nlm.nih.gov resolves brand names and dosage forms into canonical RxCUI codes.</a:t>
+            </a:r>
+          </a:p>
+          <a:p>
+            <a:pPr>
+              <a:spcAft>
+                <a:spcPts val="600"/>
+              </a:spcAft>
+              <a:defRPr sz="950">
+                <a:solidFill>
+                  <a:srgbClr val="CBD5E1"/>
+                </a:solidFill>
+                <a:latin typeface="Arial"/>
+              </a:defRPr>
+            </a:pPr>
+            <a:r>
+              <a:t>• Client-Side Session Caching: Caches public RxCUI mappings in sessionStorage to minimize API latency and ensure offline browser speed.</a:t>
+            </a:r>
+          </a:p>
+          <a:p>
+            <a:pPr>
+              <a:spcAft>
+                <a:spcPts val="600"/>
+              </a:spcAft>
+              <a:defRPr sz="950">
+                <a:solidFill>
+                  <a:srgbClr val="CBD5E1"/>
+                </a:solidFill>
+                <a:latin typeface="Arial"/>
+              </a:defRPr>
+            </a:pPr>
+            <a:r>
+              <a:t>• HL7 FHIR R4 ResearchStudy Mapping: Formats extracted trial evidence into standardized FHIR ResearchStudy JSON-LD clinical trial models.</a:t>
+            </a:r>
+          </a:p>
+          <a:p>
+            <a:pPr>
+              <a:spcAft>
+                <a:spcPts val="600"/>
+              </a:spcAft>
+              <a:defRPr sz="950">
+                <a:solidFill>
+                  <a:srgbClr val="CBD5E1"/>
+                </a:solidFill>
+                <a:latin typeface="Arial"/>
+              </a:defRPr>
+            </a:pPr>
+            <a:r>
+              <a:t>• NCPI FHIR Interactive Action Badges: Embedded UI badges enable one-click verification of trial identifiers, regulatory codes, and standardized vocabularies.</a:t>
+            </a:r>
+          </a:p>
+        </p:txBody>
+      </p:sp>
+      <p:sp>
+        <p:nvSpPr>
+          <p:cNvPr id="11" name="Rounded Rectangle 10"/>
+          <p:cNvSpPr/>
+          <p:nvPr/>
+        </p:nvSpPr>
+        <p:spPr>
+          <a:xfrm>
+            <a:off x="731520" y="5989320"/>
+            <a:ext cx="10698480" cy="438912"/>
+          </a:xfrm>
+          <a:prstGeom prst="roundRect">
+            <a:avLst/>
+          </a:prstGeom>
+          <a:solidFill>
+            <a:srgbClr val="1E293B"/>
+          </a:solidFill>
+          <a:ln w="12700">
+            <a:solidFill>
+              <a:srgbClr val="334155"/>
+            </a:solidFill>
+          </a:ln>
+        </p:spPr>
+        <p:style>
+          <a:lnRef idx="1">
+            <a:schemeClr val="accent1"/>
+          </a:lnRef>
+          <a:fillRef idx="3">
+            <a:schemeClr val="accent1"/>
+          </a:fillRef>
+          <a:effectRef idx="2">
+            <a:schemeClr val="accent1"/>
+          </a:effectRef>
+          <a:fontRef idx="minor">
+            <a:schemeClr val="lt1"/>
+          </a:fontRef>
+        </p:style>
+        <p:txBody>
+          <a:bodyPr rtlCol="0" anchor="ctr"/>
+          <a:lstStyle/>
+          <a:p>
+            <a:pPr algn="ctr"/>
+          </a:p>
+        </p:txBody>
+      </p:sp>
+      <p:sp>
+        <p:nvSpPr>
+          <p:cNvPr id="12" name="TextBox 11"/>
+          <p:cNvSpPr txBox="1"/>
+          <p:nvPr/>
+        </p:nvSpPr>
+        <p:spPr>
+          <a:xfrm>
+            <a:off x="822960" y="6016752"/>
+            <a:ext cx="10515600" cy="384048"/>
+          </a:xfrm>
+          <a:prstGeom prst="rect">
+            <a:avLst/>
+          </a:prstGeom>
+          <a:noFill/>
+        </p:spPr>
+        <p:txBody>
+          <a:bodyPr wrap="none">
+            <a:spAutoFit/>
+          </a:bodyPr>
+          <a:lstStyle/>
+          <a:p>
+            <a:pPr algn="ctr">
+              <a:defRPr sz="1000" b="1">
+                <a:solidFill>
+                  <a:srgbClr val="38BDF8"/>
+                </a:solidFill>
+                <a:latin typeface="Arial"/>
+              </a:defRPr>
+            </a:pPr>
+            <a:r>
+              <a:t>INTEROPERABILITY CERTIFIED: PubMed E-utilities  |  ClinicalTrials.gov APIv2  |  NLM RxNorm RxCUI  |  HL7 FHIR R4 ResearchStudy</a:t>
+            </a:r>
+          </a:p>
+        </p:txBody>
+      </p:sp>
+    </p:spTree>
+  </p:cSld>
+  <p:clrMapOvr>
+    <a:masterClrMapping/>
+  </p:clrMapOvr>
+</p:sld>
+</file>
+
+<file path=ppt/slides/slide19.xml><?xml version="1.0" encoding="utf-8"?>
+<p:sld xmlns:a="http://schemas.openxmlformats.org/drawingml/2006/main" xmlns:p="http://schemas.openxmlformats.org/presentationml/2006/main" xmlns:r="http://schemas.openxmlformats.org/officeDocument/2006/relationships">
+  <p:cSld>
+    <p:bg>
+      <p:bgPr>
+        <a:solidFill>
+          <a:srgbClr val="0B1120"/>
+        </a:solidFill>
+        <a:effectLst/>
+      </p:bgPr>
+    </p:bg>
+    <p:spTree>
+      <p:nvGrpSpPr>
+        <p:cNvPr id="1" name=""/>
+        <p:cNvGrpSpPr/>
+        <p:nvPr/>
+      </p:nvGrpSpPr>
+      <p:grpSpPr/>
+      <p:sp>
+        <p:nvSpPr>
+          <p:cNvPr id="2" name="TextBox 1"/>
+          <p:cNvSpPr txBox="1"/>
+          <p:nvPr/>
+        </p:nvSpPr>
+        <p:spPr>
+          <a:xfrm>
+            <a:off x="731520" y="365760"/>
+            <a:ext cx="7315200" cy="320040"/>
+          </a:xfrm>
+          <a:prstGeom prst="rect">
+            <a:avLst/>
+          </a:prstGeom>
+          <a:noFill/>
+        </p:spPr>
+        <p:txBody>
+          <a:bodyPr wrap="square">
+            <a:spAutoFit/>
+          </a:bodyPr>
+          <a:lstStyle/>
+          <a:p>
+            <a:pPr>
+              <a:defRPr sz="1000" b="1">
+                <a:solidFill>
                   <a:srgbClr val="38BDF8"/>
                 </a:solidFill>
                 <a:latin typeface="Arial"/>
@@ -7733,7 +9993,7 @@
 </file>
 
 <file path=ppt/slides/slide2.xml><?xml version="1.0" encoding="utf-8"?>
-<p:sld xmlns:a="http://schemas.openxmlformats.org/drawingml/2006/main" xmlns:p="http://schemas.openxmlformats.org/presentationml/2006/main" xmlns:r="http://schemas.openxmlformats.org/officeDocument/2006/relationships">
+<p:sld xmlns:a="http://schemas.openxmlformats.org/drawingml/2006/main" xmlns:r="http://schemas.openxmlformats.org/officeDocument/2006/relationships" xmlns:p="http://schemas.openxmlformats.org/presentationml/2006/main">
   <p:cSld>
     <p:spTree>
       <p:nvGrpSpPr>
@@ -7741,7 +10001,14 @@
         <p:cNvGrpSpPr/>
         <p:nvPr/>
       </p:nvGrpSpPr>
-      <p:grpSpPr/>
+      <p:grpSpPr>
+        <a:xfrm>
+          <a:off x="0" y="0"/>
+          <a:ext cx="0" cy="0"/>
+          <a:chOff x="0" y="0"/>
+          <a:chExt cx="0" cy="0"/>
+        </a:xfrm>
+      </p:grpSpPr>
       <p:sp>
         <p:nvSpPr>
           <p:cNvPr id="2" name="Rectangle 1"/>
@@ -7782,6 +10049,7 @@
           <a:lstStyle/>
           <a:p>
             <a:pPr algn="ctr"/>
+            <a:endParaRPr/>
           </a:p>
         </p:txBody>
       </p:sp>
@@ -7933,6 +10201,7 @@
           <a:lstStyle/>
           <a:p>
             <a:pPr algn="ctr"/>
+            <a:endParaRPr/>
           </a:p>
         </p:txBody>
       </p:sp>
@@ -7974,11 +10243,14 @@
           </a:fontRef>
         </p:style>
         <p:txBody>
-          <a:bodyPr rtlCol="0" anchor="ctr" wrap="square" tIns="274320" lIns="274320"/>
+          <a:bodyPr wrap="square" lIns="274320" tIns="274320" rtlCol="0" anchor="ctr"/>
           <a:lstStyle/>
           <a:p>
             <a:pPr algn="ctr">
-              <a:defRPr sz="1300" b="1">
+              <a:spcAft>
+                <a:spcPts val="800"/>
+              </a:spcAft>
+              <a:defRPr sz="1100" b="1">
                 <a:solidFill>
                   <a:srgbClr val="00F5D4"/>
                 </a:solidFill>
@@ -7986,55 +10258,87 @@
               </a:defRPr>
             </a:pPr>
             <a:r>
-              <a:t>PART I: FOUNDATIONS</a:t>
-            </a:r>
-          </a:p>
-          <a:p>
-            <a:pPr>
-              <a:spcBef>
-                <a:spcPts val="1400"/>
-              </a:spcBef>
-              <a:defRPr sz="1100">
-                <a:solidFill>
-                  <a:srgbClr val="F8FAFC"/>
-                </a:solidFill>
-                <a:latin typeface="Arial"/>
-              </a:defRPr>
-            </a:pPr>
-            <a:r>
-              <a:t>1. The Systematic Review Bottleneck</a:t>
-            </a:r>
-          </a:p>
-          <a:p>
-            <a:pPr>
-              <a:spcBef>
-                <a:spcPts val="1400"/>
-              </a:spcBef>
-              <a:defRPr sz="1100">
-                <a:solidFill>
-                  <a:srgbClr val="F8FAFC"/>
-                </a:solidFill>
-                <a:latin typeface="Arial"/>
-              </a:defRPr>
-            </a:pPr>
-            <a:r>
-              <a:t>2. System Architecture &amp; Engineering Stack</a:t>
-            </a:r>
-          </a:p>
-          <a:p>
-            <a:pPr>
-              <a:spcBef>
-                <a:spcPts val="1400"/>
-              </a:spcBef>
-              <a:defRPr sz="1100">
-                <a:solidFill>
-                  <a:srgbClr val="F8FAFC"/>
-                </a:solidFill>
-                <a:latin typeface="Arial"/>
-              </a:defRPr>
-            </a:pPr>
-            <a:r>
-              <a:t>3. The 8-Node Process Architecture (M-A-N-D-O-R-O-S)</a:t>
+              <a:t>PART I: FOUNDATIONS &amp; EXTRACTION</a:t>
+            </a:r>
+          </a:p>
+          <a:p>
+            <a:pPr>
+              <a:spcAft>
+                <a:spcPts val="400"/>
+              </a:spcAft>
+              <a:defRPr sz="950">
+                <a:solidFill>
+                  <a:srgbClr val="CBD5E1"/>
+                </a:solidFill>
+                <a:latin typeface="Arial"/>
+              </a:defRPr>
+            </a:pPr>
+            <a:r>
+              <a:t>1. The Systematic Review Bottleneck &amp; Clinical Need</a:t>
+            </a:r>
+          </a:p>
+          <a:p>
+            <a:pPr>
+              <a:spcAft>
+                <a:spcPts val="400"/>
+              </a:spcAft>
+              <a:defRPr sz="950">
+                <a:solidFill>
+                  <a:srgbClr val="CBD5E1"/>
+                </a:solidFill>
+                <a:latin typeface="Arial"/>
+              </a:defRPr>
+            </a:pPr>
+            <a:r>
+              <a:t>2. System Architecture &amp; 8-Node Pipeline (M-A-N-D-O-R-O-S)</a:t>
+            </a:r>
+          </a:p>
+          <a:p>
+            <a:pPr>
+              <a:spcAft>
+                <a:spcPts val="400"/>
+              </a:spcAft>
+              <a:defRPr sz="950">
+                <a:solidFill>
+                  <a:srgbClr val="CBD5E1"/>
+                </a:solidFill>
+                <a:latin typeface="Arial"/>
+              </a:defRPr>
+            </a:pPr>
+            <a:r>
+              <a:t>3. Stage-1 Atomic Curation (7 Sheets / 88 Fields)</a:t>
+            </a:r>
+          </a:p>
+          <a:p>
+            <a:pPr>
+              <a:spcAft>
+                <a:spcPts val="400"/>
+              </a:spcAft>
+              <a:defRPr sz="950">
+                <a:solidFill>
+                  <a:srgbClr val="CBD5E1"/>
+                </a:solidFill>
+                <a:latin typeface="Arial"/>
+              </a:defRPr>
+            </a:pPr>
+            <a:r>
+              <a:t>4. Verbatim Provenance &amp; Zero-Imputation Guarantee</a:t>
+            </a:r>
+          </a:p>
+          <a:p>
+            <a:pPr>
+              <a:spcAft>
+                <a:spcPts val="400"/>
+              </a:spcAft>
+              <a:defRPr sz="950">
+                <a:solidFill>
+                  <a:srgbClr val="CBD5E1"/>
+                </a:solidFill>
+                <a:latin typeface="Arial"/>
+              </a:defRPr>
+            </a:pPr>
+            <a:r>
+              <a:t>5. Clinical AI Governance &amp; Two-Phase 10/10 Gate</a:t>
             </a:r>
           </a:p>
         </p:txBody>
@@ -8077,11 +10381,14 @@
           </a:fontRef>
         </p:style>
         <p:txBody>
-          <a:bodyPr rtlCol="0" anchor="ctr" wrap="square" tIns="274320" lIns="274320"/>
+          <a:bodyPr wrap="square" lIns="274320" tIns="274320" rtlCol="0" anchor="ctr"/>
           <a:lstStyle/>
           <a:p>
             <a:pPr algn="ctr">
-              <a:defRPr sz="1300" b="1">
+              <a:spcAft>
+                <a:spcPts val="800"/>
+              </a:spcAft>
+              <a:defRPr sz="1100" b="1">
                 <a:solidFill>
                   <a:srgbClr val="38BDF8"/>
                 </a:solidFill>
@@ -8089,55 +10396,87 @@
               </a:defRPr>
             </a:pPr>
             <a:r>
-              <a:t>PART II: CORE ENGINES</a:t>
-            </a:r>
-          </a:p>
-          <a:p>
-            <a:pPr>
-              <a:spcBef>
-                <a:spcPts val="1400"/>
-              </a:spcBef>
-              <a:defRPr sz="1100">
-                <a:solidFill>
-                  <a:srgbClr val="F8FAFC"/>
-                </a:solidFill>
-                <a:latin typeface="Arial"/>
-              </a:defRPr>
-            </a:pPr>
-            <a:r>
-              <a:t>4. Stage-1 Atomic Curation (7 Sheets / 88 Fields)</a:t>
-            </a:r>
-          </a:p>
-          <a:p>
-            <a:pPr>
-              <a:spcBef>
-                <a:spcPts val="1400"/>
-              </a:spcBef>
-              <a:defRPr sz="1100">
-                <a:solidFill>
-                  <a:srgbClr val="F8FAFC"/>
-                </a:solidFill>
-                <a:latin typeface="Arial"/>
-              </a:defRPr>
-            </a:pPr>
-            <a:r>
-              <a:t>5. Phase-2 Multi-Trial Evidence Synthesis &amp; REML</a:t>
-            </a:r>
-          </a:p>
-          <a:p>
-            <a:pPr>
-              <a:spcBef>
-                <a:spcPts val="1400"/>
-              </a:spcBef>
-              <a:defRPr sz="1100">
-                <a:solidFill>
-                  <a:srgbClr val="F8FAFC"/>
-                </a:solidFill>
-                <a:latin typeface="Arial"/>
-              </a:defRPr>
-            </a:pPr>
-            <a:r>
-              <a:t>6. Network Meta-Analysis (NMA) &amp; SUCRA Hierarchy</a:t>
+              <a:t>PART II: SYNTHESIS &amp; METHODOLOGICAL AUDIT</a:t>
+            </a:r>
+          </a:p>
+          <a:p>
+            <a:pPr>
+              <a:spcAft>
+                <a:spcPts val="400"/>
+              </a:spcAft>
+              <a:defRPr sz="950">
+                <a:solidFill>
+                  <a:srgbClr val="CBD5E1"/>
+                </a:solidFill>
+                <a:latin typeface="Arial"/>
+              </a:defRPr>
+            </a:pPr>
+            <a:r>
+              <a:t>6. Phase-2 Multi-Trial REML &amp; 20 Supreme Rules</a:t>
+            </a:r>
+          </a:p>
+          <a:p>
+            <a:pPr>
+              <a:spcAft>
+                <a:spcPts val="400"/>
+              </a:spcAft>
+              <a:defRPr sz="950">
+                <a:solidFill>
+                  <a:srgbClr val="CBD5E1"/>
+                </a:solidFill>
+                <a:latin typeface="Arial"/>
+              </a:defRPr>
+            </a:pPr>
+            <a:r>
+              <a:t>7. Network Meta-Analysis (NMA) &amp; SUCRA Hierarchy</a:t>
+            </a:r>
+          </a:p>
+          <a:p>
+            <a:pPr>
+              <a:spcAft>
+                <a:spcPts val="400"/>
+              </a:spcAft>
+              <a:defRPr sz="950">
+                <a:solidFill>
+                  <a:srgbClr val="CBD5E1"/>
+                </a:solidFill>
+                <a:latin typeface="Arial"/>
+              </a:defRPr>
+            </a:pPr>
+            <a:r>
+              <a:t>8. TrialMind &amp; RCTMethodologyIE Validity Audit</a:t>
+            </a:r>
+          </a:p>
+          <a:p>
+            <a:pPr>
+              <a:spcAft>
+                <a:spcPts val="400"/>
+              </a:spcAft>
+              <a:defRPr sz="950">
+                <a:solidFill>
+                  <a:srgbClr val="CBD5E1"/>
+                </a:solidFill>
+                <a:latin typeface="Arial"/>
+              </a:defRPr>
+            </a:pPr>
+            <a:r>
+              <a:t>9. In-Silico Synthesis &amp; Virtual Clinical Trials</a:t>
+            </a:r>
+          </a:p>
+          <a:p>
+            <a:pPr>
+              <a:spcAft>
+                <a:spcPts val="400"/>
+              </a:spcAft>
+              <a:defRPr sz="950">
+                <a:solidFill>
+                  <a:srgbClr val="CBD5E1"/>
+                </a:solidFill>
+                <a:latin typeface="Arial"/>
+              </a:defRPr>
+            </a:pPr>
+            <a:r>
+              <a:t>10. User Walkthrough &amp; Google AI Studio BYOK</a:t>
             </a:r>
           </a:p>
         </p:txBody>
@@ -8180,67 +10519,102 @@
           </a:fontRef>
         </p:style>
         <p:txBody>
-          <a:bodyPr rtlCol="0" anchor="ctr" wrap="square" tIns="274320" lIns="274320"/>
+          <a:bodyPr wrap="square" lIns="274320" tIns="274320" rtlCol="0" anchor="ctr"/>
           <a:lstStyle/>
           <a:p>
             <a:pPr algn="ctr">
-              <a:defRPr sz="1300" b="1">
-                <a:solidFill>
-                  <a:srgbClr val="A855F7"/>
-                </a:solidFill>
-                <a:latin typeface="Arial"/>
-              </a:defRPr>
-            </a:pPr>
-            <a:r>
-              <a:t>PART III: DISCOVERY &amp; PRACTICE</a:t>
-            </a:r>
-          </a:p>
-          <a:p>
-            <a:pPr>
-              <a:spcBef>
-                <a:spcPts val="1400"/>
-              </a:spcBef>
-              <a:defRPr sz="1100">
-                <a:solidFill>
-                  <a:srgbClr val="F8FAFC"/>
-                </a:solidFill>
-                <a:latin typeface="Arial"/>
-              </a:defRPr>
-            </a:pPr>
-            <a:r>
-              <a:t>7. In-Silico Synthesis &amp; Virtual Clinical Trials</a:t>
-            </a:r>
-          </a:p>
-          <a:p>
-            <a:pPr>
-              <a:spcBef>
-                <a:spcPts val="1400"/>
-              </a:spcBef>
-              <a:defRPr sz="1100">
-                <a:solidFill>
-                  <a:srgbClr val="F8FAFC"/>
-                </a:solidFill>
-                <a:latin typeface="Arial"/>
-              </a:defRPr>
-            </a:pPr>
-            <a:r>
-              <a:t>8. Step-by-Step User Walkthrough Manual</a:t>
-            </a:r>
-          </a:p>
-          <a:p>
-            <a:pPr>
-              <a:spcBef>
-                <a:spcPts val="1400"/>
-              </a:spcBef>
-              <a:defRPr sz="1100">
-                <a:solidFill>
-                  <a:srgbClr val="F8FAFC"/>
-                </a:solidFill>
-                <a:latin typeface="Arial"/>
-              </a:defRPr>
-            </a:pPr>
-            <a:r>
-              <a:t>9. Google AI Studio BYOK Tutorial &amp; Governance</a:t>
+              <a:spcAft>
+                <a:spcPts val="800"/>
+              </a:spcAft>
+              <a:defRPr sz="1100" b="1">
+                <a:solidFill>
+                  <a:srgbClr val="C084FC"/>
+                </a:solidFill>
+                <a:latin typeface="Arial"/>
+              </a:defRPr>
+            </a:pPr>
+            <a:r>
+              <a:t>PART III: RESEARCH GAPS, PRISMA &amp; ECOSYSTEM</a:t>
+            </a:r>
+          </a:p>
+          <a:p>
+            <a:pPr>
+              <a:spcAft>
+                <a:spcPts val="400"/>
+              </a:spcAft>
+              <a:defRPr sz="950">
+                <a:solidFill>
+                  <a:srgbClr val="CBD5E1"/>
+                </a:solidFill>
+                <a:latin typeface="Arial"/>
+              </a:defRPr>
+            </a:pPr>
+            <a:r>
+              <a:t>11. Phase 3 Research Gap &amp; Thesis Navigator</a:t>
+            </a:r>
+          </a:p>
+          <a:p>
+            <a:pPr>
+              <a:spcAft>
+                <a:spcPts val="400"/>
+              </a:spcAft>
+              <a:defRPr sz="950">
+                <a:solidFill>
+                  <a:srgbClr val="CBD5E1"/>
+                </a:solidFill>
+                <a:latin typeface="Arial"/>
+              </a:defRPr>
+            </a:pPr>
+            <a:r>
+              <a:t>12. The 5 Pillars of Rigor &amp; Power Calibration</a:t>
+            </a:r>
+          </a:p>
+          <a:p>
+            <a:pPr>
+              <a:spcAft>
+                <a:spcPts val="400"/>
+              </a:spcAft>
+              <a:defRPr sz="950">
+                <a:solidFill>
+                  <a:srgbClr val="CBD5E1"/>
+                </a:solidFill>
+                <a:latin typeface="Arial"/>
+              </a:defRPr>
+            </a:pPr>
+            <a:r>
+              <a:t>13. PRISMA 2020 Intelligence &amp; 4-Stage Flow Diagram</a:t>
+            </a:r>
+          </a:p>
+          <a:p>
+            <a:pPr>
+              <a:spcAft>
+                <a:spcPts val="400"/>
+              </a:spcAft>
+              <a:defRPr sz="950">
+                <a:solidFill>
+                  <a:srgbClr val="CBD5E1"/>
+                </a:solidFill>
+                <a:latin typeface="Arial"/>
+              </a:defRPr>
+            </a:pPr>
+            <a:r>
+              <a:t>14. External Clinical Databases (PubMed, NCT, RxNorm, FHIR)</a:t>
+            </a:r>
+          </a:p>
+          <a:p>
+            <a:pPr>
+              <a:spcAft>
+                <a:spcPts val="400"/>
+              </a:spcAft>
+              <a:defRPr sz="950">
+                <a:solidFill>
+                  <a:srgbClr val="CBD5E1"/>
+                </a:solidFill>
+                <a:latin typeface="Arial"/>
+              </a:defRPr>
+            </a:pPr>
+            <a:r>
+              <a:t>15. Enterprise Cloud Security, 512MB RAM &amp; 24/7 Keep-Alive</a:t>
             </a:r>
           </a:p>
         </p:txBody>
@@ -8313,6 +10687,726 @@
             </a:pPr>
             <a:r>
               <a:t>SLIDE 02 / 12</a:t>
+            </a:r>
+          </a:p>
+        </p:txBody>
+      </p:sp>
+    </p:spTree>
+  </p:cSld>
+  <p:clrMapOvr>
+    <a:masterClrMapping/>
+  </p:clrMapOvr>
+</p:sld>
+</file>
+
+<file path=ppt/slides/slide20.xml><?xml version="1.0" encoding="utf-8"?>
+<p:sld xmlns:a="http://schemas.openxmlformats.org/drawingml/2006/main" xmlns:p="http://schemas.openxmlformats.org/presentationml/2006/main" xmlns:r="http://schemas.openxmlformats.org/officeDocument/2006/relationships">
+  <p:cSld>
+    <p:bg>
+      <p:bgPr>
+        <a:solidFill>
+          <a:srgbClr val="0B1120"/>
+        </a:solidFill>
+        <a:effectLst/>
+      </p:bgPr>
+    </p:bg>
+    <p:spTree>
+      <p:nvGrpSpPr>
+        <p:cNvPr id="1" name=""/>
+        <p:cNvGrpSpPr/>
+        <p:nvPr/>
+      </p:nvGrpSpPr>
+      <p:grpSpPr/>
+      <p:sp>
+        <p:nvSpPr>
+          <p:cNvPr id="2" name="TextBox 1"/>
+          <p:cNvSpPr txBox="1"/>
+          <p:nvPr/>
+        </p:nvSpPr>
+        <p:spPr>
+          <a:xfrm>
+            <a:off x="731520" y="365760"/>
+            <a:ext cx="7315200" cy="320040"/>
+          </a:xfrm>
+          <a:prstGeom prst="rect">
+            <a:avLst/>
+          </a:prstGeom>
+          <a:noFill/>
+        </p:spPr>
+        <p:txBody>
+          <a:bodyPr wrap="square">
+            <a:spAutoFit/>
+          </a:bodyPr>
+          <a:lstStyle/>
+          <a:p>
+            <a:pPr>
+              <a:defRPr sz="1000" b="1">
+                <a:solidFill>
+                  <a:srgbClr val="10B981"/>
+                </a:solidFill>
+                <a:latin typeface="Arial"/>
+              </a:defRPr>
+            </a:pPr>
+            <a:r>
+              <a:t>ENTERPRISE CLOUD ARCHITECTURE &amp; 24/7 RELIABILITY</a:t>
+            </a:r>
+          </a:p>
+        </p:txBody>
+      </p:sp>
+      <p:sp>
+        <p:nvSpPr>
+          <p:cNvPr id="3" name="TextBox 2"/>
+          <p:cNvSpPr txBox="1"/>
+          <p:nvPr/>
+        </p:nvSpPr>
+        <p:spPr>
+          <a:xfrm>
+            <a:off x="8412480" y="365760"/>
+            <a:ext cx="3017520" cy="320040"/>
+          </a:xfrm>
+          <a:prstGeom prst="rect">
+            <a:avLst/>
+          </a:prstGeom>
+          <a:noFill/>
+        </p:spPr>
+        <p:txBody>
+          <a:bodyPr wrap="none">
+            <a:spAutoFit/>
+          </a:bodyPr>
+          <a:lstStyle/>
+          <a:p>
+            <a:pPr algn="r">
+              <a:defRPr sz="1000" b="1">
+                <a:solidFill>
+                  <a:srgbClr val="94A3B8"/>
+                </a:solidFill>
+                <a:latin typeface="Arial"/>
+              </a:defRPr>
+            </a:pPr>
+            <a:r>
+              <a:t>PRODUCTION HARDENED</a:t>
+            </a:r>
+          </a:p>
+        </p:txBody>
+      </p:sp>
+      <p:sp>
+        <p:nvSpPr>
+          <p:cNvPr id="4" name="TextBox 3"/>
+          <p:cNvSpPr txBox="1"/>
+          <p:nvPr/>
+        </p:nvSpPr>
+        <p:spPr>
+          <a:xfrm>
+            <a:off x="731520" y="685800"/>
+            <a:ext cx="10515600" cy="685800"/>
+          </a:xfrm>
+          <a:prstGeom prst="rect">
+            <a:avLst/>
+          </a:prstGeom>
+          <a:noFill/>
+        </p:spPr>
+        <p:txBody>
+          <a:bodyPr wrap="square">
+            <a:spAutoFit/>
+          </a:bodyPr>
+          <a:lstStyle/>
+          <a:p>
+            <a:pPr>
+              <a:defRPr sz="2100" b="1">
+                <a:solidFill>
+                  <a:srgbClr val="F8FAFC"/>
+                </a:solidFill>
+                <a:latin typeface="Arial"/>
+              </a:defRPr>
+            </a:pPr>
+            <a:r>
+              <a:t>Cloud Security, Render RAM Optimization &amp; 24/7 Reliability</a:t>
+            </a:r>
+          </a:p>
+          <a:p>
+            <a:pPr>
+              <a:defRPr sz="1100">
+                <a:solidFill>
+                  <a:srgbClr val="94A3B8"/>
+                </a:solidFill>
+                <a:latin typeface="Arial"/>
+              </a:defRPr>
+            </a:pPr>
+            <a:r>
+              <a:t>Perpetual High Availability, 512MB RAM Leak-Free Operations, Path-Traversal Defense, and Zero-Latency Instant Wakeup.</a:t>
+            </a:r>
+          </a:p>
+        </p:txBody>
+      </p:sp>
+      <p:sp>
+        <p:nvSpPr>
+          <p:cNvPr id="5" name="Rounded Rectangle 4"/>
+          <p:cNvSpPr/>
+          <p:nvPr/>
+        </p:nvSpPr>
+        <p:spPr>
+          <a:xfrm>
+            <a:off x="731520" y="1508760"/>
+            <a:ext cx="3383280" cy="4297680"/>
+          </a:xfrm>
+          <a:prstGeom prst="roundRect">
+            <a:avLst/>
+          </a:prstGeom>
+          <a:solidFill>
+            <a:srgbClr val="0F172A"/>
+          </a:solidFill>
+          <a:ln w="19050">
+            <a:solidFill>
+              <a:srgbClr val="10B981"/>
+            </a:solidFill>
+          </a:ln>
+        </p:spPr>
+        <p:style>
+          <a:lnRef idx="1">
+            <a:schemeClr val="accent1"/>
+          </a:lnRef>
+          <a:fillRef idx="3">
+            <a:schemeClr val="accent1"/>
+          </a:fillRef>
+          <a:effectRef idx="2">
+            <a:schemeClr val="accent1"/>
+          </a:effectRef>
+          <a:fontRef idx="minor">
+            <a:schemeClr val="lt1"/>
+          </a:fontRef>
+        </p:style>
+        <p:txBody>
+          <a:bodyPr rtlCol="0" anchor="ctr"/>
+          <a:lstStyle/>
+          <a:p>
+            <a:pPr algn="ctr"/>
+          </a:p>
+        </p:txBody>
+      </p:sp>
+      <p:sp>
+        <p:nvSpPr>
+          <p:cNvPr id="6" name="TextBox 5"/>
+          <p:cNvSpPr txBox="1"/>
+          <p:nvPr/>
+        </p:nvSpPr>
+        <p:spPr>
+          <a:xfrm>
+            <a:off x="896112" y="1673352"/>
+            <a:ext cx="3054096" cy="3968496"/>
+          </a:xfrm>
+          <a:prstGeom prst="rect">
+            <a:avLst/>
+          </a:prstGeom>
+          <a:noFill/>
+        </p:spPr>
+        <p:txBody>
+          <a:bodyPr wrap="square">
+            <a:spAutoFit/>
+          </a:bodyPr>
+          <a:lstStyle/>
+          <a:p>
+            <a:pPr>
+              <a:spcAft>
+                <a:spcPts val="400"/>
+              </a:spcAft>
+              <a:defRPr sz="950" b="1">
+                <a:solidFill>
+                  <a:srgbClr val="10B981"/>
+                </a:solidFill>
+                <a:latin typeface="Arial"/>
+              </a:defRPr>
+            </a:pPr>
+            <a:r>
+              <a:t>ENTERPRISE SECURITY &amp; DEFENSE</a:t>
+            </a:r>
+          </a:p>
+          <a:p>
+            <a:pPr>
+              <a:spcAft>
+                <a:spcPts val="1000"/>
+              </a:spcAft>
+              <a:defRPr sz="1300" b="1">
+                <a:solidFill>
+                  <a:srgbClr val="F8FAFC"/>
+                </a:solidFill>
+                <a:latin typeface="Arial"/>
+              </a:defRPr>
+            </a:pPr>
+            <a:r>
+              <a:t>Zero-Trust Path Defense &amp; Secret Isolation</a:t>
+            </a:r>
+          </a:p>
+          <a:p>
+            <a:pPr>
+              <a:spcAft>
+                <a:spcPts val="600"/>
+              </a:spcAft>
+              <a:defRPr sz="950">
+                <a:solidFill>
+                  <a:srgbClr val="CBD5E1"/>
+                </a:solidFill>
+                <a:latin typeface="Arial"/>
+              </a:defRPr>
+            </a:pPr>
+            <a:r>
+              <a:t>• Canonical Root Path Verification: Eliminates path traversal on /api/view &amp; /api/download; strictly confines file access to resolved whitelist roots (outputs/, SESSION_ROOT, temp).</a:t>
+            </a:r>
+          </a:p>
+          <a:p>
+            <a:pPr>
+              <a:spcAft>
+                <a:spcPts val="600"/>
+              </a:spcAft>
+              <a:defRPr sz="950">
+                <a:solidFill>
+                  <a:srgbClr val="CBD5E1"/>
+                </a:solidFill>
+                <a:latin typeface="Arial"/>
+              </a:defRPr>
+            </a:pPr>
+            <a:r>
+              <a:t>• Secret Isolation in Transport Headers: Relocated sensitive Gemini API keys to secure x-goog-api-key HTTP headers, eliminating token exposure in proxy logs and referrer headers.</a:t>
+            </a:r>
+          </a:p>
+          <a:p>
+            <a:pPr>
+              <a:spcAft>
+                <a:spcPts val="600"/>
+              </a:spcAft>
+              <a:defRPr sz="950">
+                <a:solidFill>
+                  <a:srgbClr val="CBD5E1"/>
+                </a:solidFill>
+                <a:latin typeface="Arial"/>
+              </a:defRPr>
+            </a:pPr>
+            <a:r>
+              <a:t>• Contextual XSS Neutralization: Sanitizes dynamic table headers, author credits, and study titles via deterministic html.escape(), preserving interactive Plotly charts and NCPI FHIR actions.</a:t>
+            </a:r>
+          </a:p>
+          <a:p>
+            <a:pPr>
+              <a:spcAft>
+                <a:spcPts val="600"/>
+              </a:spcAft>
+              <a:defRPr sz="950">
+                <a:solidFill>
+                  <a:srgbClr val="CBD5E1"/>
+                </a:solidFill>
+                <a:latin typeface="Arial"/>
+              </a:defRPr>
+            </a:pPr>
+            <a:r>
+              <a:t>• Opt-In Access Control: Built-in basic HTTP authentication guard (MANDOROS_AUTH_*) activating strictly when environment credentials exist without breaking open clinical testing.</a:t>
+            </a:r>
+          </a:p>
+        </p:txBody>
+      </p:sp>
+      <p:sp>
+        <p:nvSpPr>
+          <p:cNvPr id="7" name="Rounded Rectangle 6"/>
+          <p:cNvSpPr/>
+          <p:nvPr/>
+        </p:nvSpPr>
+        <p:spPr>
+          <a:xfrm>
+            <a:off x="4389120" y="1508760"/>
+            <a:ext cx="3383280" cy="4297680"/>
+          </a:xfrm>
+          <a:prstGeom prst="roundRect">
+            <a:avLst/>
+          </a:prstGeom>
+          <a:solidFill>
+            <a:srgbClr val="0F172A"/>
+          </a:solidFill>
+          <a:ln w="19050">
+            <a:solidFill>
+              <a:srgbClr val="38BDF8"/>
+            </a:solidFill>
+          </a:ln>
+        </p:spPr>
+        <p:style>
+          <a:lnRef idx="1">
+            <a:schemeClr val="accent1"/>
+          </a:lnRef>
+          <a:fillRef idx="3">
+            <a:schemeClr val="accent1"/>
+          </a:fillRef>
+          <a:effectRef idx="2">
+            <a:schemeClr val="accent1"/>
+          </a:effectRef>
+          <a:fontRef idx="minor">
+            <a:schemeClr val="lt1"/>
+          </a:fontRef>
+        </p:style>
+        <p:txBody>
+          <a:bodyPr rtlCol="0" anchor="ctr"/>
+          <a:lstStyle/>
+          <a:p>
+            <a:pPr algn="ctr"/>
+          </a:p>
+        </p:txBody>
+      </p:sp>
+      <p:sp>
+        <p:nvSpPr>
+          <p:cNvPr id="8" name="TextBox 7"/>
+          <p:cNvSpPr txBox="1"/>
+          <p:nvPr/>
+        </p:nvSpPr>
+        <p:spPr>
+          <a:xfrm>
+            <a:off x="4553712" y="1673352"/>
+            <a:ext cx="3054096" cy="3968496"/>
+          </a:xfrm>
+          <a:prstGeom prst="rect">
+            <a:avLst/>
+          </a:prstGeom>
+          <a:noFill/>
+        </p:spPr>
+        <p:txBody>
+          <a:bodyPr wrap="square">
+            <a:spAutoFit/>
+          </a:bodyPr>
+          <a:lstStyle/>
+          <a:p>
+            <a:pPr>
+              <a:spcAft>
+                <a:spcPts val="400"/>
+              </a:spcAft>
+              <a:defRPr sz="950" b="1">
+                <a:solidFill>
+                  <a:srgbClr val="38BDF8"/>
+                </a:solidFill>
+                <a:latin typeface="Arial"/>
+              </a:defRPr>
+            </a:pPr>
+            <a:r>
+              <a:t>RENDER 512MB RAM OPTIMIZATION</a:t>
+            </a:r>
+          </a:p>
+          <a:p>
+            <a:pPr>
+              <a:spcAft>
+                <a:spcPts val="1000"/>
+              </a:spcAft>
+              <a:defRPr sz="1300" b="1">
+                <a:solidFill>
+                  <a:srgbClr val="F8FAFC"/>
+                </a:solidFill>
+                <a:latin typeface="Arial"/>
+              </a:defRPr>
+            </a:pPr>
+            <a:r>
+              <a:t>Deterministic Memory &amp; Leak-Free Architecture</a:t>
+            </a:r>
+          </a:p>
+          <a:p>
+            <a:pPr>
+              <a:spcAft>
+                <a:spcPts val="600"/>
+              </a:spcAft>
+              <a:defRPr sz="950">
+                <a:solidFill>
+                  <a:srgbClr val="CBD5E1"/>
+                </a:solidFill>
+                <a:latin typeface="Arial"/>
+              </a:defRPr>
+            </a:pPr>
+            <a:r>
+              <a:t>• Deterministic Workbook DOM Destruction: Every openpyxl.load_workbook is wrapped in try...finally: wb.close(), immediately freeing heavy XML/DOM memory trees upon dashboard render.</a:t>
+            </a:r>
+          </a:p>
+          <a:p>
+            <a:pPr>
+              <a:spcAft>
+                <a:spcPts val="600"/>
+              </a:spcAft>
+              <a:defRPr sz="950">
+                <a:solidFill>
+                  <a:srgbClr val="CBD5E1"/>
+                </a:solidFill>
+                <a:latin typeface="Arial"/>
+              </a:defRPr>
+            </a:pPr>
+            <a:r>
+              <a:t>• Zero File-Descriptor Leaks: PDF ingestion wrapped in guarded Python context managers (with open() as stream), ensuring streams are closed instantly after PyPDF extraction on Linux.</a:t>
+            </a:r>
+          </a:p>
+          <a:p>
+            <a:pPr>
+              <a:spcAft>
+                <a:spcPts val="600"/>
+              </a:spcAft>
+              <a:defRPr sz="950">
+                <a:solidFill>
+                  <a:srgbClr val="CBD5E1"/>
+                </a:solidFill>
+                <a:latin typeface="Arial"/>
+              </a:defRPr>
+            </a:pPr>
+            <a:r>
+              <a:t>• Resilient AI Timeout Guards: Strict 60.0s network timeout caps across OpenAI, Anthropic, and Google GenAI SDK clients prevent thread hangs, process accumulation, and worker starvation.</a:t>
+            </a:r>
+          </a:p>
+          <a:p>
+            <a:pPr>
+              <a:spcAft>
+                <a:spcPts val="600"/>
+              </a:spcAft>
+              <a:defRPr sz="950">
+                <a:solidFill>
+                  <a:srgbClr val="CBD5E1"/>
+                </a:solidFill>
+                <a:latin typeface="Arial"/>
+              </a:defRPr>
+            </a:pPr>
+            <a:r>
+              <a:t>• Lightweight Zero-Load Footprint: Operates comfortably within Render's tight 512MB free tier RAM ceiling without requiring heavyweight Celery/Redis workers or external caching daemons.</a:t>
+            </a:r>
+          </a:p>
+        </p:txBody>
+      </p:sp>
+      <p:sp>
+        <p:nvSpPr>
+          <p:cNvPr id="9" name="Rounded Rectangle 8"/>
+          <p:cNvSpPr/>
+          <p:nvPr/>
+        </p:nvSpPr>
+        <p:spPr>
+          <a:xfrm>
+            <a:off x="8046720" y="1508760"/>
+            <a:ext cx="3383280" cy="4297680"/>
+          </a:xfrm>
+          <a:prstGeom prst="roundRect">
+            <a:avLst/>
+          </a:prstGeom>
+          <a:solidFill>
+            <a:srgbClr val="0F172A"/>
+          </a:solidFill>
+          <a:ln w="19050">
+            <a:solidFill>
+              <a:srgbClr val="F59E0B"/>
+            </a:solidFill>
+          </a:ln>
+        </p:spPr>
+        <p:style>
+          <a:lnRef idx="1">
+            <a:schemeClr val="accent1"/>
+          </a:lnRef>
+          <a:fillRef idx="3">
+            <a:schemeClr val="accent1"/>
+          </a:fillRef>
+          <a:effectRef idx="2">
+            <a:schemeClr val="accent1"/>
+          </a:effectRef>
+          <a:fontRef idx="minor">
+            <a:schemeClr val="lt1"/>
+          </a:fontRef>
+        </p:style>
+        <p:txBody>
+          <a:bodyPr rtlCol="0" anchor="ctr"/>
+          <a:lstStyle/>
+          <a:p>
+            <a:pPr algn="ctr"/>
+          </a:p>
+        </p:txBody>
+      </p:sp>
+      <p:sp>
+        <p:nvSpPr>
+          <p:cNvPr id="10" name="TextBox 9"/>
+          <p:cNvSpPr txBox="1"/>
+          <p:nvPr/>
+        </p:nvSpPr>
+        <p:spPr>
+          <a:xfrm>
+            <a:off x="8211312" y="1673352"/>
+            <a:ext cx="3054096" cy="3968496"/>
+          </a:xfrm>
+          <a:prstGeom prst="rect">
+            <a:avLst/>
+          </a:prstGeom>
+          <a:noFill/>
+        </p:spPr>
+        <p:txBody>
+          <a:bodyPr wrap="square">
+            <a:spAutoFit/>
+          </a:bodyPr>
+          <a:lstStyle/>
+          <a:p>
+            <a:pPr>
+              <a:spcAft>
+                <a:spcPts val="400"/>
+              </a:spcAft>
+              <a:defRPr sz="950" b="1">
+                <a:solidFill>
+                  <a:srgbClr val="F59E0B"/>
+                </a:solidFill>
+                <a:latin typeface="Arial"/>
+              </a:defRPr>
+            </a:pPr>
+            <a:r>
+              <a:t>24/7 HIGH AVAILABILITY &amp; SPEED</a:t>
+            </a:r>
+          </a:p>
+          <a:p>
+            <a:pPr>
+              <a:spcAft>
+                <a:spcPts val="1000"/>
+              </a:spcAft>
+              <a:defRPr sz="1300" b="1">
+                <a:solidFill>
+                  <a:srgbClr val="F8FAFC"/>
+                </a:solidFill>
+                <a:latin typeface="Arial"/>
+              </a:defRPr>
+            </a:pPr>
+            <a:r>
+              <a:t>Perpetual Uptime &amp; Zero Cold-Start Latency</a:t>
+            </a:r>
+          </a:p>
+          <a:p>
+            <a:pPr>
+              <a:spcAft>
+                <a:spcPts val="600"/>
+              </a:spcAft>
+              <a:defRPr sz="950">
+                <a:solidFill>
+                  <a:srgbClr val="CBD5E1"/>
+                </a:solidFill>
+                <a:latin typeface="Arial"/>
+              </a:defRPr>
+            </a:pPr>
+            <a:r>
+              <a:t>• Automated Keep-Alive Ping Engine: Dedicated /health heartbeat endpoint probed every 5 minutes (UptimeRobot / GitHub Actions), completely neutralizing Render's 15-min idle container spin-down.</a:t>
+            </a:r>
+          </a:p>
+          <a:p>
+            <a:pPr>
+              <a:spcAft>
+                <a:spcPts val="600"/>
+              </a:spcAft>
+              <a:defRPr sz="950">
+                <a:solidFill>
+                  <a:srgbClr val="CBD5E1"/>
+                </a:solidFill>
+                <a:latin typeface="Arial"/>
+              </a:defRPr>
+            </a:pPr>
+            <a:r>
+              <a:t>• Sub-Second First-Interaction Time: Slashes initial cold-start latency from ~75 seconds down to &lt;1 second, ensuring instant, freeze-free access for clinicians and peer reviewers at all hours.</a:t>
+            </a:r>
+          </a:p>
+          <a:p>
+            <a:pPr>
+              <a:spcAft>
+                <a:spcPts val="600"/>
+              </a:spcAft>
+              <a:defRPr sz="950">
+                <a:solidFill>
+                  <a:srgbClr val="CBD5E1"/>
+                </a:solidFill>
+                <a:latin typeface="Arial"/>
+              </a:defRPr>
+            </a:pPr>
+            <a:r>
+              <a:t>• Multi-Cloud Failover Monitoring: Redundant external ping orchestrators with automated retry loops and email alerts for zero-downtime academic hosting.</a:t>
+            </a:r>
+          </a:p>
+          <a:p>
+            <a:pPr>
+              <a:spcAft>
+                <a:spcPts val="600"/>
+              </a:spcAft>
+              <a:defRPr sz="950">
+                <a:solidFill>
+                  <a:srgbClr val="CBD5E1"/>
+                </a:solidFill>
+                <a:latin typeface="Arial"/>
+              </a:defRPr>
+            </a:pPr>
+            <a:r>
+              <a:t>• Progressive Web App (PWA) Offline Cache: Caches RxNorm, NCPI FHIR, and public drug mappings locally in sessionStorage/localStorage for immediate client-side responsiveness.</a:t>
+            </a:r>
+          </a:p>
+        </p:txBody>
+      </p:sp>
+      <p:sp>
+        <p:nvSpPr>
+          <p:cNvPr id="11" name="Rounded Rectangle 10"/>
+          <p:cNvSpPr/>
+          <p:nvPr/>
+        </p:nvSpPr>
+        <p:spPr>
+          <a:xfrm>
+            <a:off x="731520" y="5989320"/>
+            <a:ext cx="10698480" cy="438912"/>
+          </a:xfrm>
+          <a:prstGeom prst="roundRect">
+            <a:avLst/>
+          </a:prstGeom>
+          <a:solidFill>
+            <a:srgbClr val="1E293B"/>
+          </a:solidFill>
+          <a:ln w="12700">
+            <a:solidFill>
+              <a:srgbClr val="334155"/>
+            </a:solidFill>
+          </a:ln>
+        </p:spPr>
+        <p:style>
+          <a:lnRef idx="1">
+            <a:schemeClr val="accent1"/>
+          </a:lnRef>
+          <a:fillRef idx="3">
+            <a:schemeClr val="accent1"/>
+          </a:fillRef>
+          <a:effectRef idx="2">
+            <a:schemeClr val="accent1"/>
+          </a:effectRef>
+          <a:fontRef idx="minor">
+            <a:schemeClr val="lt1"/>
+          </a:fontRef>
+        </p:style>
+        <p:txBody>
+          <a:bodyPr rtlCol="0" anchor="ctr"/>
+          <a:lstStyle/>
+          <a:p>
+            <a:pPr algn="ctr"/>
+          </a:p>
+        </p:txBody>
+      </p:sp>
+      <p:sp>
+        <p:nvSpPr>
+          <p:cNvPr id="12" name="TextBox 11"/>
+          <p:cNvSpPr txBox="1"/>
+          <p:nvPr/>
+        </p:nvSpPr>
+        <p:spPr>
+          <a:xfrm>
+            <a:off x="822960" y="6016752"/>
+            <a:ext cx="10515600" cy="384048"/>
+          </a:xfrm>
+          <a:prstGeom prst="rect">
+            <a:avLst/>
+          </a:prstGeom>
+          <a:noFill/>
+        </p:spPr>
+        <p:txBody>
+          <a:bodyPr wrap="none">
+            <a:spAutoFit/>
+          </a:bodyPr>
+          <a:lstStyle/>
+          <a:p>
+            <a:pPr algn="ctr">
+              <a:defRPr sz="1000" b="1">
+                <a:solidFill>
+                  <a:srgbClr val="10B981"/>
+                </a:solidFill>
+                <a:latin typeface="Arial"/>
+              </a:defRPr>
+            </a:pPr>
+            <a:r>
+              <a:t>PRODUCTION HARDENED: 24/7 Keep-Alive  |  512MB RAM Leak-Free  |  Canonical Path Defense  |  Header Token Isolation  |  &lt;1s Instant Wakeup</a:t>
             </a:r>
           </a:p>
         </p:txBody>
@@ -8326,7 +11420,7 @@
 </file>
 
 <file path=ppt/slides/slide3.xml><?xml version="1.0" encoding="utf-8"?>
-<p:sld xmlns:a="http://schemas.openxmlformats.org/drawingml/2006/main" xmlns:p="http://schemas.openxmlformats.org/presentationml/2006/main" xmlns:r="http://schemas.openxmlformats.org/officeDocument/2006/relationships">
+<p:sld xmlns:a="http://schemas.openxmlformats.org/drawingml/2006/main" xmlns:r="http://schemas.openxmlformats.org/officeDocument/2006/relationships" xmlns:p="http://schemas.openxmlformats.org/presentationml/2006/main">
   <p:cSld>
     <p:spTree>
       <p:nvGrpSpPr>
@@ -8334,7 +11428,14 @@
         <p:cNvGrpSpPr/>
         <p:nvPr/>
       </p:nvGrpSpPr>
-      <p:grpSpPr/>
+      <p:grpSpPr>
+        <a:xfrm>
+          <a:off x="0" y="0"/>
+          <a:ext cx="0" cy="0"/>
+          <a:chOff x="0" y="0"/>
+          <a:chExt cx="0" cy="0"/>
+        </a:xfrm>
+      </p:grpSpPr>
       <p:sp>
         <p:nvSpPr>
           <p:cNvPr id="2" name="Rectangle 1"/>
@@ -8375,6 +11476,7 @@
           <a:lstStyle/>
           <a:p>
             <a:pPr algn="ctr"/>
+            <a:endParaRPr/>
           </a:p>
         </p:txBody>
       </p:sp>
@@ -8526,6 +11628,7 @@
           <a:lstStyle/>
           <a:p>
             <a:pPr algn="ctr"/>
+            <a:endParaRPr/>
           </a:p>
         </p:txBody>
       </p:sp>
@@ -8567,7 +11670,7 @@
           </a:fontRef>
         </p:style>
         <p:txBody>
-          <a:bodyPr rtlCol="0" anchor="ctr" wrap="square" lIns="274320"/>
+          <a:bodyPr wrap="square" lIns="274320" rtlCol="0" anchor="ctr"/>
           <a:lstStyle/>
           <a:p>
             <a:pPr algn="ctr">
@@ -8682,7 +11785,7 @@
           </a:fontRef>
         </p:style>
         <p:txBody>
-          <a:bodyPr rtlCol="0" anchor="ctr" wrap="square" lIns="274320"/>
+          <a:bodyPr wrap="square" lIns="274320" rtlCol="0" anchor="ctr"/>
           <a:lstStyle/>
           <a:p>
             <a:pPr algn="ctr">
@@ -8694,6 +11797,7 @@
               </a:defRPr>
             </a:pPr>
             <a:r>
+              <a:rPr dirty="0"/>
               <a:t>THE MANDOROS SOLUTION: Deterministic Verbatim Synthesis</a:t>
             </a:r>
           </a:p>
@@ -8709,6 +11813,7 @@
               </a:defRPr>
             </a:pPr>
             <a:r>
+              <a:rPr dirty="0"/>
               <a:t>• Seconds, Not Years: Ingests 50-page RCTs and extracts 7 relational sheets in under 45 seconds.</a:t>
             </a:r>
           </a:p>
@@ -8724,6 +11829,7 @@
               </a:defRPr>
             </a:pPr>
             <a:r>
+              <a:rPr dirty="0"/>
               <a:t>• Verbatim Page &amp; Quote Provenance: Every single number is bound to exact source coordinates.</a:t>
             </a:r>
           </a:p>
@@ -8739,6 +11845,7 @@
               </a:defRPr>
             </a:pPr>
             <a:r>
+              <a:rPr dirty="0"/>
               <a:t>• Pure metafor Biostatistics: Python REML, Knapp-Hartung, and graph-theoretic NMA.</a:t>
             </a:r>
           </a:p>
@@ -8754,6 +11861,7 @@
               </a:defRPr>
             </a:pPr>
             <a:r>
+              <a:rPr dirty="0"/>
               <a:t>• In-Silico Virtual Trials: Imputes unmeasured endpoints and designs the next breakthrough trial.</a:t>
             </a:r>
           </a:p>
@@ -8840,7 +11948,7 @@
 </file>
 
 <file path=ppt/slides/slide4.xml><?xml version="1.0" encoding="utf-8"?>
-<p:sld xmlns:a="http://schemas.openxmlformats.org/drawingml/2006/main" xmlns:p="http://schemas.openxmlformats.org/presentationml/2006/main" xmlns:r="http://schemas.openxmlformats.org/officeDocument/2006/relationships">
+<p:sld xmlns:a="http://schemas.openxmlformats.org/drawingml/2006/main" xmlns:r="http://schemas.openxmlformats.org/officeDocument/2006/relationships" xmlns:p="http://schemas.openxmlformats.org/presentationml/2006/main">
   <p:cSld>
     <p:spTree>
       <p:nvGrpSpPr>
@@ -8848,7 +11956,14 @@
         <p:cNvGrpSpPr/>
         <p:nvPr/>
       </p:nvGrpSpPr>
-      <p:grpSpPr/>
+      <p:grpSpPr>
+        <a:xfrm>
+          <a:off x="0" y="0"/>
+          <a:ext cx="0" cy="0"/>
+          <a:chOff x="0" y="0"/>
+          <a:chExt cx="0" cy="0"/>
+        </a:xfrm>
+      </p:grpSpPr>
       <p:sp>
         <p:nvSpPr>
           <p:cNvPr id="2" name="Rectangle 1"/>
@@ -8889,6 +12004,7 @@
           <a:lstStyle/>
           <a:p>
             <a:pPr algn="ctr"/>
+            <a:endParaRPr/>
           </a:p>
         </p:txBody>
       </p:sp>
@@ -9040,6 +12156,7 @@
           <a:lstStyle/>
           <a:p>
             <a:pPr algn="ctr"/>
+            <a:endParaRPr/>
           </a:p>
         </p:txBody>
       </p:sp>
@@ -9081,7 +12198,7 @@
           </a:fontRef>
         </p:style>
         <p:txBody>
-          <a:bodyPr rtlCol="0" anchor="ctr" wrap="square" lIns="182880" tIns="182880"/>
+          <a:bodyPr wrap="square" lIns="182880" tIns="182880" rtlCol="0" anchor="ctr"/>
           <a:lstStyle/>
           <a:p>
             <a:pPr algn="ctr">
@@ -9165,7 +12282,7 @@
           </a:fontRef>
         </p:style>
         <p:txBody>
-          <a:bodyPr rtlCol="0" anchor="ctr" wrap="square" lIns="182880" tIns="182880"/>
+          <a:bodyPr wrap="square" lIns="182880" tIns="182880" rtlCol="0" anchor="ctr"/>
           <a:lstStyle/>
           <a:p>
             <a:pPr algn="ctr">
@@ -9249,7 +12366,7 @@
           </a:fontRef>
         </p:style>
         <p:txBody>
-          <a:bodyPr rtlCol="0" anchor="ctr" wrap="square" lIns="182880" tIns="182880"/>
+          <a:bodyPr wrap="square" lIns="182880" tIns="182880" rtlCol="0" anchor="ctr"/>
           <a:lstStyle/>
           <a:p>
             <a:pPr algn="ctr">
@@ -9260,6 +12377,7 @@
               </a:defRPr>
             </a:pPr>
             <a:r>
+              <a:rPr dirty="0"/>
               <a:t>LAYER 3 · BIOSTATISTICS</a:t>
             </a:r>
           </a:p>
@@ -9275,7 +12393,16 @@
               </a:defRPr>
             </a:pPr>
             <a:r>
-              <a:t>metafor &amp; netmeta Core</a:t>
+              <a:rPr dirty="0"/>
+              <a:t>metafor &amp; </a:t>
+            </a:r>
+            <a:r>
+              <a:rPr dirty="0" err="1"/>
+              <a:t>netmeta</a:t>
+            </a:r>
+            <a:r>
+              <a:rPr dirty="0"/>
+              <a:t> Core</a:t>
             </a:r>
           </a:p>
           <a:p>
@@ -9290,7 +12417,24 @@
               </a:defRPr>
             </a:pPr>
             <a:r>
-              <a:t>Replicates Wolfgang Viechtbauer's R metafor package in Python: REML, DerSimonian-Laird, Knapp-Hartung, and Bucher NMA.</a:t>
+              <a:rPr dirty="0"/>
+              <a:t>Replicates Wolfgang </a:t>
+            </a:r>
+            <a:r>
+              <a:rPr dirty="0" err="1"/>
+              <a:t>Viechtbauer's</a:t>
+            </a:r>
+            <a:r>
+              <a:rPr dirty="0"/>
+              <a:t> R metafor package in Python: REML, </a:t>
+            </a:r>
+            <a:r>
+              <a:rPr dirty="0" err="1"/>
+              <a:t>DerSimonian</a:t>
+            </a:r>
+            <a:r>
+              <a:rPr dirty="0"/>
+              <a:t>-Laird, Knapp-Hartung, and Bucher NMA.</a:t>
             </a:r>
           </a:p>
         </p:txBody>
@@ -9333,7 +12477,7 @@
           </a:fontRef>
         </p:style>
         <p:txBody>
-          <a:bodyPr rtlCol="0" anchor="ctr" wrap="square" lIns="182880" tIns="182880"/>
+          <a:bodyPr wrap="square" lIns="182880" tIns="182880" rtlCol="0" anchor="ctr"/>
           <a:lstStyle/>
           <a:p>
             <a:pPr algn="ctr">
@@ -9417,7 +12561,7 @@
           </a:fontRef>
         </p:style>
         <p:txBody>
-          <a:bodyPr rtlCol="0" anchor="ctr" wrap="square" lIns="274320"/>
+          <a:bodyPr wrap="square" lIns="274320" rtlCol="0" anchor="ctr"/>
           <a:lstStyle/>
           <a:p>
             <a:pPr algn="ctr">
@@ -9529,7 +12673,7 @@
 </file>
 
 <file path=ppt/slides/slide5.xml><?xml version="1.0" encoding="utf-8"?>
-<p:sld xmlns:a="http://schemas.openxmlformats.org/drawingml/2006/main" xmlns:p="http://schemas.openxmlformats.org/presentationml/2006/main" xmlns:r="http://schemas.openxmlformats.org/officeDocument/2006/relationships">
+<p:sld xmlns:a="http://schemas.openxmlformats.org/drawingml/2006/main" xmlns:r="http://schemas.openxmlformats.org/officeDocument/2006/relationships" xmlns:p="http://schemas.openxmlformats.org/presentationml/2006/main">
   <p:cSld>
     <p:spTree>
       <p:nvGrpSpPr>
@@ -9537,7 +12681,14 @@
         <p:cNvGrpSpPr/>
         <p:nvPr/>
       </p:nvGrpSpPr>
-      <p:grpSpPr/>
+      <p:grpSpPr>
+        <a:xfrm>
+          <a:off x="0" y="0"/>
+          <a:ext cx="0" cy="0"/>
+          <a:chOff x="0" y="0"/>
+          <a:chExt cx="0" cy="0"/>
+        </a:xfrm>
+      </p:grpSpPr>
       <p:sp>
         <p:nvSpPr>
           <p:cNvPr id="2" name="Rectangle 1"/>
@@ -9578,6 +12729,7 @@
           <a:lstStyle/>
           <a:p>
             <a:pPr algn="ctr"/>
+            <a:endParaRPr/>
           </a:p>
         </p:txBody>
       </p:sp>
@@ -9729,6 +12881,7 @@
           <a:lstStyle/>
           <a:p>
             <a:pPr algn="ctr"/>
+            <a:endParaRPr/>
           </a:p>
         </p:txBody>
       </p:sp>
@@ -9770,7 +12923,7 @@
           </a:fontRef>
         </p:style>
         <p:txBody>
-          <a:bodyPr rtlCol="0" anchor="ctr" wrap="square" lIns="182880"/>
+          <a:bodyPr wrap="square" lIns="182880" rtlCol="0" anchor="ctr"/>
           <a:lstStyle/>
           <a:p>
             <a:pPr algn="ctr">
@@ -9851,7 +13004,7 @@
           </a:fontRef>
         </p:style>
         <p:txBody>
-          <a:bodyPr rtlCol="0" anchor="ctr" wrap="square" lIns="182880"/>
+          <a:bodyPr wrap="square" lIns="182880" rtlCol="0" anchor="ctr"/>
           <a:lstStyle/>
           <a:p>
             <a:pPr algn="ctr">
@@ -9932,7 +13085,7 @@
           </a:fontRef>
         </p:style>
         <p:txBody>
-          <a:bodyPr rtlCol="0" anchor="ctr" wrap="square" lIns="182880"/>
+          <a:bodyPr wrap="square" lIns="182880" rtlCol="0" anchor="ctr"/>
           <a:lstStyle/>
           <a:p>
             <a:pPr algn="ctr">
@@ -10013,7 +13166,7 @@
           </a:fontRef>
         </p:style>
         <p:txBody>
-          <a:bodyPr rtlCol="0" anchor="ctr" wrap="square" lIns="182880"/>
+          <a:bodyPr wrap="square" lIns="182880" rtlCol="0" anchor="ctr"/>
           <a:lstStyle/>
           <a:p>
             <a:pPr algn="ctr">
@@ -10094,7 +13247,7 @@
           </a:fontRef>
         </p:style>
         <p:txBody>
-          <a:bodyPr rtlCol="0" anchor="ctr" wrap="square" lIns="182880"/>
+          <a:bodyPr wrap="square" lIns="182880" rtlCol="0" anchor="ctr"/>
           <a:lstStyle/>
           <a:p>
             <a:pPr algn="ctr">
@@ -10175,7 +13328,7 @@
           </a:fontRef>
         </p:style>
         <p:txBody>
-          <a:bodyPr rtlCol="0" anchor="ctr" wrap="square" lIns="182880"/>
+          <a:bodyPr wrap="square" lIns="182880" rtlCol="0" anchor="ctr"/>
           <a:lstStyle/>
           <a:p>
             <a:pPr algn="ctr">
@@ -10256,7 +13409,7 @@
           </a:fontRef>
         </p:style>
         <p:txBody>
-          <a:bodyPr rtlCol="0" anchor="ctr" wrap="square" lIns="182880"/>
+          <a:bodyPr wrap="square" lIns="182880" rtlCol="0" anchor="ctr"/>
           <a:lstStyle/>
           <a:p>
             <a:pPr algn="ctr">
@@ -10337,7 +13490,7 @@
           </a:fontRef>
         </p:style>
         <p:txBody>
-          <a:bodyPr rtlCol="0" anchor="ctr" wrap="square" lIns="182880"/>
+          <a:bodyPr wrap="square" lIns="182880" rtlCol="0" anchor="ctr"/>
           <a:lstStyle/>
           <a:p>
             <a:pPr algn="ctr">
@@ -10461,7 +13614,7 @@
 </file>
 
 <file path=ppt/slides/slide6.xml><?xml version="1.0" encoding="utf-8"?>
-<p:sld xmlns:a="http://schemas.openxmlformats.org/drawingml/2006/main" xmlns:p="http://schemas.openxmlformats.org/presentationml/2006/main" xmlns:r="http://schemas.openxmlformats.org/officeDocument/2006/relationships">
+<p:sld xmlns:a="http://schemas.openxmlformats.org/drawingml/2006/main" xmlns:r="http://schemas.openxmlformats.org/officeDocument/2006/relationships" xmlns:p="http://schemas.openxmlformats.org/presentationml/2006/main">
   <p:cSld>
     <p:spTree>
       <p:nvGrpSpPr>
@@ -10469,7 +13622,14 @@
         <p:cNvGrpSpPr/>
         <p:nvPr/>
       </p:nvGrpSpPr>
-      <p:grpSpPr/>
+      <p:grpSpPr>
+        <a:xfrm>
+          <a:off x="0" y="0"/>
+          <a:ext cx="0" cy="0"/>
+          <a:chOff x="0" y="0"/>
+          <a:chExt cx="0" cy="0"/>
+        </a:xfrm>
+      </p:grpSpPr>
       <p:sp>
         <p:nvSpPr>
           <p:cNvPr id="2" name="Rectangle 1"/>
@@ -10510,6 +13670,7 @@
           <a:lstStyle/>
           <a:p>
             <a:pPr algn="ctr"/>
+            <a:endParaRPr/>
           </a:p>
         </p:txBody>
       </p:sp>
@@ -10661,6 +13822,7 @@
           <a:lstStyle/>
           <a:p>
             <a:pPr algn="ctr"/>
+            <a:endParaRPr/>
           </a:p>
         </p:txBody>
       </p:sp>
@@ -10683,10 +13845,34 @@
                 <a:tableStyleId>{5C22544A-7EE6-4342-B048-85BDC9FD1C3A}</a:tableStyleId>
               </a:tblPr>
               <a:tblGrid>
-                <a:gridCol w="2194560"/>
-                <a:gridCol w="2194560"/>
-                <a:gridCol w="3840480"/>
-                <a:gridCol w="2499055"/>
+                <a:gridCol w="2194560">
+                  <a:extLst>
+                    <a:ext uri="{9D8B030D-6E8A-4147-A177-3AD203B41FA5}">
+                      <a16:colId xmlns:a16="http://schemas.microsoft.com/office/drawing/2014/main" val="20000"/>
+                    </a:ext>
+                  </a:extLst>
+                </a:gridCol>
+                <a:gridCol w="2194560">
+                  <a:extLst>
+                    <a:ext uri="{9D8B030D-6E8A-4147-A177-3AD203B41FA5}">
+                      <a16:colId xmlns:a16="http://schemas.microsoft.com/office/drawing/2014/main" val="20001"/>
+                    </a:ext>
+                  </a:extLst>
+                </a:gridCol>
+                <a:gridCol w="3840480">
+                  <a:extLst>
+                    <a:ext uri="{9D8B030D-6E8A-4147-A177-3AD203B41FA5}">
+                      <a16:colId xmlns:a16="http://schemas.microsoft.com/office/drawing/2014/main" val="20002"/>
+                    </a:ext>
+                  </a:extLst>
+                </a:gridCol>
+                <a:gridCol w="2499055">
+                  <a:extLst>
+                    <a:ext uri="{9D8B030D-6E8A-4147-A177-3AD203B41FA5}">
+                      <a16:colId xmlns:a16="http://schemas.microsoft.com/office/drawing/2014/main" val="20003"/>
+                    </a:ext>
+                  </a:extLst>
+                </a:gridCol>
               </a:tblGrid>
               <a:tr h="537210">
                 <a:tc>
@@ -10781,6 +13967,11 @@
                     </a:solidFill>
                   </a:tcPr>
                 </a:tc>
+                <a:extLst>
+                  <a:ext uri="{0D108BD9-81ED-4DB2-BD59-A6C34878D82A}">
+                    <a16:rowId xmlns:a16="http://schemas.microsoft.com/office/drawing/2014/main" val="10000"/>
+                  </a:ext>
+                </a:extLst>
               </a:tr>
               <a:tr h="537210">
                 <a:tc>
@@ -10875,6 +14066,11 @@
                     </a:solidFill>
                   </a:tcPr>
                 </a:tc>
+                <a:extLst>
+                  <a:ext uri="{0D108BD9-81ED-4DB2-BD59-A6C34878D82A}">
+                    <a16:rowId xmlns:a16="http://schemas.microsoft.com/office/drawing/2014/main" val="10001"/>
+                  </a:ext>
+                </a:extLst>
               </a:tr>
               <a:tr h="537210">
                 <a:tc>
@@ -10969,6 +14165,11 @@
                     </a:solidFill>
                   </a:tcPr>
                 </a:tc>
+                <a:extLst>
+                  <a:ext uri="{0D108BD9-81ED-4DB2-BD59-A6C34878D82A}">
+                    <a16:rowId xmlns:a16="http://schemas.microsoft.com/office/drawing/2014/main" val="10002"/>
+                  </a:ext>
+                </a:extLst>
               </a:tr>
               <a:tr h="537210">
                 <a:tc>
@@ -11063,6 +14264,11 @@
                     </a:solidFill>
                   </a:tcPr>
                 </a:tc>
+                <a:extLst>
+                  <a:ext uri="{0D108BD9-81ED-4DB2-BD59-A6C34878D82A}">
+                    <a16:rowId xmlns:a16="http://schemas.microsoft.com/office/drawing/2014/main" val="10003"/>
+                  </a:ext>
+                </a:extLst>
               </a:tr>
               <a:tr h="537210">
                 <a:tc>
@@ -11157,6 +14363,11 @@
                     </a:solidFill>
                   </a:tcPr>
                 </a:tc>
+                <a:extLst>
+                  <a:ext uri="{0D108BD9-81ED-4DB2-BD59-A6C34878D82A}">
+                    <a16:rowId xmlns:a16="http://schemas.microsoft.com/office/drawing/2014/main" val="10004"/>
+                  </a:ext>
+                </a:extLst>
               </a:tr>
               <a:tr h="537210">
                 <a:tc>
@@ -11251,6 +14462,11 @@
                     </a:solidFill>
                   </a:tcPr>
                 </a:tc>
+                <a:extLst>
+                  <a:ext uri="{0D108BD9-81ED-4DB2-BD59-A6C34878D82A}">
+                    <a16:rowId xmlns:a16="http://schemas.microsoft.com/office/drawing/2014/main" val="10005"/>
+                  </a:ext>
+                </a:extLst>
               </a:tr>
               <a:tr h="537210">
                 <a:tc>
@@ -11345,6 +14561,11 @@
                     </a:solidFill>
                   </a:tcPr>
                 </a:tc>
+                <a:extLst>
+                  <a:ext uri="{0D108BD9-81ED-4DB2-BD59-A6C34878D82A}">
+                    <a16:rowId xmlns:a16="http://schemas.microsoft.com/office/drawing/2014/main" val="10006"/>
+                  </a:ext>
+                </a:extLst>
               </a:tr>
               <a:tr h="537210">
                 <a:tc>
@@ -11439,6 +14660,11 @@
                     </a:solidFill>
                   </a:tcPr>
                 </a:tc>
+                <a:extLst>
+                  <a:ext uri="{0D108BD9-81ED-4DB2-BD59-A6C34878D82A}">
+                    <a16:rowId xmlns:a16="http://schemas.microsoft.com/office/drawing/2014/main" val="10007"/>
+                  </a:ext>
+                </a:extLst>
               </a:tr>
             </a:tbl>
           </a:graphicData>
@@ -11525,7 +14751,7 @@
 </file>
 
 <file path=ppt/slides/slide7.xml><?xml version="1.0" encoding="utf-8"?>
-<p:sld xmlns:a="http://schemas.openxmlformats.org/drawingml/2006/main" xmlns:p="http://schemas.openxmlformats.org/presentationml/2006/main" xmlns:r="http://schemas.openxmlformats.org/officeDocument/2006/relationships">
+<p:sld xmlns:a="http://schemas.openxmlformats.org/drawingml/2006/main" xmlns:r="http://schemas.openxmlformats.org/officeDocument/2006/relationships" xmlns:p="http://schemas.openxmlformats.org/presentationml/2006/main">
   <p:cSld>
     <p:spTree>
       <p:nvGrpSpPr>
@@ -11533,7 +14759,14 @@
         <p:cNvGrpSpPr/>
         <p:nvPr/>
       </p:nvGrpSpPr>
-      <p:grpSpPr/>
+      <p:grpSpPr>
+        <a:xfrm>
+          <a:off x="0" y="0"/>
+          <a:ext cx="0" cy="0"/>
+          <a:chOff x="0" y="0"/>
+          <a:chExt cx="0" cy="0"/>
+        </a:xfrm>
+      </p:grpSpPr>
       <p:sp>
         <p:nvSpPr>
           <p:cNvPr id="2" name="Rectangle 1"/>
@@ -11574,6 +14807,7 @@
           <a:lstStyle/>
           <a:p>
             <a:pPr algn="ctr"/>
+            <a:endParaRPr/>
           </a:p>
         </p:txBody>
       </p:sp>
@@ -11644,6 +14878,7 @@
               </a:defRPr>
             </a:pPr>
             <a:r>
+              <a:rPr dirty="0"/>
               <a:t>Multi-Trial Evidence Synthesis &amp; metafor Biostatistics</a:t>
             </a:r>
           </a:p>
@@ -11725,6 +14960,7 @@
           <a:lstStyle/>
           <a:p>
             <a:pPr algn="ctr"/>
+            <a:endParaRPr/>
           </a:p>
         </p:txBody>
       </p:sp>
@@ -11766,7 +15002,7 @@
           </a:fontRef>
         </p:style>
         <p:txBody>
-          <a:bodyPr rtlCol="0" anchor="ctr" wrap="square" lIns="274320"/>
+          <a:bodyPr wrap="square" lIns="274320" rtlCol="0" anchor="ctr"/>
           <a:lstStyle/>
           <a:p>
             <a:pPr algn="ctr">
@@ -11895,7 +15131,7 @@
           </a:fontRef>
         </p:style>
         <p:txBody>
-          <a:bodyPr rtlCol="0" anchor="ctr" wrap="square" lIns="274320"/>
+          <a:bodyPr wrap="square" lIns="274320" rtlCol="0" anchor="ctr"/>
           <a:lstStyle/>
           <a:p>
             <a:pPr algn="ctr">
@@ -12067,7 +15303,7 @@
 </file>
 
 <file path=ppt/slides/slide8.xml><?xml version="1.0" encoding="utf-8"?>
-<p:sld xmlns:a="http://schemas.openxmlformats.org/drawingml/2006/main" xmlns:p="http://schemas.openxmlformats.org/presentationml/2006/main" xmlns:r="http://schemas.openxmlformats.org/officeDocument/2006/relationships">
+<p:sld xmlns:a="http://schemas.openxmlformats.org/drawingml/2006/main" xmlns:r="http://schemas.openxmlformats.org/officeDocument/2006/relationships" xmlns:p="http://schemas.openxmlformats.org/presentationml/2006/main">
   <p:cSld>
     <p:spTree>
       <p:nvGrpSpPr>
@@ -12075,7 +15311,14 @@
         <p:cNvGrpSpPr/>
         <p:nvPr/>
       </p:nvGrpSpPr>
-      <p:grpSpPr/>
+      <p:grpSpPr>
+        <a:xfrm>
+          <a:off x="0" y="0"/>
+          <a:ext cx="0" cy="0"/>
+          <a:chOff x="0" y="0"/>
+          <a:chExt cx="0" cy="0"/>
+        </a:xfrm>
+      </p:grpSpPr>
       <p:sp>
         <p:nvSpPr>
           <p:cNvPr id="2" name="Rectangle 1"/>
@@ -12116,6 +15359,7 @@
           <a:lstStyle/>
           <a:p>
             <a:pPr algn="ctr"/>
+            <a:endParaRPr/>
           </a:p>
         </p:txBody>
       </p:sp>
@@ -12267,6 +15511,7 @@
           <a:lstStyle/>
           <a:p>
             <a:pPr algn="ctr"/>
+            <a:endParaRPr/>
           </a:p>
         </p:txBody>
       </p:sp>
@@ -12308,7 +15553,7 @@
           </a:fontRef>
         </p:style>
         <p:txBody>
-          <a:bodyPr rtlCol="0" anchor="ctr" wrap="square" lIns="274320"/>
+          <a:bodyPr wrap="square" lIns="274320" rtlCol="0" anchor="ctr"/>
           <a:lstStyle/>
           <a:p>
             <a:pPr algn="ctr">
@@ -12392,7 +15637,7 @@
           </a:fontRef>
         </p:style>
         <p:txBody>
-          <a:bodyPr rtlCol="0" anchor="ctr" wrap="square" lIns="274320"/>
+          <a:bodyPr wrap="square" lIns="274320" rtlCol="0" anchor="ctr"/>
           <a:lstStyle/>
           <a:p>
             <a:pPr algn="ctr">
@@ -12476,7 +15721,7 @@
           </a:fontRef>
         </p:style>
         <p:txBody>
-          <a:bodyPr rtlCol="0" anchor="ctr" wrap="square" lIns="274320"/>
+          <a:bodyPr wrap="square" lIns="274320" rtlCol="0" anchor="ctr"/>
           <a:lstStyle/>
           <a:p>
             <a:pPr algn="ctr">
@@ -12603,7 +15848,7 @@
 </file>
 
 <file path=ppt/slides/slide9.xml><?xml version="1.0" encoding="utf-8"?>
-<p:sld xmlns:a="http://schemas.openxmlformats.org/drawingml/2006/main" xmlns:p="http://schemas.openxmlformats.org/presentationml/2006/main" xmlns:r="http://schemas.openxmlformats.org/officeDocument/2006/relationships">
+<p:sld xmlns:a="http://schemas.openxmlformats.org/drawingml/2006/main" xmlns:r="http://schemas.openxmlformats.org/officeDocument/2006/relationships" xmlns:p="http://schemas.openxmlformats.org/presentationml/2006/main">
   <p:cSld>
     <p:spTree>
       <p:nvGrpSpPr>
@@ -12611,7 +15856,14 @@
         <p:cNvGrpSpPr/>
         <p:nvPr/>
       </p:nvGrpSpPr>
-      <p:grpSpPr/>
+      <p:grpSpPr>
+        <a:xfrm>
+          <a:off x="0" y="0"/>
+          <a:ext cx="0" cy="0"/>
+          <a:chOff x="0" y="0"/>
+          <a:chExt cx="0" cy="0"/>
+        </a:xfrm>
+      </p:grpSpPr>
       <p:sp>
         <p:nvSpPr>
           <p:cNvPr id="2" name="Rectangle 1"/>
@@ -12652,6 +15904,7 @@
           <a:lstStyle/>
           <a:p>
             <a:pPr algn="ctr"/>
+            <a:endParaRPr/>
           </a:p>
         </p:txBody>
       </p:sp>
@@ -12803,6 +16056,7 @@
           <a:lstStyle/>
           <a:p>
             <a:pPr algn="ctr"/>
+            <a:endParaRPr/>
           </a:p>
         </p:txBody>
       </p:sp>
@@ -12844,7 +16098,7 @@
           </a:fontRef>
         </p:style>
         <p:txBody>
-          <a:bodyPr rtlCol="0" anchor="ctr" wrap="square" lIns="274320"/>
+          <a:bodyPr wrap="square" lIns="274320" rtlCol="0" anchor="ctr"/>
           <a:lstStyle/>
           <a:p>
             <a:pPr algn="ctr">
@@ -12913,7 +16167,7 @@
           </a:fontRef>
         </p:style>
         <p:txBody>
-          <a:bodyPr rtlCol="0" anchor="ctr" wrap="square" lIns="274320"/>
+          <a:bodyPr wrap="square" lIns="274320" rtlCol="0" anchor="ctr"/>
           <a:lstStyle/>
           <a:p>
             <a:pPr algn="ctr">
@@ -12982,7 +16236,7 @@
           </a:fontRef>
         </p:style>
         <p:txBody>
-          <a:bodyPr rtlCol="0" anchor="ctr" wrap="square" lIns="274320"/>
+          <a:bodyPr wrap="square" lIns="274320" rtlCol="0" anchor="ctr"/>
           <a:lstStyle/>
           <a:p>
             <a:pPr algn="ctr">
@@ -13051,7 +16305,7 @@
           </a:fontRef>
         </p:style>
         <p:txBody>
-          <a:bodyPr rtlCol="0" anchor="ctr" wrap="square" lIns="274320"/>
+          <a:bodyPr wrap="square" lIns="274320" rtlCol="0" anchor="ctr"/>
           <a:lstStyle/>
           <a:p>
             <a:pPr algn="ctr">
